--- a/docs/ppt/中期tmp.pptx
+++ b/docs/ppt/中期tmp.pptx
@@ -5,13 +5,10 @@
     <p:sldMasterId id="2147483648" r:id="rId1"/>
   </p:sldMasterIdLst>
   <p:notesMasterIdLst>
-    <p:notesMasterId r:id="rId6"/>
+    <p:notesMasterId r:id="rId3"/>
   </p:notesMasterIdLst>
   <p:sldIdLst>
-    <p:sldId id="289" r:id="rId2"/>
-    <p:sldId id="292" r:id="rId3"/>
-    <p:sldId id="295" r:id="rId4"/>
-    <p:sldId id="298" r:id="rId5"/>
+    <p:sldId id="268" r:id="rId2"/>
   </p:sldIdLst>
   <p:sldSz cx="12192000" cy="6858000"/>
   <p:notesSz cx="6858000" cy="9144000"/>
@@ -110,6 +107,11 @@
       </a:defRPr>
     </a:lvl9pPr>
   </p:defaultTextStyle>
+  <p:extLst>
+    <p:ext uri="{EFAFB233-063F-42B5-8137-9DF3F51BA10A}">
+      <p15:sldGuideLst xmlns:p15="http://schemas.microsoft.com/office/powerpoint/2012/main"/>
+    </p:ext>
+  </p:extLst>
 </p:presentation>
 </file>
 
@@ -195,7 +197,7 @@
           <a:p>
             <a:fld id="{12B691FD-C0A5-471A-8868-FCDA83FE4C83}" type="datetimeFigureOut">
               <a:rPr lang="zh-CN" altLang="en-US" smtClean="0"/>
-              <a:t>2026/3/30</a:t>
+              <a:t>2026/3/31</a:t>
             </a:fld>
             <a:endParaRPr lang="zh-CN" altLang="en-US"/>
           </a:p>
@@ -555,285 +557,6 @@
 </p:notes>
 </file>
 
-<file path=ppt/notesSlides/notesSlide2.xml><?xml version="1.0" encoding="utf-8"?>
-<p:notes xmlns:a="http://schemas.openxmlformats.org/drawingml/2006/main" xmlns:r="http://schemas.openxmlformats.org/officeDocument/2006/relationships" xmlns:p="http://schemas.openxmlformats.org/presentationml/2006/main">
-  <p:cSld>
-    <p:spTree>
-      <p:nvGrpSpPr>
-        <p:cNvPr id="1" name=""/>
-        <p:cNvGrpSpPr/>
-        <p:nvPr/>
-      </p:nvGrpSpPr>
-      <p:grpSpPr>
-        <a:xfrm>
-          <a:off x="0" y="0"/>
-          <a:ext cx="0" cy="0"/>
-          <a:chOff x="0" y="0"/>
-          <a:chExt cx="0" cy="0"/>
-        </a:xfrm>
-      </p:grpSpPr>
-      <p:sp>
-        <p:nvSpPr>
-          <p:cNvPr id="2" name="Slide Image Placeholder 1"/>
-          <p:cNvSpPr>
-            <a:spLocks noGrp="1" noRot="1" noChangeAspect="1"/>
-          </p:cNvSpPr>
-          <p:nvPr>
-            <p:ph type="sldImg"/>
-            <p:custDataLst>
-              <p:tags r:id="rId1"/>
-            </p:custDataLst>
-          </p:nvPr>
-        </p:nvSpPr>
-        <p:spPr/>
-      </p:sp>
-      <p:sp>
-        <p:nvSpPr>
-          <p:cNvPr id="3" name="Notes Placeholder 2"/>
-          <p:cNvSpPr>
-            <a:spLocks noGrp="1"/>
-          </p:cNvSpPr>
-          <p:nvPr>
-            <p:ph type="body" idx="1"/>
-            <p:custDataLst>
-              <p:tags r:id="rId2"/>
-            </p:custDataLst>
-          </p:nvPr>
-        </p:nvSpPr>
-        <p:spPr/>
-        <p:txBody>
-          <a:bodyPr/>
-          <a:lstStyle/>
-          <a:p>
-            <a:endParaRPr lang="en-US"/>
-          </a:p>
-        </p:txBody>
-      </p:sp>
-      <p:sp>
-        <p:nvSpPr>
-          <p:cNvPr id="4" name="Slide Number Placeholder 3"/>
-          <p:cNvSpPr>
-            <a:spLocks noGrp="1"/>
-          </p:cNvSpPr>
-          <p:nvPr>
-            <p:ph type="sldNum" sz="quarter" idx="10"/>
-            <p:custDataLst>
-              <p:tags r:id="rId3"/>
-            </p:custDataLst>
-          </p:nvPr>
-        </p:nvSpPr>
-        <p:spPr/>
-        <p:txBody>
-          <a:bodyPr/>
-          <a:lstStyle/>
-          <a:p>
-            <a:fld id="{F7021451-1387-4CA6-816F-3879F97B5CBC}" type="slidenum">
-              <a:rPr lang="en-US"/>
-              <a:t>2</a:t>
-            </a:fld>
-            <a:endParaRPr lang="en-US"/>
-          </a:p>
-        </p:txBody>
-      </p:sp>
-    </p:spTree>
-    <p:extLst>
-      <p:ext uri="{BB962C8B-B14F-4D97-AF65-F5344CB8AC3E}">
-        <p14:creationId xmlns:p14="http://schemas.microsoft.com/office/powerpoint/2010/main" val="1024086991"/>
-      </p:ext>
-    </p:extLst>
-  </p:cSld>
-  <p:clrMapOvr>
-    <a:masterClrMapping/>
-  </p:clrMapOvr>
-</p:notes>
-</file>
-
-<file path=ppt/notesSlides/notesSlide3.xml><?xml version="1.0" encoding="utf-8"?>
-<p:notes xmlns:a="http://schemas.openxmlformats.org/drawingml/2006/main" xmlns:r="http://schemas.openxmlformats.org/officeDocument/2006/relationships" xmlns:p="http://schemas.openxmlformats.org/presentationml/2006/main">
-  <p:cSld>
-    <p:spTree>
-      <p:nvGrpSpPr>
-        <p:cNvPr id="1" name=""/>
-        <p:cNvGrpSpPr/>
-        <p:nvPr/>
-      </p:nvGrpSpPr>
-      <p:grpSpPr>
-        <a:xfrm>
-          <a:off x="0" y="0"/>
-          <a:ext cx="0" cy="0"/>
-          <a:chOff x="0" y="0"/>
-          <a:chExt cx="0" cy="0"/>
-        </a:xfrm>
-      </p:grpSpPr>
-      <p:sp>
-        <p:nvSpPr>
-          <p:cNvPr id="2" name="Slide Image Placeholder 1"/>
-          <p:cNvSpPr>
-            <a:spLocks noGrp="1" noRot="1" noChangeAspect="1"/>
-          </p:cNvSpPr>
-          <p:nvPr>
-            <p:ph type="sldImg"/>
-            <p:custDataLst>
-              <p:tags r:id="rId1"/>
-            </p:custDataLst>
-          </p:nvPr>
-        </p:nvSpPr>
-        <p:spPr/>
-      </p:sp>
-      <p:sp>
-        <p:nvSpPr>
-          <p:cNvPr id="3" name="Notes Placeholder 2"/>
-          <p:cNvSpPr>
-            <a:spLocks noGrp="1"/>
-          </p:cNvSpPr>
-          <p:nvPr>
-            <p:ph type="body" idx="1"/>
-            <p:custDataLst>
-              <p:tags r:id="rId2"/>
-            </p:custDataLst>
-          </p:nvPr>
-        </p:nvSpPr>
-        <p:spPr/>
-        <p:txBody>
-          <a:bodyPr/>
-          <a:lstStyle/>
-          <a:p>
-            <a:endParaRPr lang="en-US"/>
-          </a:p>
-        </p:txBody>
-      </p:sp>
-      <p:sp>
-        <p:nvSpPr>
-          <p:cNvPr id="4" name="Slide Number Placeholder 3"/>
-          <p:cNvSpPr>
-            <a:spLocks noGrp="1"/>
-          </p:cNvSpPr>
-          <p:nvPr>
-            <p:ph type="sldNum" sz="quarter" idx="10"/>
-            <p:custDataLst>
-              <p:tags r:id="rId3"/>
-            </p:custDataLst>
-          </p:nvPr>
-        </p:nvSpPr>
-        <p:spPr/>
-        <p:txBody>
-          <a:bodyPr/>
-          <a:lstStyle/>
-          <a:p>
-            <a:fld id="{F7021451-1387-4CA6-816F-3879F97B5CBC}" type="slidenum">
-              <a:rPr lang="en-US"/>
-              <a:t>3</a:t>
-            </a:fld>
-            <a:endParaRPr lang="en-US"/>
-          </a:p>
-        </p:txBody>
-      </p:sp>
-    </p:spTree>
-    <p:extLst>
-      <p:ext uri="{BB962C8B-B14F-4D97-AF65-F5344CB8AC3E}">
-        <p14:creationId xmlns:p14="http://schemas.microsoft.com/office/powerpoint/2010/main" val="1024086991"/>
-      </p:ext>
-    </p:extLst>
-  </p:cSld>
-  <p:clrMapOvr>
-    <a:masterClrMapping/>
-  </p:clrMapOvr>
-</p:notes>
-</file>
-
-<file path=ppt/notesSlides/notesSlide4.xml><?xml version="1.0" encoding="utf-8"?>
-<p:notes xmlns:a="http://schemas.openxmlformats.org/drawingml/2006/main" xmlns:r="http://schemas.openxmlformats.org/officeDocument/2006/relationships" xmlns:p="http://schemas.openxmlformats.org/presentationml/2006/main">
-  <p:cSld>
-    <p:spTree>
-      <p:nvGrpSpPr>
-        <p:cNvPr id="1" name=""/>
-        <p:cNvGrpSpPr/>
-        <p:nvPr/>
-      </p:nvGrpSpPr>
-      <p:grpSpPr>
-        <a:xfrm>
-          <a:off x="0" y="0"/>
-          <a:ext cx="0" cy="0"/>
-          <a:chOff x="0" y="0"/>
-          <a:chExt cx="0" cy="0"/>
-        </a:xfrm>
-      </p:grpSpPr>
-      <p:sp>
-        <p:nvSpPr>
-          <p:cNvPr id="2" name="Slide Image Placeholder 1"/>
-          <p:cNvSpPr>
-            <a:spLocks noGrp="1" noRot="1" noChangeAspect="1"/>
-          </p:cNvSpPr>
-          <p:nvPr>
-            <p:ph type="sldImg"/>
-            <p:custDataLst>
-              <p:tags r:id="rId1"/>
-            </p:custDataLst>
-          </p:nvPr>
-        </p:nvSpPr>
-        <p:spPr/>
-      </p:sp>
-      <p:sp>
-        <p:nvSpPr>
-          <p:cNvPr id="3" name="Notes Placeholder 2"/>
-          <p:cNvSpPr>
-            <a:spLocks noGrp="1"/>
-          </p:cNvSpPr>
-          <p:nvPr>
-            <p:ph type="body" idx="1"/>
-            <p:custDataLst>
-              <p:tags r:id="rId2"/>
-            </p:custDataLst>
-          </p:nvPr>
-        </p:nvSpPr>
-        <p:spPr/>
-        <p:txBody>
-          <a:bodyPr/>
-          <a:lstStyle/>
-          <a:p>
-            <a:endParaRPr lang="en-US"/>
-          </a:p>
-        </p:txBody>
-      </p:sp>
-      <p:sp>
-        <p:nvSpPr>
-          <p:cNvPr id="4" name="Slide Number Placeholder 3"/>
-          <p:cNvSpPr>
-            <a:spLocks noGrp="1"/>
-          </p:cNvSpPr>
-          <p:nvPr>
-            <p:ph type="sldNum" sz="quarter" idx="10"/>
-            <p:custDataLst>
-              <p:tags r:id="rId3"/>
-            </p:custDataLst>
-          </p:nvPr>
-        </p:nvSpPr>
-        <p:spPr/>
-        <p:txBody>
-          <a:bodyPr/>
-          <a:lstStyle/>
-          <a:p>
-            <a:fld id="{F7021451-1387-4CA6-816F-3879F97B5CBC}" type="slidenum">
-              <a:rPr lang="en-US"/>
-              <a:t>4</a:t>
-            </a:fld>
-            <a:endParaRPr lang="en-US"/>
-          </a:p>
-        </p:txBody>
-      </p:sp>
-    </p:spTree>
-    <p:extLst>
-      <p:ext uri="{BB962C8B-B14F-4D97-AF65-F5344CB8AC3E}">
-        <p14:creationId xmlns:p14="http://schemas.microsoft.com/office/powerpoint/2010/main" val="1024086991"/>
-      </p:ext>
-    </p:extLst>
-  </p:cSld>
-  <p:clrMapOvr>
-    <a:masterClrMapping/>
-  </p:clrMapOvr>
-</p:notes>
-</file>
-
 <file path=ppt/slideLayouts/slideLayout1.xml><?xml version="1.0" encoding="utf-8"?>
 <p:sldLayout xmlns:a="http://schemas.openxmlformats.org/drawingml/2006/main" xmlns:r="http://schemas.openxmlformats.org/officeDocument/2006/relationships" xmlns:p="http://schemas.openxmlformats.org/presentationml/2006/main" type="title" preserve="1">
   <p:cSld name="标题幻灯片">
@@ -981,7 +704,7 @@
           <a:p>
             <a:fld id="{D0ECD108-A244-47A1-812A-3993BB25A90A}" type="datetimeFigureOut">
               <a:rPr lang="zh-CN" altLang="en-US" smtClean="0"/>
-              <a:t>2026/3/30</a:t>
+              <a:t>2026/3/31</a:t>
             </a:fld>
             <a:endParaRPr lang="zh-CN" altLang="en-US"/>
           </a:p>
@@ -1179,7 +902,7 @@
           <a:p>
             <a:fld id="{D0ECD108-A244-47A1-812A-3993BB25A90A}" type="datetimeFigureOut">
               <a:rPr lang="zh-CN" altLang="en-US" smtClean="0"/>
-              <a:t>2026/3/30</a:t>
+              <a:t>2026/3/31</a:t>
             </a:fld>
             <a:endParaRPr lang="zh-CN" altLang="en-US"/>
           </a:p>
@@ -1387,7 +1110,7 @@
           <a:p>
             <a:fld id="{D0ECD108-A244-47A1-812A-3993BB25A90A}" type="datetimeFigureOut">
               <a:rPr lang="zh-CN" altLang="en-US" smtClean="0"/>
-              <a:t>2026/3/30</a:t>
+              <a:t>2026/3/31</a:t>
             </a:fld>
             <a:endParaRPr lang="zh-CN" altLang="en-US"/>
           </a:p>
@@ -1485,7 +1208,7 @@
     </p:spTree>
     <p:extLst>
       <p:ext uri="{BB962C8B-B14F-4D97-AF65-F5344CB8AC3E}">
-        <p14:creationId xmlns:p14="http://schemas.microsoft.com/office/powerpoint/2010/main" val="3691043894"/>
+        <p14:creationId xmlns:p14="http://schemas.microsoft.com/office/powerpoint/2010/main" val="4065902961"/>
       </p:ext>
     </p:extLst>
   </p:cSld>
@@ -1621,7 +1344,7 @@
           <a:p>
             <a:fld id="{D0ECD108-A244-47A1-812A-3993BB25A90A}" type="datetimeFigureOut">
               <a:rPr lang="zh-CN" altLang="en-US" smtClean="0"/>
-              <a:t>2026/3/30</a:t>
+              <a:t>2026/3/31</a:t>
             </a:fld>
             <a:endParaRPr lang="zh-CN" altLang="en-US"/>
           </a:p>
@@ -1896,7 +1619,7 @@
           <a:p>
             <a:fld id="{D0ECD108-A244-47A1-812A-3993BB25A90A}" type="datetimeFigureOut">
               <a:rPr lang="zh-CN" altLang="en-US" smtClean="0"/>
-              <a:t>2026/3/30</a:t>
+              <a:t>2026/3/31</a:t>
             </a:fld>
             <a:endParaRPr lang="zh-CN" altLang="en-US"/>
           </a:p>
@@ -2161,7 +1884,7 @@
           <a:p>
             <a:fld id="{D0ECD108-A244-47A1-812A-3993BB25A90A}" type="datetimeFigureOut">
               <a:rPr lang="zh-CN" altLang="en-US" smtClean="0"/>
-              <a:t>2026/3/30</a:t>
+              <a:t>2026/3/31</a:t>
             </a:fld>
             <a:endParaRPr lang="zh-CN" altLang="en-US"/>
           </a:p>
@@ -2573,7 +2296,7 @@
           <a:p>
             <a:fld id="{D0ECD108-A244-47A1-812A-3993BB25A90A}" type="datetimeFigureOut">
               <a:rPr lang="zh-CN" altLang="en-US" smtClean="0"/>
-              <a:t>2026/3/30</a:t>
+              <a:t>2026/3/31</a:t>
             </a:fld>
             <a:endParaRPr lang="zh-CN" altLang="en-US"/>
           </a:p>
@@ -2714,7 +2437,7 @@
           <a:p>
             <a:fld id="{D0ECD108-A244-47A1-812A-3993BB25A90A}" type="datetimeFigureOut">
               <a:rPr lang="zh-CN" altLang="en-US" smtClean="0"/>
-              <a:t>2026/3/30</a:t>
+              <a:t>2026/3/31</a:t>
             </a:fld>
             <a:endParaRPr lang="zh-CN" altLang="en-US"/>
           </a:p>
@@ -2827,7 +2550,7 @@
           <a:p>
             <a:fld id="{D0ECD108-A244-47A1-812A-3993BB25A90A}" type="datetimeFigureOut">
               <a:rPr lang="zh-CN" altLang="en-US" smtClean="0"/>
-              <a:t>2026/3/30</a:t>
+              <a:t>2026/3/31</a:t>
             </a:fld>
             <a:endParaRPr lang="zh-CN" altLang="en-US"/>
           </a:p>
@@ -3138,7 +2861,7 @@
           <a:p>
             <a:fld id="{D0ECD108-A244-47A1-812A-3993BB25A90A}" type="datetimeFigureOut">
               <a:rPr lang="zh-CN" altLang="en-US" smtClean="0"/>
-              <a:t>2026/3/30</a:t>
+              <a:t>2026/3/31</a:t>
             </a:fld>
             <a:endParaRPr lang="zh-CN" altLang="en-US"/>
           </a:p>
@@ -3426,7 +3149,7 @@
           <a:p>
             <a:fld id="{D0ECD108-A244-47A1-812A-3993BB25A90A}" type="datetimeFigureOut">
               <a:rPr lang="zh-CN" altLang="en-US" smtClean="0"/>
-              <a:t>2026/3/30</a:t>
+              <a:t>2026/3/31</a:t>
             </a:fld>
             <a:endParaRPr lang="zh-CN" altLang="en-US"/>
           </a:p>
@@ -3667,7 +3390,7 @@
           <a:p>
             <a:fld id="{D0ECD108-A244-47A1-812A-3993BB25A90A}" type="datetimeFigureOut">
               <a:rPr lang="zh-CN" altLang="en-US" smtClean="0"/>
-              <a:t>2026/3/30</a:t>
+              <a:t>2026/3/31</a:t>
             </a:fld>
             <a:endParaRPr lang="zh-CN" altLang="en-US"/>
           </a:p>
@@ -4098,7 +3821,7 @@
           </p:nvPr>
         </p:nvPicPr>
         <p:blipFill>
-          <a:blip r:embed="rId5"/>
+          <a:blip r:embed="rId36"/>
           <a:stretch>
             <a:fillRect/>
           </a:stretch>
@@ -4126,7 +3849,7 @@
           </p:nvPr>
         </p:nvPicPr>
         <p:blipFill>
-          <a:blip r:embed="rId6"/>
+          <a:blip r:embed="rId37"/>
           <a:stretch>
             <a:fillRect/>
           </a:stretch>
@@ -4141,6 +3864,3076 @@
           </a:prstGeom>
         </p:spPr>
       </p:pic>
+      <p:grpSp>
+        <p:nvGrpSpPr>
+          <p:cNvPr id="37" name="组合 36"/>
+          <p:cNvGrpSpPr/>
+          <p:nvPr>
+            <p:custDataLst>
+              <p:tags r:id="rId3"/>
+            </p:custDataLst>
+          </p:nvPr>
+        </p:nvGrpSpPr>
+        <p:grpSpPr>
+          <a:xfrm>
+            <a:off x="4669827" y="1434142"/>
+            <a:ext cx="3246120" cy="2331720"/>
+            <a:chOff x="-635000" y="-635000"/>
+            <a:chExt cx="3246120" cy="2331720"/>
+          </a:xfrm>
+        </p:grpSpPr>
+        <p:pic>
+          <p:nvPicPr>
+            <p:cNvPr id="38" name="Image 2" descr="TEMP_Z_ORDER_2"/>
+            <p:cNvPicPr>
+              <a:picLocks noChangeAspect="1"/>
+            </p:cNvPicPr>
+            <p:nvPr>
+              <p:custDataLst>
+                <p:tags r:id="rId31"/>
+              </p:custDataLst>
+            </p:nvPr>
+          </p:nvPicPr>
+          <p:blipFill>
+            <a:blip r:embed="rId38">
+              <a:extLst>
+                <a:ext uri="{96DAC541-7B7A-43D3-8B79-37D633B846F1}">
+                  <asvg:svgBlip xmlns:asvg="http://schemas.microsoft.com/office/drawing/2016/SVG/main" r:embed="rId39"/>
+                </a:ext>
+              </a:extLst>
+            </a:blip>
+            <a:stretch>
+              <a:fillRect/>
+            </a:stretch>
+          </p:blipFill>
+          <p:spPr>
+            <a:xfrm>
+              <a:off x="-635000" y="-635000"/>
+              <a:ext cx="3246120" cy="2331720"/>
+            </a:xfrm>
+            <a:prstGeom prst="rect">
+              <a:avLst/>
+            </a:prstGeom>
+          </p:spPr>
+        </p:pic>
+        <p:sp>
+          <p:nvSpPr>
+            <p:cNvPr id="39" name="Text 0" descr="TEMP_Z_ORDER_3"/>
+            <p:cNvSpPr/>
+            <p:nvPr>
+              <p:custDataLst>
+                <p:tags r:id="rId32"/>
+              </p:custDataLst>
+            </p:nvPr>
+          </p:nvSpPr>
+          <p:spPr>
+            <a:xfrm>
+              <a:off x="-436880" y="-436880"/>
+              <a:ext cx="2859024" cy="351254"/>
+            </a:xfrm>
+            <a:prstGeom prst="rect">
+              <a:avLst/>
+            </a:prstGeom>
+            <a:noFill/>
+          </p:spPr>
+          <p:txBody>
+            <a:bodyPr wrap="square" lIns="0" tIns="0" rIns="0" bIns="0" rtlCol="0" anchor="t">
+              <a:spAutoFit/>
+            </a:bodyPr>
+            <a:lstStyle>
+              <a:lvl1pPr marL="0" algn="l" defTabSz="914400" rtl="0" eaLnBrk="1" latinLnBrk="0" hangingPunct="1">
+                <a:defRPr sz="1800" kern="1200">
+                  <a:solidFill>
+                    <a:schemeClr val="tx1"/>
+                  </a:solidFill>
+                  <a:latin typeface="+mn-lt"/>
+                  <a:ea typeface="+mn-ea"/>
+                  <a:cs typeface="+mn-cs"/>
+                </a:defRPr>
+              </a:lvl1pPr>
+              <a:lvl2pPr marL="457200" algn="l" defTabSz="914400" rtl="0" eaLnBrk="1" latinLnBrk="0" hangingPunct="1">
+                <a:defRPr sz="1800" kern="1200">
+                  <a:solidFill>
+                    <a:schemeClr val="tx1"/>
+                  </a:solidFill>
+                  <a:latin typeface="+mn-lt"/>
+                  <a:ea typeface="+mn-ea"/>
+                  <a:cs typeface="+mn-cs"/>
+                </a:defRPr>
+              </a:lvl2pPr>
+              <a:lvl3pPr marL="914400" algn="l" defTabSz="914400" rtl="0" eaLnBrk="1" latinLnBrk="0" hangingPunct="1">
+                <a:defRPr sz="1800" kern="1200">
+                  <a:solidFill>
+                    <a:schemeClr val="tx1"/>
+                  </a:solidFill>
+                  <a:latin typeface="+mn-lt"/>
+                  <a:ea typeface="+mn-ea"/>
+                  <a:cs typeface="+mn-cs"/>
+                </a:defRPr>
+              </a:lvl3pPr>
+              <a:lvl4pPr marL="1371600" algn="l" defTabSz="914400" rtl="0" eaLnBrk="1" latinLnBrk="0" hangingPunct="1">
+                <a:defRPr sz="1800" kern="1200">
+                  <a:solidFill>
+                    <a:schemeClr val="tx1"/>
+                  </a:solidFill>
+                  <a:latin typeface="+mn-lt"/>
+                  <a:ea typeface="+mn-ea"/>
+                  <a:cs typeface="+mn-cs"/>
+                </a:defRPr>
+              </a:lvl4pPr>
+              <a:lvl5pPr marL="1828800" algn="l" defTabSz="914400" rtl="0" eaLnBrk="1" latinLnBrk="0" hangingPunct="1">
+                <a:defRPr sz="1800" kern="1200">
+                  <a:solidFill>
+                    <a:schemeClr val="tx1"/>
+                  </a:solidFill>
+                  <a:latin typeface="+mn-lt"/>
+                  <a:ea typeface="+mn-ea"/>
+                  <a:cs typeface="+mn-cs"/>
+                </a:defRPr>
+              </a:lvl5pPr>
+              <a:lvl6pPr marL="2286000" algn="l" defTabSz="914400" rtl="0" eaLnBrk="1" latinLnBrk="0" hangingPunct="1">
+                <a:defRPr sz="1800" kern="1200">
+                  <a:solidFill>
+                    <a:schemeClr val="tx1"/>
+                  </a:solidFill>
+                  <a:latin typeface="+mn-lt"/>
+                  <a:ea typeface="+mn-ea"/>
+                  <a:cs typeface="+mn-cs"/>
+                </a:defRPr>
+              </a:lvl6pPr>
+              <a:lvl7pPr marL="2743200" algn="l" defTabSz="914400" rtl="0" eaLnBrk="1" latinLnBrk="0" hangingPunct="1">
+                <a:defRPr sz="1800" kern="1200">
+                  <a:solidFill>
+                    <a:schemeClr val="tx1"/>
+                  </a:solidFill>
+                  <a:latin typeface="+mn-lt"/>
+                  <a:ea typeface="+mn-ea"/>
+                  <a:cs typeface="+mn-cs"/>
+                </a:defRPr>
+              </a:lvl7pPr>
+              <a:lvl8pPr marL="3200400" algn="l" defTabSz="914400" rtl="0" eaLnBrk="1" latinLnBrk="0" hangingPunct="1">
+                <a:defRPr sz="1800" kern="1200">
+                  <a:solidFill>
+                    <a:schemeClr val="tx1"/>
+                  </a:solidFill>
+                  <a:latin typeface="+mn-lt"/>
+                  <a:ea typeface="+mn-ea"/>
+                  <a:cs typeface="+mn-cs"/>
+                </a:defRPr>
+              </a:lvl8pPr>
+              <a:lvl9pPr marL="3657600" algn="l" defTabSz="914400" rtl="0" eaLnBrk="1" latinLnBrk="0" hangingPunct="1">
+                <a:defRPr sz="1800" kern="1200">
+                  <a:solidFill>
+                    <a:schemeClr val="tx1"/>
+                  </a:solidFill>
+                  <a:latin typeface="+mn-lt"/>
+                  <a:ea typeface="+mn-ea"/>
+                  <a:cs typeface="+mn-cs"/>
+                </a:defRPr>
+              </a:lvl9pPr>
+            </a:lstStyle>
+            <a:p>
+              <a:pPr marL="0" indent="0" algn="l">
+                <a:lnSpc>
+                  <a:spcPts val="2880"/>
+                </a:lnSpc>
+                <a:buNone/>
+              </a:pPr>
+              <a:r>
+                <a:rPr lang="en-US" sz="1920">
+                  <a:solidFill>
+                    <a:srgbClr val="5A0767"/>
+                  </a:solidFill>
+                  <a:latin typeface="思源黑体 CN" pitchFamily="34" charset="0"/>
+                  <a:ea typeface="思源黑体 CN" pitchFamily="34" charset="-122"/>
+                  <a:cs typeface="思源黑体 CN" pitchFamily="34" charset="-120"/>
+                </a:rPr>
+                <a:t>数据采集层</a:t>
+              </a:r>
+              <a:endParaRPr lang="en-US" sz="1920"/>
+            </a:p>
+          </p:txBody>
+        </p:sp>
+        <p:sp>
+          <p:nvSpPr>
+            <p:cNvPr id="40" name="Text 1" descr="TEMP_Z_ORDER_4"/>
+            <p:cNvSpPr/>
+            <p:nvPr>
+              <p:custDataLst>
+                <p:tags r:id="rId33"/>
+              </p:custDataLst>
+            </p:nvPr>
+          </p:nvSpPr>
+          <p:spPr>
+            <a:xfrm>
+              <a:off x="-436880" y="-10160"/>
+              <a:ext cx="2859024" cy="1140184"/>
+            </a:xfrm>
+            <a:prstGeom prst="rect">
+              <a:avLst/>
+            </a:prstGeom>
+            <a:noFill/>
+          </p:spPr>
+          <p:txBody>
+            <a:bodyPr wrap="square" lIns="0" tIns="0" rIns="0" bIns="0" rtlCol="0" anchor="t">
+              <a:spAutoFit/>
+            </a:bodyPr>
+            <a:lstStyle>
+              <a:lvl1pPr marL="0" algn="l" defTabSz="914400" rtl="0" eaLnBrk="1" latinLnBrk="0" hangingPunct="1">
+                <a:defRPr sz="1800" kern="1200">
+                  <a:solidFill>
+                    <a:schemeClr val="tx1"/>
+                  </a:solidFill>
+                  <a:latin typeface="+mn-lt"/>
+                  <a:ea typeface="+mn-ea"/>
+                  <a:cs typeface="+mn-cs"/>
+                </a:defRPr>
+              </a:lvl1pPr>
+              <a:lvl2pPr marL="457200" algn="l" defTabSz="914400" rtl="0" eaLnBrk="1" latinLnBrk="0" hangingPunct="1">
+                <a:defRPr sz="1800" kern="1200">
+                  <a:solidFill>
+                    <a:schemeClr val="tx1"/>
+                  </a:solidFill>
+                  <a:latin typeface="+mn-lt"/>
+                  <a:ea typeface="+mn-ea"/>
+                  <a:cs typeface="+mn-cs"/>
+                </a:defRPr>
+              </a:lvl2pPr>
+              <a:lvl3pPr marL="914400" algn="l" defTabSz="914400" rtl="0" eaLnBrk="1" latinLnBrk="0" hangingPunct="1">
+                <a:defRPr sz="1800" kern="1200">
+                  <a:solidFill>
+                    <a:schemeClr val="tx1"/>
+                  </a:solidFill>
+                  <a:latin typeface="+mn-lt"/>
+                  <a:ea typeface="+mn-ea"/>
+                  <a:cs typeface="+mn-cs"/>
+                </a:defRPr>
+              </a:lvl3pPr>
+              <a:lvl4pPr marL="1371600" algn="l" defTabSz="914400" rtl="0" eaLnBrk="1" latinLnBrk="0" hangingPunct="1">
+                <a:defRPr sz="1800" kern="1200">
+                  <a:solidFill>
+                    <a:schemeClr val="tx1"/>
+                  </a:solidFill>
+                  <a:latin typeface="+mn-lt"/>
+                  <a:ea typeface="+mn-ea"/>
+                  <a:cs typeface="+mn-cs"/>
+                </a:defRPr>
+              </a:lvl4pPr>
+              <a:lvl5pPr marL="1828800" algn="l" defTabSz="914400" rtl="0" eaLnBrk="1" latinLnBrk="0" hangingPunct="1">
+                <a:defRPr sz="1800" kern="1200">
+                  <a:solidFill>
+                    <a:schemeClr val="tx1"/>
+                  </a:solidFill>
+                  <a:latin typeface="+mn-lt"/>
+                  <a:ea typeface="+mn-ea"/>
+                  <a:cs typeface="+mn-cs"/>
+                </a:defRPr>
+              </a:lvl5pPr>
+              <a:lvl6pPr marL="2286000" algn="l" defTabSz="914400" rtl="0" eaLnBrk="1" latinLnBrk="0" hangingPunct="1">
+                <a:defRPr sz="1800" kern="1200">
+                  <a:solidFill>
+                    <a:schemeClr val="tx1"/>
+                  </a:solidFill>
+                  <a:latin typeface="+mn-lt"/>
+                  <a:ea typeface="+mn-ea"/>
+                  <a:cs typeface="+mn-cs"/>
+                </a:defRPr>
+              </a:lvl6pPr>
+              <a:lvl7pPr marL="2743200" algn="l" defTabSz="914400" rtl="0" eaLnBrk="1" latinLnBrk="0" hangingPunct="1">
+                <a:defRPr sz="1800" kern="1200">
+                  <a:solidFill>
+                    <a:schemeClr val="tx1"/>
+                  </a:solidFill>
+                  <a:latin typeface="+mn-lt"/>
+                  <a:ea typeface="+mn-ea"/>
+                  <a:cs typeface="+mn-cs"/>
+                </a:defRPr>
+              </a:lvl7pPr>
+              <a:lvl8pPr marL="3200400" algn="l" defTabSz="914400" rtl="0" eaLnBrk="1" latinLnBrk="0" hangingPunct="1">
+                <a:defRPr sz="1800" kern="1200">
+                  <a:solidFill>
+                    <a:schemeClr val="tx1"/>
+                  </a:solidFill>
+                  <a:latin typeface="+mn-lt"/>
+                  <a:ea typeface="+mn-ea"/>
+                  <a:cs typeface="+mn-cs"/>
+                </a:defRPr>
+              </a:lvl8pPr>
+              <a:lvl9pPr marL="3657600" algn="l" defTabSz="914400" rtl="0" eaLnBrk="1" latinLnBrk="0" hangingPunct="1">
+                <a:defRPr sz="1800" kern="1200">
+                  <a:solidFill>
+                    <a:schemeClr val="tx1"/>
+                  </a:solidFill>
+                  <a:latin typeface="+mn-lt"/>
+                  <a:ea typeface="+mn-ea"/>
+                  <a:cs typeface="+mn-cs"/>
+                </a:defRPr>
+              </a:lvl9pPr>
+            </a:lstStyle>
+            <a:p>
+              <a:pPr marL="0" indent="0" algn="l">
+                <a:lnSpc>
+                  <a:spcPts val="1822"/>
+                </a:lnSpc>
+                <a:buNone/>
+              </a:pPr>
+              <a:r>
+                <a:rPr lang="en-US" sz="1320" dirty="0">
+                  <a:solidFill>
+                    <a:srgbClr val="4B5563"/>
+                  </a:solidFill>
+                  <a:latin typeface="思源黑体 CN" pitchFamily="34" charset="0"/>
+                  <a:ea typeface="思源黑体 CN" pitchFamily="34" charset="-122"/>
+                  <a:cs typeface="思源黑体 CN" pitchFamily="34" charset="-120"/>
+                </a:rPr>
+                <a:t>典籍PDF用RapidOCR·12线程并行→53篇541万字；</a:t>
+              </a:r>
+            </a:p>
+            <a:p>
+              <a:pPr marL="0" indent="0" algn="l">
+                <a:lnSpc>
+                  <a:spcPts val="1822"/>
+                </a:lnSpc>
+                <a:buNone/>
+              </a:pPr>
+              <a:r>
+                <a:rPr lang="en-US" sz="1320" dirty="0">
+                  <a:solidFill>
+                    <a:srgbClr val="4B5563"/>
+                  </a:solidFill>
+                  <a:latin typeface="思源黑体 CN" pitchFamily="34" charset="0"/>
+                  <a:ea typeface="思源黑体 CN" pitchFamily="34" charset="-122"/>
+                  <a:cs typeface="思源黑体 CN" pitchFamily="34" charset="-120"/>
+                </a:rPr>
+                <a:t>高德API+百度Place→13,113条POI；</a:t>
+              </a:r>
+            </a:p>
+            <a:p>
+              <a:pPr marL="0" indent="0" algn="l">
+                <a:lnSpc>
+                  <a:spcPts val="1822"/>
+                </a:lnSpc>
+                <a:buNone/>
+              </a:pPr>
+              <a:r>
+                <a:rPr lang="en-US" sz="1320" dirty="0" err="1">
+                  <a:solidFill>
+                    <a:srgbClr val="4B5563"/>
+                  </a:solidFill>
+                  <a:latin typeface="思源黑体 CN" pitchFamily="34" charset="0"/>
+                  <a:ea typeface="思源黑体 CN" pitchFamily="34" charset="-122"/>
+                  <a:cs typeface="思源黑体 CN" pitchFamily="34" charset="-120"/>
+                </a:rPr>
+                <a:t>高德</a:t>
+              </a:r>
+              <a:r>
+                <a:rPr lang="en-US" sz="1320" dirty="0">
+                  <a:solidFill>
+                    <a:srgbClr val="4B5563"/>
+                  </a:solidFill>
+                  <a:latin typeface="思源黑体 CN" pitchFamily="34" charset="0"/>
+                  <a:ea typeface="思源黑体 CN" pitchFamily="34" charset="-122"/>
+                  <a:cs typeface="思源黑体 CN" pitchFamily="34" charset="-120"/>
+                </a:rPr>
+                <a:t>/</a:t>
+              </a:r>
+              <a:r>
+                <a:rPr lang="en-US" sz="1320" dirty="0" err="1">
+                  <a:solidFill>
+                    <a:srgbClr val="4B5563"/>
+                  </a:solidFill>
+                  <a:latin typeface="思源黑体 CN" pitchFamily="34" charset="0"/>
+                  <a:ea typeface="思源黑体 CN" pitchFamily="34" charset="-122"/>
+                  <a:cs typeface="思源黑体 CN" pitchFamily="34" charset="-120"/>
+                </a:rPr>
+                <a:t>携程</a:t>
+              </a:r>
+              <a:r>
+                <a:rPr lang="en-US" sz="1320" dirty="0">
+                  <a:solidFill>
+                    <a:srgbClr val="4B5563"/>
+                  </a:solidFill>
+                  <a:latin typeface="思源黑体 CN" pitchFamily="34" charset="0"/>
+                  <a:ea typeface="思源黑体 CN" pitchFamily="34" charset="-122"/>
+                  <a:cs typeface="思源黑体 CN" pitchFamily="34" charset="-120"/>
+                </a:rPr>
+                <a:t>/</a:t>
+              </a:r>
+              <a:r>
+                <a:rPr lang="en-US" sz="1320" dirty="0" err="1">
+                  <a:solidFill>
+                    <a:srgbClr val="4B5563"/>
+                  </a:solidFill>
+                  <a:latin typeface="思源黑体 CN" pitchFamily="34" charset="0"/>
+                  <a:ea typeface="思源黑体 CN" pitchFamily="34" charset="-122"/>
+                  <a:cs typeface="思源黑体 CN" pitchFamily="34" charset="-120"/>
+                </a:rPr>
+                <a:t>去哪儿</a:t>
+              </a:r>
+              <a:r>
+                <a:rPr lang="en-US" sz="1320" dirty="0">
+                  <a:solidFill>
+                    <a:srgbClr val="4B5563"/>
+                  </a:solidFill>
+                  <a:latin typeface="思源黑体 CN" pitchFamily="34" charset="0"/>
+                  <a:ea typeface="思源黑体 CN" pitchFamily="34" charset="-122"/>
+                  <a:cs typeface="思源黑体 CN" pitchFamily="34" charset="-120"/>
+                </a:rPr>
+                <a:t>/马蜂窝→16,391条评论。</a:t>
+              </a:r>
+              <a:endParaRPr lang="en-US" sz="1320" dirty="0"/>
+            </a:p>
+          </p:txBody>
+        </p:sp>
+      </p:grpSp>
+      <p:sp>
+        <p:nvSpPr>
+          <p:cNvPr id="7" name="Text 2"/>
+          <p:cNvSpPr/>
+          <p:nvPr>
+            <p:custDataLst>
+              <p:tags r:id="rId4"/>
+            </p:custDataLst>
+          </p:nvPr>
+        </p:nvSpPr>
+        <p:spPr>
+          <a:xfrm>
+            <a:off x="3977640" y="1508760"/>
+            <a:ext cx="466344" cy="548640"/>
+          </a:xfrm>
+          <a:prstGeom prst="rect">
+            <a:avLst/>
+          </a:prstGeom>
+          <a:noFill/>
+        </p:spPr>
+        <p:txBody>
+          <a:bodyPr wrap="none" lIns="0" tIns="0" rIns="0" bIns="0" rtlCol="0" anchor="t">
+            <a:spAutoFit/>
+          </a:bodyPr>
+          <a:lstStyle>
+            <a:lvl1pPr marL="0" algn="l" defTabSz="914400" rtl="0" eaLnBrk="1" latinLnBrk="0" hangingPunct="1">
+              <a:defRPr sz="1800" kern="1200">
+                <a:solidFill>
+                  <a:schemeClr val="tx1"/>
+                </a:solidFill>
+                <a:latin typeface="+mn-lt"/>
+                <a:ea typeface="+mn-ea"/>
+                <a:cs typeface="+mn-cs"/>
+              </a:defRPr>
+            </a:lvl1pPr>
+            <a:lvl2pPr marL="457200" algn="l" defTabSz="914400" rtl="0" eaLnBrk="1" latinLnBrk="0" hangingPunct="1">
+              <a:defRPr sz="1800" kern="1200">
+                <a:solidFill>
+                  <a:schemeClr val="tx1"/>
+                </a:solidFill>
+                <a:latin typeface="+mn-lt"/>
+                <a:ea typeface="+mn-ea"/>
+                <a:cs typeface="+mn-cs"/>
+              </a:defRPr>
+            </a:lvl2pPr>
+            <a:lvl3pPr marL="914400" algn="l" defTabSz="914400" rtl="0" eaLnBrk="1" latinLnBrk="0" hangingPunct="1">
+              <a:defRPr sz="1800" kern="1200">
+                <a:solidFill>
+                  <a:schemeClr val="tx1"/>
+                </a:solidFill>
+                <a:latin typeface="+mn-lt"/>
+                <a:ea typeface="+mn-ea"/>
+                <a:cs typeface="+mn-cs"/>
+              </a:defRPr>
+            </a:lvl3pPr>
+            <a:lvl4pPr marL="1371600" algn="l" defTabSz="914400" rtl="0" eaLnBrk="1" latinLnBrk="0" hangingPunct="1">
+              <a:defRPr sz="1800" kern="1200">
+                <a:solidFill>
+                  <a:schemeClr val="tx1"/>
+                </a:solidFill>
+                <a:latin typeface="+mn-lt"/>
+                <a:ea typeface="+mn-ea"/>
+                <a:cs typeface="+mn-cs"/>
+              </a:defRPr>
+            </a:lvl4pPr>
+            <a:lvl5pPr marL="1828800" algn="l" defTabSz="914400" rtl="0" eaLnBrk="1" latinLnBrk="0" hangingPunct="1">
+              <a:defRPr sz="1800" kern="1200">
+                <a:solidFill>
+                  <a:schemeClr val="tx1"/>
+                </a:solidFill>
+                <a:latin typeface="+mn-lt"/>
+                <a:ea typeface="+mn-ea"/>
+                <a:cs typeface="+mn-cs"/>
+              </a:defRPr>
+            </a:lvl5pPr>
+            <a:lvl6pPr marL="2286000" algn="l" defTabSz="914400" rtl="0" eaLnBrk="1" latinLnBrk="0" hangingPunct="1">
+              <a:defRPr sz="1800" kern="1200">
+                <a:solidFill>
+                  <a:schemeClr val="tx1"/>
+                </a:solidFill>
+                <a:latin typeface="+mn-lt"/>
+                <a:ea typeface="+mn-ea"/>
+                <a:cs typeface="+mn-cs"/>
+              </a:defRPr>
+            </a:lvl6pPr>
+            <a:lvl7pPr marL="2743200" algn="l" defTabSz="914400" rtl="0" eaLnBrk="1" latinLnBrk="0" hangingPunct="1">
+              <a:defRPr sz="1800" kern="1200">
+                <a:solidFill>
+                  <a:schemeClr val="tx1"/>
+                </a:solidFill>
+                <a:latin typeface="+mn-lt"/>
+                <a:ea typeface="+mn-ea"/>
+                <a:cs typeface="+mn-cs"/>
+              </a:defRPr>
+            </a:lvl7pPr>
+            <a:lvl8pPr marL="3200400" algn="l" defTabSz="914400" rtl="0" eaLnBrk="1" latinLnBrk="0" hangingPunct="1">
+              <a:defRPr sz="1800" kern="1200">
+                <a:solidFill>
+                  <a:schemeClr val="tx1"/>
+                </a:solidFill>
+                <a:latin typeface="+mn-lt"/>
+                <a:ea typeface="+mn-ea"/>
+                <a:cs typeface="+mn-cs"/>
+              </a:defRPr>
+            </a:lvl8pPr>
+            <a:lvl9pPr marL="3657600" algn="l" defTabSz="914400" rtl="0" eaLnBrk="1" latinLnBrk="0" hangingPunct="1">
+              <a:defRPr sz="1800" kern="1200">
+                <a:solidFill>
+                  <a:schemeClr val="tx1"/>
+                </a:solidFill>
+                <a:latin typeface="+mn-lt"/>
+                <a:ea typeface="+mn-ea"/>
+                <a:cs typeface="+mn-cs"/>
+              </a:defRPr>
+            </a:lvl9pPr>
+          </a:lstStyle>
+          <a:p>
+            <a:pPr marL="0" indent="0" algn="ctr">
+              <a:lnSpc>
+                <a:spcPts val="4320"/>
+              </a:lnSpc>
+              <a:buNone/>
+            </a:pPr>
+            <a:r>
+              <a:rPr lang="en-US" sz="3600">
+                <a:solidFill>
+                  <a:srgbClr val="727478"/>
+                </a:solidFill>
+                <a:latin typeface="思源黑体 CN"/>
+                <a:ea typeface="思源黑体 CN"/>
+                <a:cs typeface="思源黑体 CN"/>
+              </a:rPr>
+              <a:t>→</a:t>
+            </a:r>
+            <a:endParaRPr lang="en-US" sz="3600"/>
+          </a:p>
+        </p:txBody>
+      </p:sp>
+      <p:grpSp>
+        <p:nvGrpSpPr>
+          <p:cNvPr id="41" name="组合 40"/>
+          <p:cNvGrpSpPr/>
+          <p:nvPr>
+            <p:custDataLst>
+              <p:tags r:id="rId5"/>
+            </p:custDataLst>
+          </p:nvPr>
+        </p:nvGrpSpPr>
+        <p:grpSpPr>
+          <a:xfrm>
+            <a:off x="8336282" y="1487190"/>
+            <a:ext cx="3246120" cy="2331720"/>
+            <a:chOff x="-635000" y="-635000"/>
+            <a:chExt cx="3246120" cy="2331720"/>
+          </a:xfrm>
+        </p:grpSpPr>
+        <p:pic>
+          <p:nvPicPr>
+            <p:cNvPr id="42" name="Image 3" descr="TEMP_Z_ORDER_6"/>
+            <p:cNvPicPr>
+              <a:picLocks noChangeAspect="1"/>
+            </p:cNvPicPr>
+            <p:nvPr>
+              <p:custDataLst>
+                <p:tags r:id="rId28"/>
+              </p:custDataLst>
+            </p:nvPr>
+          </p:nvPicPr>
+          <p:blipFill>
+            <a:blip r:embed="rId38">
+              <a:extLst>
+                <a:ext uri="{96DAC541-7B7A-43D3-8B79-37D633B846F1}">
+                  <asvg:svgBlip xmlns:asvg="http://schemas.microsoft.com/office/drawing/2016/SVG/main" r:embed="rId39"/>
+                </a:ext>
+              </a:extLst>
+            </a:blip>
+            <a:stretch>
+              <a:fillRect/>
+            </a:stretch>
+          </p:blipFill>
+          <p:spPr>
+            <a:xfrm>
+              <a:off x="-635000" y="-635000"/>
+              <a:ext cx="3246120" cy="2331720"/>
+            </a:xfrm>
+            <a:prstGeom prst="rect">
+              <a:avLst/>
+            </a:prstGeom>
+          </p:spPr>
+        </p:pic>
+        <p:sp>
+          <p:nvSpPr>
+            <p:cNvPr id="43" name="Text 3" descr="TEMP_Z_ORDER_7"/>
+            <p:cNvSpPr/>
+            <p:nvPr>
+              <p:custDataLst>
+                <p:tags r:id="rId29"/>
+              </p:custDataLst>
+            </p:nvPr>
+          </p:nvSpPr>
+          <p:spPr>
+            <a:xfrm>
+              <a:off x="-436880" y="-436880"/>
+              <a:ext cx="2859024" cy="351254"/>
+            </a:xfrm>
+            <a:prstGeom prst="rect">
+              <a:avLst/>
+            </a:prstGeom>
+            <a:noFill/>
+          </p:spPr>
+          <p:txBody>
+            <a:bodyPr wrap="square" lIns="0" tIns="0" rIns="0" bIns="0" rtlCol="0" anchor="t">
+              <a:spAutoFit/>
+            </a:bodyPr>
+            <a:lstStyle>
+              <a:lvl1pPr marL="0" algn="l" defTabSz="914400" rtl="0" eaLnBrk="1" latinLnBrk="0" hangingPunct="1">
+                <a:defRPr sz="1800" kern="1200">
+                  <a:solidFill>
+                    <a:schemeClr val="tx1"/>
+                  </a:solidFill>
+                  <a:latin typeface="+mn-lt"/>
+                  <a:ea typeface="+mn-ea"/>
+                  <a:cs typeface="+mn-cs"/>
+                </a:defRPr>
+              </a:lvl1pPr>
+              <a:lvl2pPr marL="457200" algn="l" defTabSz="914400" rtl="0" eaLnBrk="1" latinLnBrk="0" hangingPunct="1">
+                <a:defRPr sz="1800" kern="1200">
+                  <a:solidFill>
+                    <a:schemeClr val="tx1"/>
+                  </a:solidFill>
+                  <a:latin typeface="+mn-lt"/>
+                  <a:ea typeface="+mn-ea"/>
+                  <a:cs typeface="+mn-cs"/>
+                </a:defRPr>
+              </a:lvl2pPr>
+              <a:lvl3pPr marL="914400" algn="l" defTabSz="914400" rtl="0" eaLnBrk="1" latinLnBrk="0" hangingPunct="1">
+                <a:defRPr sz="1800" kern="1200">
+                  <a:solidFill>
+                    <a:schemeClr val="tx1"/>
+                  </a:solidFill>
+                  <a:latin typeface="+mn-lt"/>
+                  <a:ea typeface="+mn-ea"/>
+                  <a:cs typeface="+mn-cs"/>
+                </a:defRPr>
+              </a:lvl3pPr>
+              <a:lvl4pPr marL="1371600" algn="l" defTabSz="914400" rtl="0" eaLnBrk="1" latinLnBrk="0" hangingPunct="1">
+                <a:defRPr sz="1800" kern="1200">
+                  <a:solidFill>
+                    <a:schemeClr val="tx1"/>
+                  </a:solidFill>
+                  <a:latin typeface="+mn-lt"/>
+                  <a:ea typeface="+mn-ea"/>
+                  <a:cs typeface="+mn-cs"/>
+                </a:defRPr>
+              </a:lvl4pPr>
+              <a:lvl5pPr marL="1828800" algn="l" defTabSz="914400" rtl="0" eaLnBrk="1" latinLnBrk="0" hangingPunct="1">
+                <a:defRPr sz="1800" kern="1200">
+                  <a:solidFill>
+                    <a:schemeClr val="tx1"/>
+                  </a:solidFill>
+                  <a:latin typeface="+mn-lt"/>
+                  <a:ea typeface="+mn-ea"/>
+                  <a:cs typeface="+mn-cs"/>
+                </a:defRPr>
+              </a:lvl5pPr>
+              <a:lvl6pPr marL="2286000" algn="l" defTabSz="914400" rtl="0" eaLnBrk="1" latinLnBrk="0" hangingPunct="1">
+                <a:defRPr sz="1800" kern="1200">
+                  <a:solidFill>
+                    <a:schemeClr val="tx1"/>
+                  </a:solidFill>
+                  <a:latin typeface="+mn-lt"/>
+                  <a:ea typeface="+mn-ea"/>
+                  <a:cs typeface="+mn-cs"/>
+                </a:defRPr>
+              </a:lvl6pPr>
+              <a:lvl7pPr marL="2743200" algn="l" defTabSz="914400" rtl="0" eaLnBrk="1" latinLnBrk="0" hangingPunct="1">
+                <a:defRPr sz="1800" kern="1200">
+                  <a:solidFill>
+                    <a:schemeClr val="tx1"/>
+                  </a:solidFill>
+                  <a:latin typeface="+mn-lt"/>
+                  <a:ea typeface="+mn-ea"/>
+                  <a:cs typeface="+mn-cs"/>
+                </a:defRPr>
+              </a:lvl7pPr>
+              <a:lvl8pPr marL="3200400" algn="l" defTabSz="914400" rtl="0" eaLnBrk="1" latinLnBrk="0" hangingPunct="1">
+                <a:defRPr sz="1800" kern="1200">
+                  <a:solidFill>
+                    <a:schemeClr val="tx1"/>
+                  </a:solidFill>
+                  <a:latin typeface="+mn-lt"/>
+                  <a:ea typeface="+mn-ea"/>
+                  <a:cs typeface="+mn-cs"/>
+                </a:defRPr>
+              </a:lvl8pPr>
+              <a:lvl9pPr marL="3657600" algn="l" defTabSz="914400" rtl="0" eaLnBrk="1" latinLnBrk="0" hangingPunct="1">
+                <a:defRPr sz="1800" kern="1200">
+                  <a:solidFill>
+                    <a:schemeClr val="tx1"/>
+                  </a:solidFill>
+                  <a:latin typeface="+mn-lt"/>
+                  <a:ea typeface="+mn-ea"/>
+                  <a:cs typeface="+mn-cs"/>
+                </a:defRPr>
+              </a:lvl9pPr>
+            </a:lstStyle>
+            <a:p>
+              <a:pPr marL="0" indent="0" algn="l">
+                <a:lnSpc>
+                  <a:spcPts val="2880"/>
+                </a:lnSpc>
+                <a:buNone/>
+              </a:pPr>
+              <a:r>
+                <a:rPr lang="en-US" sz="1920">
+                  <a:solidFill>
+                    <a:srgbClr val="5A0767"/>
+                  </a:solidFill>
+                  <a:latin typeface="思源黑体 CN" pitchFamily="34" charset="0"/>
+                  <a:ea typeface="思源黑体 CN" pitchFamily="34" charset="-122"/>
+                  <a:cs typeface="思源黑体 CN" pitchFamily="34" charset="-120"/>
+                </a:rPr>
+                <a:t>数据处理层</a:t>
+              </a:r>
+              <a:endParaRPr lang="en-US" sz="1920"/>
+            </a:p>
+          </p:txBody>
+        </p:sp>
+        <p:sp>
+          <p:nvSpPr>
+            <p:cNvPr id="44" name="Text 4" descr="TEMP_Z_ORDER_8"/>
+            <p:cNvSpPr/>
+            <p:nvPr>
+              <p:custDataLst>
+                <p:tags r:id="rId30"/>
+              </p:custDataLst>
+            </p:nvPr>
+          </p:nvSpPr>
+          <p:spPr>
+            <a:xfrm>
+              <a:off x="-436880" y="-10160"/>
+              <a:ext cx="2859024" cy="909352"/>
+            </a:xfrm>
+            <a:prstGeom prst="rect">
+              <a:avLst/>
+            </a:prstGeom>
+            <a:noFill/>
+          </p:spPr>
+          <p:txBody>
+            <a:bodyPr wrap="square" lIns="0" tIns="0" rIns="0" bIns="0" rtlCol="0" anchor="t">
+              <a:spAutoFit/>
+            </a:bodyPr>
+            <a:lstStyle>
+              <a:lvl1pPr marL="0" algn="l" defTabSz="914400" rtl="0" eaLnBrk="1" latinLnBrk="0" hangingPunct="1">
+                <a:defRPr sz="1800" kern="1200">
+                  <a:solidFill>
+                    <a:schemeClr val="tx1"/>
+                  </a:solidFill>
+                  <a:latin typeface="+mn-lt"/>
+                  <a:ea typeface="+mn-ea"/>
+                  <a:cs typeface="+mn-cs"/>
+                </a:defRPr>
+              </a:lvl1pPr>
+              <a:lvl2pPr marL="457200" algn="l" defTabSz="914400" rtl="0" eaLnBrk="1" latinLnBrk="0" hangingPunct="1">
+                <a:defRPr sz="1800" kern="1200">
+                  <a:solidFill>
+                    <a:schemeClr val="tx1"/>
+                  </a:solidFill>
+                  <a:latin typeface="+mn-lt"/>
+                  <a:ea typeface="+mn-ea"/>
+                  <a:cs typeface="+mn-cs"/>
+                </a:defRPr>
+              </a:lvl2pPr>
+              <a:lvl3pPr marL="914400" algn="l" defTabSz="914400" rtl="0" eaLnBrk="1" latinLnBrk="0" hangingPunct="1">
+                <a:defRPr sz="1800" kern="1200">
+                  <a:solidFill>
+                    <a:schemeClr val="tx1"/>
+                  </a:solidFill>
+                  <a:latin typeface="+mn-lt"/>
+                  <a:ea typeface="+mn-ea"/>
+                  <a:cs typeface="+mn-cs"/>
+                </a:defRPr>
+              </a:lvl3pPr>
+              <a:lvl4pPr marL="1371600" algn="l" defTabSz="914400" rtl="0" eaLnBrk="1" latinLnBrk="0" hangingPunct="1">
+                <a:defRPr sz="1800" kern="1200">
+                  <a:solidFill>
+                    <a:schemeClr val="tx1"/>
+                  </a:solidFill>
+                  <a:latin typeface="+mn-lt"/>
+                  <a:ea typeface="+mn-ea"/>
+                  <a:cs typeface="+mn-cs"/>
+                </a:defRPr>
+              </a:lvl4pPr>
+              <a:lvl5pPr marL="1828800" algn="l" defTabSz="914400" rtl="0" eaLnBrk="1" latinLnBrk="0" hangingPunct="1">
+                <a:defRPr sz="1800" kern="1200">
+                  <a:solidFill>
+                    <a:schemeClr val="tx1"/>
+                  </a:solidFill>
+                  <a:latin typeface="+mn-lt"/>
+                  <a:ea typeface="+mn-ea"/>
+                  <a:cs typeface="+mn-cs"/>
+                </a:defRPr>
+              </a:lvl5pPr>
+              <a:lvl6pPr marL="2286000" algn="l" defTabSz="914400" rtl="0" eaLnBrk="1" latinLnBrk="0" hangingPunct="1">
+                <a:defRPr sz="1800" kern="1200">
+                  <a:solidFill>
+                    <a:schemeClr val="tx1"/>
+                  </a:solidFill>
+                  <a:latin typeface="+mn-lt"/>
+                  <a:ea typeface="+mn-ea"/>
+                  <a:cs typeface="+mn-cs"/>
+                </a:defRPr>
+              </a:lvl6pPr>
+              <a:lvl7pPr marL="2743200" algn="l" defTabSz="914400" rtl="0" eaLnBrk="1" latinLnBrk="0" hangingPunct="1">
+                <a:defRPr sz="1800" kern="1200">
+                  <a:solidFill>
+                    <a:schemeClr val="tx1"/>
+                  </a:solidFill>
+                  <a:latin typeface="+mn-lt"/>
+                  <a:ea typeface="+mn-ea"/>
+                  <a:cs typeface="+mn-cs"/>
+                </a:defRPr>
+              </a:lvl7pPr>
+              <a:lvl8pPr marL="3200400" algn="l" defTabSz="914400" rtl="0" eaLnBrk="1" latinLnBrk="0" hangingPunct="1">
+                <a:defRPr sz="1800" kern="1200">
+                  <a:solidFill>
+                    <a:schemeClr val="tx1"/>
+                  </a:solidFill>
+                  <a:latin typeface="+mn-lt"/>
+                  <a:ea typeface="+mn-ea"/>
+                  <a:cs typeface="+mn-cs"/>
+                </a:defRPr>
+              </a:lvl8pPr>
+              <a:lvl9pPr marL="3657600" algn="l" defTabSz="914400" rtl="0" eaLnBrk="1" latinLnBrk="0" hangingPunct="1">
+                <a:defRPr sz="1800" kern="1200">
+                  <a:solidFill>
+                    <a:schemeClr val="tx1"/>
+                  </a:solidFill>
+                  <a:latin typeface="+mn-lt"/>
+                  <a:ea typeface="+mn-ea"/>
+                  <a:cs typeface="+mn-cs"/>
+                </a:defRPr>
+              </a:lvl9pPr>
+            </a:lstStyle>
+            <a:p>
+              <a:pPr marL="0" indent="0" algn="l">
+                <a:lnSpc>
+                  <a:spcPts val="1822"/>
+                </a:lnSpc>
+                <a:buNone/>
+              </a:pPr>
+              <a:r>
+                <a:rPr lang="en-US" sz="1320" dirty="0" err="1">
+                  <a:solidFill>
+                    <a:srgbClr val="4B5563"/>
+                  </a:solidFill>
+                  <a:latin typeface="思源黑体 CN" pitchFamily="34" charset="0"/>
+                  <a:ea typeface="思源黑体 CN" pitchFamily="34" charset="-122"/>
+                  <a:cs typeface="思源黑体 CN" pitchFamily="34" charset="-120"/>
+                </a:rPr>
+                <a:t>编号索引统一格式</a:t>
+              </a:r>
+              <a:r>
+                <a:rPr lang="en-US" sz="1320" dirty="0">
+                  <a:solidFill>
+                    <a:srgbClr val="4B5563"/>
+                  </a:solidFill>
+                  <a:latin typeface="思源黑体 CN" pitchFamily="34" charset="0"/>
+                  <a:ea typeface="思源黑体 CN" pitchFamily="34" charset="-122"/>
+                  <a:cs typeface="思源黑体 CN" pitchFamily="34" charset="-120"/>
+                </a:rPr>
+                <a:t>；</a:t>
+              </a:r>
+            </a:p>
+            <a:p>
+              <a:pPr marL="0" indent="0" algn="l">
+                <a:lnSpc>
+                  <a:spcPts val="1822"/>
+                </a:lnSpc>
+                <a:buNone/>
+              </a:pPr>
+              <a:r>
+                <a:rPr lang="en-US" sz="1320" dirty="0">
+                  <a:solidFill>
+                    <a:srgbClr val="4B5563"/>
+                  </a:solidFill>
+                  <a:latin typeface="思源黑体 CN" pitchFamily="34" charset="0"/>
+                  <a:ea typeface="思源黑体 CN" pitchFamily="34" charset="-122"/>
+                  <a:cs typeface="思源黑体 CN" pitchFamily="34" charset="-120"/>
+                </a:rPr>
+                <a:t>去重融合11类分类 </a:t>
+              </a:r>
+            </a:p>
+            <a:p>
+              <a:pPr marL="0" indent="0" algn="l">
+                <a:lnSpc>
+                  <a:spcPts val="1822"/>
+                </a:lnSpc>
+                <a:buNone/>
+              </a:pPr>
+              <a:r>
+                <a:rPr lang="en-US" sz="1320" dirty="0">
+                  <a:solidFill>
+                    <a:srgbClr val="4B5563"/>
+                  </a:solidFill>
+                  <a:latin typeface="思源黑体 CN" pitchFamily="34" charset="0"/>
+                  <a:ea typeface="思源黑体 CN" pitchFamily="34" charset="-122"/>
+                  <a:cs typeface="思源黑体 CN" pitchFamily="34" charset="-120"/>
+                </a:rPr>
+                <a:t>(</a:t>
+              </a:r>
+              <a:r>
+                <a:rPr lang="zh-CN" altLang="en-US" sz="1320" dirty="0">
+                  <a:solidFill>
+                    <a:srgbClr val="4B5563"/>
+                  </a:solidFill>
+                  <a:latin typeface="思源黑体 CN" pitchFamily="34" charset="0"/>
+                  <a:ea typeface="思源黑体 CN" pitchFamily="34" charset="-122"/>
+                  <a:cs typeface="思源黑体 CN" pitchFamily="34" charset="-120"/>
+                </a:rPr>
+                <a:t>本地</a:t>
+              </a:r>
+              <a:r>
+                <a:rPr lang="en-US" sz="1320" dirty="0" err="1">
+                  <a:solidFill>
+                    <a:srgbClr val="4B5563"/>
+                  </a:solidFill>
+                  <a:latin typeface="思源黑体 CN" pitchFamily="34" charset="0"/>
+                  <a:ea typeface="思源黑体 CN" pitchFamily="34" charset="-122"/>
+                  <a:cs typeface="思源黑体 CN" pitchFamily="34" charset="-120"/>
+                </a:rPr>
+                <a:t>Ollama</a:t>
+              </a:r>
+              <a:r>
+                <a:rPr lang="zh-CN" altLang="en-US" sz="1320" dirty="0">
+                  <a:solidFill>
+                    <a:srgbClr val="4B5563"/>
+                  </a:solidFill>
+                  <a:latin typeface="思源黑体 CN" pitchFamily="34" charset="0"/>
+                  <a:ea typeface="思源黑体 CN" pitchFamily="34" charset="-122"/>
+                  <a:cs typeface="思源黑体 CN" pitchFamily="34" charset="-120"/>
+                </a:rPr>
+                <a:t>大模型</a:t>
+              </a:r>
+              <a:r>
+                <a:rPr lang="en-US" sz="1320" dirty="0">
+                  <a:solidFill>
+                    <a:srgbClr val="4B5563"/>
+                  </a:solidFill>
+                  <a:latin typeface="思源黑体 CN" pitchFamily="34" charset="0"/>
+                  <a:ea typeface="思源黑体 CN" pitchFamily="34" charset="-122"/>
+                  <a:cs typeface="思源黑体 CN" pitchFamily="34" charset="-120"/>
+                </a:rPr>
+                <a:t>)</a:t>
+              </a:r>
+              <a:r>
+                <a:rPr lang="en-US" sz="1320" dirty="0" err="1">
+                  <a:solidFill>
+                    <a:srgbClr val="4B5563"/>
+                  </a:solidFill>
+                  <a:latin typeface="思源黑体 CN" pitchFamily="34" charset="0"/>
+                  <a:ea typeface="思源黑体 CN" pitchFamily="34" charset="-122"/>
+                  <a:cs typeface="思源黑体 CN" pitchFamily="34" charset="-120"/>
+                </a:rPr>
+                <a:t>纠正类别</a:t>
+              </a:r>
+              <a:r>
+                <a:rPr lang="en-US" sz="1320" dirty="0">
+                  <a:solidFill>
+                    <a:srgbClr val="4B5563"/>
+                  </a:solidFill>
+                  <a:latin typeface="思源黑体 CN" pitchFamily="34" charset="0"/>
+                  <a:ea typeface="思源黑体 CN" pitchFamily="34" charset="-122"/>
+                  <a:cs typeface="思源黑体 CN" pitchFamily="34" charset="-120"/>
+                </a:rPr>
+                <a:t>；</a:t>
+              </a:r>
+            </a:p>
+            <a:p>
+              <a:pPr marL="0" indent="0" algn="l">
+                <a:lnSpc>
+                  <a:spcPts val="1822"/>
+                </a:lnSpc>
+                <a:buNone/>
+              </a:pPr>
+              <a:r>
+                <a:rPr lang="en-US" sz="1320" dirty="0" err="1">
+                  <a:solidFill>
+                    <a:srgbClr val="4B5563"/>
+                  </a:solidFill>
+                  <a:latin typeface="思源黑体 CN" pitchFamily="34" charset="0"/>
+                  <a:ea typeface="思源黑体 CN" pitchFamily="34" charset="-122"/>
+                  <a:cs typeface="思源黑体 CN" pitchFamily="34" charset="-120"/>
+                </a:rPr>
+                <a:t>评论五段式匹配POI</a:t>
+              </a:r>
+              <a:endParaRPr lang="en-US" sz="1320" dirty="0"/>
+            </a:p>
+          </p:txBody>
+        </p:sp>
+      </p:grpSp>
+      <p:sp>
+        <p:nvSpPr>
+          <p:cNvPr id="11" name="Text 5"/>
+          <p:cNvSpPr/>
+          <p:nvPr>
+            <p:custDataLst>
+              <p:tags r:id="rId6"/>
+            </p:custDataLst>
+          </p:nvPr>
+        </p:nvSpPr>
+        <p:spPr>
+          <a:xfrm>
+            <a:off x="7833360" y="1508760"/>
+            <a:ext cx="466344" cy="548640"/>
+          </a:xfrm>
+          <a:prstGeom prst="rect">
+            <a:avLst/>
+          </a:prstGeom>
+          <a:noFill/>
+        </p:spPr>
+        <p:txBody>
+          <a:bodyPr wrap="none" lIns="0" tIns="0" rIns="0" bIns="0" rtlCol="0" anchor="t">
+            <a:spAutoFit/>
+          </a:bodyPr>
+          <a:lstStyle>
+            <a:lvl1pPr marL="0" algn="l" defTabSz="914400" rtl="0" eaLnBrk="1" latinLnBrk="0" hangingPunct="1">
+              <a:defRPr sz="1800" kern="1200">
+                <a:solidFill>
+                  <a:schemeClr val="tx1"/>
+                </a:solidFill>
+                <a:latin typeface="+mn-lt"/>
+                <a:ea typeface="+mn-ea"/>
+                <a:cs typeface="+mn-cs"/>
+              </a:defRPr>
+            </a:lvl1pPr>
+            <a:lvl2pPr marL="457200" algn="l" defTabSz="914400" rtl="0" eaLnBrk="1" latinLnBrk="0" hangingPunct="1">
+              <a:defRPr sz="1800" kern="1200">
+                <a:solidFill>
+                  <a:schemeClr val="tx1"/>
+                </a:solidFill>
+                <a:latin typeface="+mn-lt"/>
+                <a:ea typeface="+mn-ea"/>
+                <a:cs typeface="+mn-cs"/>
+              </a:defRPr>
+            </a:lvl2pPr>
+            <a:lvl3pPr marL="914400" algn="l" defTabSz="914400" rtl="0" eaLnBrk="1" latinLnBrk="0" hangingPunct="1">
+              <a:defRPr sz="1800" kern="1200">
+                <a:solidFill>
+                  <a:schemeClr val="tx1"/>
+                </a:solidFill>
+                <a:latin typeface="+mn-lt"/>
+                <a:ea typeface="+mn-ea"/>
+                <a:cs typeface="+mn-cs"/>
+              </a:defRPr>
+            </a:lvl3pPr>
+            <a:lvl4pPr marL="1371600" algn="l" defTabSz="914400" rtl="0" eaLnBrk="1" latinLnBrk="0" hangingPunct="1">
+              <a:defRPr sz="1800" kern="1200">
+                <a:solidFill>
+                  <a:schemeClr val="tx1"/>
+                </a:solidFill>
+                <a:latin typeface="+mn-lt"/>
+                <a:ea typeface="+mn-ea"/>
+                <a:cs typeface="+mn-cs"/>
+              </a:defRPr>
+            </a:lvl4pPr>
+            <a:lvl5pPr marL="1828800" algn="l" defTabSz="914400" rtl="0" eaLnBrk="1" latinLnBrk="0" hangingPunct="1">
+              <a:defRPr sz="1800" kern="1200">
+                <a:solidFill>
+                  <a:schemeClr val="tx1"/>
+                </a:solidFill>
+                <a:latin typeface="+mn-lt"/>
+                <a:ea typeface="+mn-ea"/>
+                <a:cs typeface="+mn-cs"/>
+              </a:defRPr>
+            </a:lvl5pPr>
+            <a:lvl6pPr marL="2286000" algn="l" defTabSz="914400" rtl="0" eaLnBrk="1" latinLnBrk="0" hangingPunct="1">
+              <a:defRPr sz="1800" kern="1200">
+                <a:solidFill>
+                  <a:schemeClr val="tx1"/>
+                </a:solidFill>
+                <a:latin typeface="+mn-lt"/>
+                <a:ea typeface="+mn-ea"/>
+                <a:cs typeface="+mn-cs"/>
+              </a:defRPr>
+            </a:lvl6pPr>
+            <a:lvl7pPr marL="2743200" algn="l" defTabSz="914400" rtl="0" eaLnBrk="1" latinLnBrk="0" hangingPunct="1">
+              <a:defRPr sz="1800" kern="1200">
+                <a:solidFill>
+                  <a:schemeClr val="tx1"/>
+                </a:solidFill>
+                <a:latin typeface="+mn-lt"/>
+                <a:ea typeface="+mn-ea"/>
+                <a:cs typeface="+mn-cs"/>
+              </a:defRPr>
+            </a:lvl7pPr>
+            <a:lvl8pPr marL="3200400" algn="l" defTabSz="914400" rtl="0" eaLnBrk="1" latinLnBrk="0" hangingPunct="1">
+              <a:defRPr sz="1800" kern="1200">
+                <a:solidFill>
+                  <a:schemeClr val="tx1"/>
+                </a:solidFill>
+                <a:latin typeface="+mn-lt"/>
+                <a:ea typeface="+mn-ea"/>
+                <a:cs typeface="+mn-cs"/>
+              </a:defRPr>
+            </a:lvl8pPr>
+            <a:lvl9pPr marL="3657600" algn="l" defTabSz="914400" rtl="0" eaLnBrk="1" latinLnBrk="0" hangingPunct="1">
+              <a:defRPr sz="1800" kern="1200">
+                <a:solidFill>
+                  <a:schemeClr val="tx1"/>
+                </a:solidFill>
+                <a:latin typeface="+mn-lt"/>
+                <a:ea typeface="+mn-ea"/>
+                <a:cs typeface="+mn-cs"/>
+              </a:defRPr>
+            </a:lvl9pPr>
+          </a:lstStyle>
+          <a:p>
+            <a:pPr marL="0" indent="0" algn="ctr">
+              <a:lnSpc>
+                <a:spcPts val="4320"/>
+              </a:lnSpc>
+              <a:buNone/>
+            </a:pPr>
+            <a:r>
+              <a:rPr lang="en-US" sz="3600">
+                <a:solidFill>
+                  <a:srgbClr val="727478"/>
+                </a:solidFill>
+                <a:latin typeface="思源黑体 CN"/>
+                <a:ea typeface="思源黑体 CN"/>
+                <a:cs typeface="思源黑体 CN"/>
+              </a:rPr>
+              <a:t>→</a:t>
+            </a:r>
+            <a:endParaRPr lang="en-US" sz="3600"/>
+          </a:p>
+        </p:txBody>
+      </p:sp>
+      <p:grpSp>
+        <p:nvGrpSpPr>
+          <p:cNvPr id="24" name="组合 23"/>
+          <p:cNvGrpSpPr/>
+          <p:nvPr>
+            <p:custDataLst>
+              <p:tags r:id="rId7"/>
+            </p:custDataLst>
+          </p:nvPr>
+        </p:nvGrpSpPr>
+        <p:grpSpPr>
+          <a:xfrm>
+            <a:off x="8579716" y="4267200"/>
+            <a:ext cx="3246120" cy="2855366"/>
+            <a:chOff x="-635000" y="-635000"/>
+            <a:chExt cx="3246120" cy="2855366"/>
+          </a:xfrm>
+        </p:grpSpPr>
+        <p:pic>
+          <p:nvPicPr>
+            <p:cNvPr id="25" name="Image 4" descr="TEMP_Z_ORDER_10"/>
+            <p:cNvPicPr>
+              <a:picLocks noChangeAspect="1"/>
+            </p:cNvPicPr>
+            <p:nvPr>
+              <p:custDataLst>
+                <p:tags r:id="rId24"/>
+              </p:custDataLst>
+            </p:nvPr>
+          </p:nvPicPr>
+          <p:blipFill>
+            <a:blip r:embed="rId38">
+              <a:extLst>
+                <a:ext uri="{96DAC541-7B7A-43D3-8B79-37D633B846F1}">
+                  <asvg:svgBlip xmlns:asvg="http://schemas.microsoft.com/office/drawing/2016/SVG/main" r:embed="rId39"/>
+                </a:ext>
+              </a:extLst>
+            </a:blip>
+            <a:stretch>
+              <a:fillRect/>
+            </a:stretch>
+          </p:blipFill>
+          <p:spPr>
+            <a:xfrm>
+              <a:off x="-635000" y="-635000"/>
+              <a:ext cx="3246120" cy="2331720"/>
+            </a:xfrm>
+            <a:prstGeom prst="rect">
+              <a:avLst/>
+            </a:prstGeom>
+          </p:spPr>
+        </p:pic>
+        <p:sp>
+          <p:nvSpPr>
+            <p:cNvPr id="26" name="Text 6" descr="TEMP_Z_ORDER_11"/>
+            <p:cNvSpPr/>
+            <p:nvPr>
+              <p:custDataLst>
+                <p:tags r:id="rId25"/>
+              </p:custDataLst>
+            </p:nvPr>
+          </p:nvSpPr>
+          <p:spPr>
+            <a:xfrm>
+              <a:off x="-436880" y="-436880"/>
+              <a:ext cx="2859024" cy="351254"/>
+            </a:xfrm>
+            <a:prstGeom prst="rect">
+              <a:avLst/>
+            </a:prstGeom>
+            <a:noFill/>
+          </p:spPr>
+          <p:txBody>
+            <a:bodyPr wrap="square" lIns="0" tIns="0" rIns="0" bIns="0" rtlCol="0" anchor="t">
+              <a:spAutoFit/>
+            </a:bodyPr>
+            <a:lstStyle>
+              <a:lvl1pPr marL="0" algn="l" defTabSz="914400" rtl="0" eaLnBrk="1" latinLnBrk="0" hangingPunct="1">
+                <a:defRPr sz="1800" kern="1200">
+                  <a:solidFill>
+                    <a:schemeClr val="tx1"/>
+                  </a:solidFill>
+                  <a:latin typeface="+mn-lt"/>
+                  <a:ea typeface="+mn-ea"/>
+                  <a:cs typeface="+mn-cs"/>
+                </a:defRPr>
+              </a:lvl1pPr>
+              <a:lvl2pPr marL="457200" algn="l" defTabSz="914400" rtl="0" eaLnBrk="1" latinLnBrk="0" hangingPunct="1">
+                <a:defRPr sz="1800" kern="1200">
+                  <a:solidFill>
+                    <a:schemeClr val="tx1"/>
+                  </a:solidFill>
+                  <a:latin typeface="+mn-lt"/>
+                  <a:ea typeface="+mn-ea"/>
+                  <a:cs typeface="+mn-cs"/>
+                </a:defRPr>
+              </a:lvl2pPr>
+              <a:lvl3pPr marL="914400" algn="l" defTabSz="914400" rtl="0" eaLnBrk="1" latinLnBrk="0" hangingPunct="1">
+                <a:defRPr sz="1800" kern="1200">
+                  <a:solidFill>
+                    <a:schemeClr val="tx1"/>
+                  </a:solidFill>
+                  <a:latin typeface="+mn-lt"/>
+                  <a:ea typeface="+mn-ea"/>
+                  <a:cs typeface="+mn-cs"/>
+                </a:defRPr>
+              </a:lvl3pPr>
+              <a:lvl4pPr marL="1371600" algn="l" defTabSz="914400" rtl="0" eaLnBrk="1" latinLnBrk="0" hangingPunct="1">
+                <a:defRPr sz="1800" kern="1200">
+                  <a:solidFill>
+                    <a:schemeClr val="tx1"/>
+                  </a:solidFill>
+                  <a:latin typeface="+mn-lt"/>
+                  <a:ea typeface="+mn-ea"/>
+                  <a:cs typeface="+mn-cs"/>
+                </a:defRPr>
+              </a:lvl4pPr>
+              <a:lvl5pPr marL="1828800" algn="l" defTabSz="914400" rtl="0" eaLnBrk="1" latinLnBrk="0" hangingPunct="1">
+                <a:defRPr sz="1800" kern="1200">
+                  <a:solidFill>
+                    <a:schemeClr val="tx1"/>
+                  </a:solidFill>
+                  <a:latin typeface="+mn-lt"/>
+                  <a:ea typeface="+mn-ea"/>
+                  <a:cs typeface="+mn-cs"/>
+                </a:defRPr>
+              </a:lvl5pPr>
+              <a:lvl6pPr marL="2286000" algn="l" defTabSz="914400" rtl="0" eaLnBrk="1" latinLnBrk="0" hangingPunct="1">
+                <a:defRPr sz="1800" kern="1200">
+                  <a:solidFill>
+                    <a:schemeClr val="tx1"/>
+                  </a:solidFill>
+                  <a:latin typeface="+mn-lt"/>
+                  <a:ea typeface="+mn-ea"/>
+                  <a:cs typeface="+mn-cs"/>
+                </a:defRPr>
+              </a:lvl6pPr>
+              <a:lvl7pPr marL="2743200" algn="l" defTabSz="914400" rtl="0" eaLnBrk="1" latinLnBrk="0" hangingPunct="1">
+                <a:defRPr sz="1800" kern="1200">
+                  <a:solidFill>
+                    <a:schemeClr val="tx1"/>
+                  </a:solidFill>
+                  <a:latin typeface="+mn-lt"/>
+                  <a:ea typeface="+mn-ea"/>
+                  <a:cs typeface="+mn-cs"/>
+                </a:defRPr>
+              </a:lvl7pPr>
+              <a:lvl8pPr marL="3200400" algn="l" defTabSz="914400" rtl="0" eaLnBrk="1" latinLnBrk="0" hangingPunct="1">
+                <a:defRPr sz="1800" kern="1200">
+                  <a:solidFill>
+                    <a:schemeClr val="tx1"/>
+                  </a:solidFill>
+                  <a:latin typeface="+mn-lt"/>
+                  <a:ea typeface="+mn-ea"/>
+                  <a:cs typeface="+mn-cs"/>
+                </a:defRPr>
+              </a:lvl8pPr>
+              <a:lvl9pPr marL="3657600" algn="l" defTabSz="914400" rtl="0" eaLnBrk="1" latinLnBrk="0" hangingPunct="1">
+                <a:defRPr sz="1800" kern="1200">
+                  <a:solidFill>
+                    <a:schemeClr val="tx1"/>
+                  </a:solidFill>
+                  <a:latin typeface="+mn-lt"/>
+                  <a:ea typeface="+mn-ea"/>
+                  <a:cs typeface="+mn-cs"/>
+                </a:defRPr>
+              </a:lvl9pPr>
+            </a:lstStyle>
+            <a:p>
+              <a:pPr marL="0" indent="0" algn="l">
+                <a:lnSpc>
+                  <a:spcPts val="2880"/>
+                </a:lnSpc>
+                <a:buNone/>
+              </a:pPr>
+              <a:r>
+                <a:rPr lang="en-US" sz="1920">
+                  <a:solidFill>
+                    <a:srgbClr val="5A0767"/>
+                  </a:solidFill>
+                  <a:latin typeface="思源黑体 CN" pitchFamily="34" charset="0"/>
+                  <a:ea typeface="思源黑体 CN" pitchFamily="34" charset="-122"/>
+                  <a:cs typeface="思源黑体 CN" pitchFamily="34" charset="-120"/>
+                </a:rPr>
+                <a:t>知识抽取层</a:t>
+              </a:r>
+              <a:endParaRPr lang="en-US" sz="1920"/>
+            </a:p>
+          </p:txBody>
+        </p:sp>
+        <p:sp>
+          <p:nvSpPr>
+            <p:cNvPr id="27" name="Text 7" descr="TEMP_Z_ORDER_12"/>
+            <p:cNvSpPr/>
+            <p:nvPr>
+              <p:custDataLst>
+                <p:tags r:id="rId26"/>
+              </p:custDataLst>
+            </p:nvPr>
+          </p:nvSpPr>
+          <p:spPr>
+            <a:xfrm>
+              <a:off x="-436880" y="-10160"/>
+              <a:ext cx="2859024" cy="1371016"/>
+            </a:xfrm>
+            <a:prstGeom prst="rect">
+              <a:avLst/>
+            </a:prstGeom>
+            <a:noFill/>
+          </p:spPr>
+          <p:txBody>
+            <a:bodyPr wrap="square" lIns="0" tIns="0" rIns="0" bIns="0" rtlCol="0" anchor="t">
+              <a:spAutoFit/>
+            </a:bodyPr>
+            <a:lstStyle>
+              <a:lvl1pPr marL="0" algn="l" defTabSz="914400" rtl="0" eaLnBrk="1" latinLnBrk="0" hangingPunct="1">
+                <a:defRPr sz="1800" kern="1200">
+                  <a:solidFill>
+                    <a:schemeClr val="tx1"/>
+                  </a:solidFill>
+                  <a:latin typeface="+mn-lt"/>
+                  <a:ea typeface="+mn-ea"/>
+                  <a:cs typeface="+mn-cs"/>
+                </a:defRPr>
+              </a:lvl1pPr>
+              <a:lvl2pPr marL="457200" algn="l" defTabSz="914400" rtl="0" eaLnBrk="1" latinLnBrk="0" hangingPunct="1">
+                <a:defRPr sz="1800" kern="1200">
+                  <a:solidFill>
+                    <a:schemeClr val="tx1"/>
+                  </a:solidFill>
+                  <a:latin typeface="+mn-lt"/>
+                  <a:ea typeface="+mn-ea"/>
+                  <a:cs typeface="+mn-cs"/>
+                </a:defRPr>
+              </a:lvl2pPr>
+              <a:lvl3pPr marL="914400" algn="l" defTabSz="914400" rtl="0" eaLnBrk="1" latinLnBrk="0" hangingPunct="1">
+                <a:defRPr sz="1800" kern="1200">
+                  <a:solidFill>
+                    <a:schemeClr val="tx1"/>
+                  </a:solidFill>
+                  <a:latin typeface="+mn-lt"/>
+                  <a:ea typeface="+mn-ea"/>
+                  <a:cs typeface="+mn-cs"/>
+                </a:defRPr>
+              </a:lvl3pPr>
+              <a:lvl4pPr marL="1371600" algn="l" defTabSz="914400" rtl="0" eaLnBrk="1" latinLnBrk="0" hangingPunct="1">
+                <a:defRPr sz="1800" kern="1200">
+                  <a:solidFill>
+                    <a:schemeClr val="tx1"/>
+                  </a:solidFill>
+                  <a:latin typeface="+mn-lt"/>
+                  <a:ea typeface="+mn-ea"/>
+                  <a:cs typeface="+mn-cs"/>
+                </a:defRPr>
+              </a:lvl4pPr>
+              <a:lvl5pPr marL="1828800" algn="l" defTabSz="914400" rtl="0" eaLnBrk="1" latinLnBrk="0" hangingPunct="1">
+                <a:defRPr sz="1800" kern="1200">
+                  <a:solidFill>
+                    <a:schemeClr val="tx1"/>
+                  </a:solidFill>
+                  <a:latin typeface="+mn-lt"/>
+                  <a:ea typeface="+mn-ea"/>
+                  <a:cs typeface="+mn-cs"/>
+                </a:defRPr>
+              </a:lvl5pPr>
+              <a:lvl6pPr marL="2286000" algn="l" defTabSz="914400" rtl="0" eaLnBrk="1" latinLnBrk="0" hangingPunct="1">
+                <a:defRPr sz="1800" kern="1200">
+                  <a:solidFill>
+                    <a:schemeClr val="tx1"/>
+                  </a:solidFill>
+                  <a:latin typeface="+mn-lt"/>
+                  <a:ea typeface="+mn-ea"/>
+                  <a:cs typeface="+mn-cs"/>
+                </a:defRPr>
+              </a:lvl6pPr>
+              <a:lvl7pPr marL="2743200" algn="l" defTabSz="914400" rtl="0" eaLnBrk="1" latinLnBrk="0" hangingPunct="1">
+                <a:defRPr sz="1800" kern="1200">
+                  <a:solidFill>
+                    <a:schemeClr val="tx1"/>
+                  </a:solidFill>
+                  <a:latin typeface="+mn-lt"/>
+                  <a:ea typeface="+mn-ea"/>
+                  <a:cs typeface="+mn-cs"/>
+                </a:defRPr>
+              </a:lvl7pPr>
+              <a:lvl8pPr marL="3200400" algn="l" defTabSz="914400" rtl="0" eaLnBrk="1" latinLnBrk="0" hangingPunct="1">
+                <a:defRPr sz="1800" kern="1200">
+                  <a:solidFill>
+                    <a:schemeClr val="tx1"/>
+                  </a:solidFill>
+                  <a:latin typeface="+mn-lt"/>
+                  <a:ea typeface="+mn-ea"/>
+                  <a:cs typeface="+mn-cs"/>
+                </a:defRPr>
+              </a:lvl8pPr>
+              <a:lvl9pPr marL="3657600" algn="l" defTabSz="914400" rtl="0" eaLnBrk="1" latinLnBrk="0" hangingPunct="1">
+                <a:defRPr sz="1800" kern="1200">
+                  <a:solidFill>
+                    <a:schemeClr val="tx1"/>
+                  </a:solidFill>
+                  <a:latin typeface="+mn-lt"/>
+                  <a:ea typeface="+mn-ea"/>
+                  <a:cs typeface="+mn-cs"/>
+                </a:defRPr>
+              </a:lvl9pPr>
+            </a:lstStyle>
+            <a:p>
+              <a:pPr marL="0" indent="0" algn="l">
+                <a:lnSpc>
+                  <a:spcPts val="1822"/>
+                </a:lnSpc>
+                <a:buNone/>
+              </a:pPr>
+              <a:r>
+                <a:rPr lang="en-US" sz="1320" dirty="0" err="1">
+                  <a:solidFill>
+                    <a:srgbClr val="4B5563"/>
+                  </a:solidFill>
+                  <a:latin typeface="思源黑体 CN" pitchFamily="34" charset="0"/>
+                  <a:ea typeface="思源黑体 CN" pitchFamily="34" charset="-122"/>
+                  <a:cs typeface="思源黑体 CN" pitchFamily="34" charset="-120"/>
+                </a:rPr>
+                <a:t>千问API</a:t>
+              </a:r>
+              <a:r>
+                <a:rPr lang="en-US" sz="1320" dirty="0">
+                  <a:solidFill>
+                    <a:srgbClr val="4B5563"/>
+                  </a:solidFill>
+                  <a:latin typeface="思源黑体 CN" pitchFamily="34" charset="0"/>
+                  <a:ea typeface="思源黑体 CN" pitchFamily="34" charset="-122"/>
+                  <a:cs typeface="思源黑体 CN" pitchFamily="34" charset="-120"/>
+                </a:rPr>
+                <a:t>(qwen-3.5-plus)</a:t>
+              </a:r>
+              <a:r>
+                <a:rPr lang="en-US" sz="1320" dirty="0" err="1">
+                  <a:solidFill>
+                    <a:srgbClr val="4B5563"/>
+                  </a:solidFill>
+                  <a:latin typeface="思源黑体 CN" pitchFamily="34" charset="0"/>
+                  <a:ea typeface="思源黑体 CN" pitchFamily="34" charset="-122"/>
+                  <a:cs typeface="思源黑体 CN" pitchFamily="34" charset="-120"/>
+                </a:rPr>
+                <a:t>多线程并发</a:t>
+              </a:r>
+              <a:r>
+                <a:rPr lang="en-US" sz="1320" dirty="0">
+                  <a:solidFill>
+                    <a:srgbClr val="4B5563"/>
+                  </a:solidFill>
+                  <a:latin typeface="思源黑体 CN" pitchFamily="34" charset="0"/>
+                  <a:ea typeface="思源黑体 CN" pitchFamily="34" charset="-122"/>
+                  <a:cs typeface="思源黑体 CN" pitchFamily="34" charset="-120"/>
+                </a:rPr>
+                <a:t>·</a:t>
+              </a:r>
+            </a:p>
+            <a:p>
+              <a:pPr marL="0" indent="0" algn="l">
+                <a:lnSpc>
+                  <a:spcPts val="1822"/>
+                </a:lnSpc>
+                <a:buNone/>
+              </a:pPr>
+              <a:r>
+                <a:rPr lang="en-US" sz="1320" dirty="0">
+                  <a:solidFill>
+                    <a:srgbClr val="4B5563"/>
+                  </a:solidFill>
+                  <a:latin typeface="思源黑体 CN" pitchFamily="34" charset="0"/>
+                  <a:ea typeface="思源黑体 CN" pitchFamily="34" charset="-122"/>
+                  <a:cs typeface="思源黑体 CN" pitchFamily="34" charset="-120"/>
+                </a:rPr>
+                <a:t>；</a:t>
+              </a:r>
+              <a:r>
+                <a:rPr lang="en-US" sz="1320" dirty="0" err="1">
+                  <a:solidFill>
+                    <a:srgbClr val="4B5563"/>
+                  </a:solidFill>
+                  <a:latin typeface="思源黑体 CN" pitchFamily="34" charset="0"/>
+                  <a:ea typeface="思源黑体 CN" pitchFamily="34" charset="-122"/>
+                  <a:cs typeface="思源黑体 CN" pitchFamily="34" charset="-120"/>
+                </a:rPr>
+                <a:t>实体抽取</a:t>
+              </a:r>
+              <a:endParaRPr lang="en-US" sz="1320" dirty="0">
+                <a:solidFill>
+                  <a:srgbClr val="4B5563"/>
+                </a:solidFill>
+                <a:latin typeface="思源黑体 CN" pitchFamily="34" charset="0"/>
+                <a:ea typeface="思源黑体 CN" pitchFamily="34" charset="-122"/>
+                <a:cs typeface="思源黑体 CN" pitchFamily="34" charset="-120"/>
+              </a:endParaRPr>
+            </a:p>
+            <a:p>
+              <a:pPr marL="0" indent="0" algn="l">
+                <a:lnSpc>
+                  <a:spcPts val="1822"/>
+                </a:lnSpc>
+                <a:buNone/>
+              </a:pPr>
+              <a:r>
+                <a:rPr lang="en-US" sz="1320" dirty="0">
+                  <a:solidFill>
+                    <a:srgbClr val="4B5563"/>
+                  </a:solidFill>
+                  <a:latin typeface="思源黑体 CN" pitchFamily="34" charset="0"/>
+                  <a:ea typeface="思源黑体 CN" pitchFamily="34" charset="-122"/>
+                  <a:cs typeface="思源黑体 CN" pitchFamily="34" charset="-120"/>
+                </a:rPr>
+                <a:t>(</a:t>
+              </a:r>
+              <a:r>
+                <a:rPr lang="zh-CN" altLang="en-US" sz="1320" dirty="0">
+                  <a:solidFill>
+                    <a:srgbClr val="4B5563"/>
+                  </a:solidFill>
+                  <a:latin typeface="思源黑体 CN" pitchFamily="34" charset="0"/>
+                  <a:ea typeface="思源黑体 CN" pitchFamily="34" charset="-122"/>
+                  <a:cs typeface="思源黑体 CN" pitchFamily="34" charset="-120"/>
+                </a:rPr>
+                <a:t>研究</a:t>
+              </a:r>
+              <a:r>
+                <a:rPr lang="en-US" sz="1320" dirty="0">
+                  <a:solidFill>
+                    <a:srgbClr val="4B5563"/>
+                  </a:solidFill>
+                  <a:latin typeface="思源黑体 CN" pitchFamily="34" charset="0"/>
+                  <a:ea typeface="思源黑体 CN" pitchFamily="34" charset="-122"/>
+                  <a:cs typeface="思源黑体 CN" pitchFamily="34" charset="-120"/>
+                </a:rPr>
+                <a:t>分类6大类28小类+官方分类8大类)→8,048实体；关系抽取(9大关系组·开放式谓词·每条附证据)→19,382关系。</a:t>
+              </a:r>
+              <a:endParaRPr lang="en-US" sz="1320" dirty="0"/>
+            </a:p>
+          </p:txBody>
+        </p:sp>
+        <p:sp>
+          <p:nvSpPr>
+            <p:cNvPr id="28" name="Text 8" descr="TEMP_Z_ORDER_13"/>
+            <p:cNvSpPr/>
+            <p:nvPr>
+              <p:custDataLst>
+                <p:tags r:id="rId27"/>
+              </p:custDataLst>
+            </p:nvPr>
+          </p:nvSpPr>
+          <p:spPr>
+            <a:xfrm>
+              <a:off x="1132840" y="1666240"/>
+              <a:ext cx="386413" cy="554126"/>
+            </a:xfrm>
+            <a:prstGeom prst="rect">
+              <a:avLst/>
+            </a:prstGeom>
+            <a:noFill/>
+          </p:spPr>
+          <p:txBody>
+            <a:bodyPr wrap="none" lIns="0" tIns="0" rIns="0" bIns="0" rtlCol="0" anchor="t">
+              <a:spAutoFit/>
+            </a:bodyPr>
+            <a:lstStyle>
+              <a:lvl1pPr marL="0" algn="l" defTabSz="914400" rtl="0" eaLnBrk="1" latinLnBrk="0" hangingPunct="1">
+                <a:defRPr sz="1800" kern="1200">
+                  <a:solidFill>
+                    <a:schemeClr val="tx1"/>
+                  </a:solidFill>
+                  <a:latin typeface="+mn-lt"/>
+                  <a:ea typeface="+mn-ea"/>
+                  <a:cs typeface="+mn-cs"/>
+                </a:defRPr>
+              </a:lvl1pPr>
+              <a:lvl2pPr marL="457200" algn="l" defTabSz="914400" rtl="0" eaLnBrk="1" latinLnBrk="0" hangingPunct="1">
+                <a:defRPr sz="1800" kern="1200">
+                  <a:solidFill>
+                    <a:schemeClr val="tx1"/>
+                  </a:solidFill>
+                  <a:latin typeface="+mn-lt"/>
+                  <a:ea typeface="+mn-ea"/>
+                  <a:cs typeface="+mn-cs"/>
+                </a:defRPr>
+              </a:lvl2pPr>
+              <a:lvl3pPr marL="914400" algn="l" defTabSz="914400" rtl="0" eaLnBrk="1" latinLnBrk="0" hangingPunct="1">
+                <a:defRPr sz="1800" kern="1200">
+                  <a:solidFill>
+                    <a:schemeClr val="tx1"/>
+                  </a:solidFill>
+                  <a:latin typeface="+mn-lt"/>
+                  <a:ea typeface="+mn-ea"/>
+                  <a:cs typeface="+mn-cs"/>
+                </a:defRPr>
+              </a:lvl3pPr>
+              <a:lvl4pPr marL="1371600" algn="l" defTabSz="914400" rtl="0" eaLnBrk="1" latinLnBrk="0" hangingPunct="1">
+                <a:defRPr sz="1800" kern="1200">
+                  <a:solidFill>
+                    <a:schemeClr val="tx1"/>
+                  </a:solidFill>
+                  <a:latin typeface="+mn-lt"/>
+                  <a:ea typeface="+mn-ea"/>
+                  <a:cs typeface="+mn-cs"/>
+                </a:defRPr>
+              </a:lvl4pPr>
+              <a:lvl5pPr marL="1828800" algn="l" defTabSz="914400" rtl="0" eaLnBrk="1" latinLnBrk="0" hangingPunct="1">
+                <a:defRPr sz="1800" kern="1200">
+                  <a:solidFill>
+                    <a:schemeClr val="tx1"/>
+                  </a:solidFill>
+                  <a:latin typeface="+mn-lt"/>
+                  <a:ea typeface="+mn-ea"/>
+                  <a:cs typeface="+mn-cs"/>
+                </a:defRPr>
+              </a:lvl5pPr>
+              <a:lvl6pPr marL="2286000" algn="l" defTabSz="914400" rtl="0" eaLnBrk="1" latinLnBrk="0" hangingPunct="1">
+                <a:defRPr sz="1800" kern="1200">
+                  <a:solidFill>
+                    <a:schemeClr val="tx1"/>
+                  </a:solidFill>
+                  <a:latin typeface="+mn-lt"/>
+                  <a:ea typeface="+mn-ea"/>
+                  <a:cs typeface="+mn-cs"/>
+                </a:defRPr>
+              </a:lvl6pPr>
+              <a:lvl7pPr marL="2743200" algn="l" defTabSz="914400" rtl="0" eaLnBrk="1" latinLnBrk="0" hangingPunct="1">
+                <a:defRPr sz="1800" kern="1200">
+                  <a:solidFill>
+                    <a:schemeClr val="tx1"/>
+                  </a:solidFill>
+                  <a:latin typeface="+mn-lt"/>
+                  <a:ea typeface="+mn-ea"/>
+                  <a:cs typeface="+mn-cs"/>
+                </a:defRPr>
+              </a:lvl7pPr>
+              <a:lvl8pPr marL="3200400" algn="l" defTabSz="914400" rtl="0" eaLnBrk="1" latinLnBrk="0" hangingPunct="1">
+                <a:defRPr sz="1800" kern="1200">
+                  <a:solidFill>
+                    <a:schemeClr val="tx1"/>
+                  </a:solidFill>
+                  <a:latin typeface="+mn-lt"/>
+                  <a:ea typeface="+mn-ea"/>
+                  <a:cs typeface="+mn-cs"/>
+                </a:defRPr>
+              </a:lvl8pPr>
+              <a:lvl9pPr marL="3657600" algn="l" defTabSz="914400" rtl="0" eaLnBrk="1" latinLnBrk="0" hangingPunct="1">
+                <a:defRPr sz="1800" kern="1200">
+                  <a:solidFill>
+                    <a:schemeClr val="tx1"/>
+                  </a:solidFill>
+                  <a:latin typeface="+mn-lt"/>
+                  <a:ea typeface="+mn-ea"/>
+                  <a:cs typeface="+mn-cs"/>
+                </a:defRPr>
+              </a:lvl9pPr>
+            </a:lstStyle>
+            <a:p>
+              <a:pPr marL="0" indent="0" algn="l">
+                <a:lnSpc>
+                  <a:spcPts val="4320"/>
+                </a:lnSpc>
+                <a:buNone/>
+              </a:pPr>
+              <a:r>
+                <a:rPr lang="en-US" sz="3600">
+                  <a:solidFill>
+                    <a:srgbClr val="727478"/>
+                  </a:solidFill>
+                  <a:latin typeface="思源黑体 CN" pitchFamily="34" charset="0"/>
+                  <a:ea typeface="思源黑体 CN" pitchFamily="34" charset="-122"/>
+                  <a:cs typeface="思源黑体 CN" pitchFamily="34" charset="-120"/>
+                </a:rPr>
+                <a:t>↓</a:t>
+              </a:r>
+              <a:endParaRPr lang="en-US" sz="3600"/>
+            </a:p>
+          </p:txBody>
+        </p:sp>
+      </p:grpSp>
+      <p:grpSp>
+        <p:nvGrpSpPr>
+          <p:cNvPr id="29" name="组合 28"/>
+          <p:cNvGrpSpPr/>
+          <p:nvPr>
+            <p:custDataLst>
+              <p:tags r:id="rId8"/>
+            </p:custDataLst>
+          </p:nvPr>
+        </p:nvGrpSpPr>
+        <p:grpSpPr>
+          <a:xfrm>
+            <a:off x="609600" y="4328160"/>
+            <a:ext cx="3368040" cy="2087880"/>
+            <a:chOff x="-635000" y="-635000"/>
+            <a:chExt cx="3368040" cy="2087880"/>
+          </a:xfrm>
+        </p:grpSpPr>
+        <p:pic>
+          <p:nvPicPr>
+            <p:cNvPr id="30" name="Image 5" descr="TEMP_Z_ORDER_14"/>
+            <p:cNvPicPr>
+              <a:picLocks noChangeAspect="1"/>
+            </p:cNvPicPr>
+            <p:nvPr>
+              <p:custDataLst>
+                <p:tags r:id="rId21"/>
+              </p:custDataLst>
+            </p:nvPr>
+          </p:nvPicPr>
+          <p:blipFill>
+            <a:blip r:embed="rId40">
+              <a:extLst>
+                <a:ext uri="{96DAC541-7B7A-43D3-8B79-37D633B846F1}">
+                  <asvg:svgBlip xmlns:asvg="http://schemas.microsoft.com/office/drawing/2016/SVG/main" r:embed="rId41"/>
+                </a:ext>
+              </a:extLst>
+            </a:blip>
+            <a:stretch>
+              <a:fillRect/>
+            </a:stretch>
+          </p:blipFill>
+          <p:spPr>
+            <a:xfrm>
+              <a:off x="-635000" y="-635000"/>
+              <a:ext cx="3368040" cy="2087880"/>
+            </a:xfrm>
+            <a:prstGeom prst="rect">
+              <a:avLst/>
+            </a:prstGeom>
+          </p:spPr>
+        </p:pic>
+        <p:sp>
+          <p:nvSpPr>
+            <p:cNvPr id="31" name="Text 9" descr="TEMP_Z_ORDER_15"/>
+            <p:cNvSpPr/>
+            <p:nvPr>
+              <p:custDataLst>
+                <p:tags r:id="rId22"/>
+              </p:custDataLst>
+            </p:nvPr>
+          </p:nvSpPr>
+          <p:spPr>
+            <a:xfrm>
+              <a:off x="-436880" y="-436880"/>
+              <a:ext cx="2980944" cy="351254"/>
+            </a:xfrm>
+            <a:prstGeom prst="rect">
+              <a:avLst/>
+            </a:prstGeom>
+            <a:noFill/>
+          </p:spPr>
+          <p:txBody>
+            <a:bodyPr wrap="square" lIns="0" tIns="0" rIns="0" bIns="0" rtlCol="0" anchor="t">
+              <a:spAutoFit/>
+            </a:bodyPr>
+            <a:lstStyle>
+              <a:lvl1pPr marL="0" algn="l" defTabSz="914400" rtl="0" eaLnBrk="1" latinLnBrk="0" hangingPunct="1">
+                <a:defRPr sz="1800" kern="1200">
+                  <a:solidFill>
+                    <a:schemeClr val="tx1"/>
+                  </a:solidFill>
+                  <a:latin typeface="+mn-lt"/>
+                  <a:ea typeface="+mn-ea"/>
+                  <a:cs typeface="+mn-cs"/>
+                </a:defRPr>
+              </a:lvl1pPr>
+              <a:lvl2pPr marL="457200" algn="l" defTabSz="914400" rtl="0" eaLnBrk="1" latinLnBrk="0" hangingPunct="1">
+                <a:defRPr sz="1800" kern="1200">
+                  <a:solidFill>
+                    <a:schemeClr val="tx1"/>
+                  </a:solidFill>
+                  <a:latin typeface="+mn-lt"/>
+                  <a:ea typeface="+mn-ea"/>
+                  <a:cs typeface="+mn-cs"/>
+                </a:defRPr>
+              </a:lvl2pPr>
+              <a:lvl3pPr marL="914400" algn="l" defTabSz="914400" rtl="0" eaLnBrk="1" latinLnBrk="0" hangingPunct="1">
+                <a:defRPr sz="1800" kern="1200">
+                  <a:solidFill>
+                    <a:schemeClr val="tx1"/>
+                  </a:solidFill>
+                  <a:latin typeface="+mn-lt"/>
+                  <a:ea typeface="+mn-ea"/>
+                  <a:cs typeface="+mn-cs"/>
+                </a:defRPr>
+              </a:lvl3pPr>
+              <a:lvl4pPr marL="1371600" algn="l" defTabSz="914400" rtl="0" eaLnBrk="1" latinLnBrk="0" hangingPunct="1">
+                <a:defRPr sz="1800" kern="1200">
+                  <a:solidFill>
+                    <a:schemeClr val="tx1"/>
+                  </a:solidFill>
+                  <a:latin typeface="+mn-lt"/>
+                  <a:ea typeface="+mn-ea"/>
+                  <a:cs typeface="+mn-cs"/>
+                </a:defRPr>
+              </a:lvl4pPr>
+              <a:lvl5pPr marL="1828800" algn="l" defTabSz="914400" rtl="0" eaLnBrk="1" latinLnBrk="0" hangingPunct="1">
+                <a:defRPr sz="1800" kern="1200">
+                  <a:solidFill>
+                    <a:schemeClr val="tx1"/>
+                  </a:solidFill>
+                  <a:latin typeface="+mn-lt"/>
+                  <a:ea typeface="+mn-ea"/>
+                  <a:cs typeface="+mn-cs"/>
+                </a:defRPr>
+              </a:lvl5pPr>
+              <a:lvl6pPr marL="2286000" algn="l" defTabSz="914400" rtl="0" eaLnBrk="1" latinLnBrk="0" hangingPunct="1">
+                <a:defRPr sz="1800" kern="1200">
+                  <a:solidFill>
+                    <a:schemeClr val="tx1"/>
+                  </a:solidFill>
+                  <a:latin typeface="+mn-lt"/>
+                  <a:ea typeface="+mn-ea"/>
+                  <a:cs typeface="+mn-cs"/>
+                </a:defRPr>
+              </a:lvl6pPr>
+              <a:lvl7pPr marL="2743200" algn="l" defTabSz="914400" rtl="0" eaLnBrk="1" latinLnBrk="0" hangingPunct="1">
+                <a:defRPr sz="1800" kern="1200">
+                  <a:solidFill>
+                    <a:schemeClr val="tx1"/>
+                  </a:solidFill>
+                  <a:latin typeface="+mn-lt"/>
+                  <a:ea typeface="+mn-ea"/>
+                  <a:cs typeface="+mn-cs"/>
+                </a:defRPr>
+              </a:lvl7pPr>
+              <a:lvl8pPr marL="3200400" algn="l" defTabSz="914400" rtl="0" eaLnBrk="1" latinLnBrk="0" hangingPunct="1">
+                <a:defRPr sz="1800" kern="1200">
+                  <a:solidFill>
+                    <a:schemeClr val="tx1"/>
+                  </a:solidFill>
+                  <a:latin typeface="+mn-lt"/>
+                  <a:ea typeface="+mn-ea"/>
+                  <a:cs typeface="+mn-cs"/>
+                </a:defRPr>
+              </a:lvl8pPr>
+              <a:lvl9pPr marL="3657600" algn="l" defTabSz="914400" rtl="0" eaLnBrk="1" latinLnBrk="0" hangingPunct="1">
+                <a:defRPr sz="1800" kern="1200">
+                  <a:solidFill>
+                    <a:schemeClr val="tx1"/>
+                  </a:solidFill>
+                  <a:latin typeface="+mn-lt"/>
+                  <a:ea typeface="+mn-ea"/>
+                  <a:cs typeface="+mn-cs"/>
+                </a:defRPr>
+              </a:lvl9pPr>
+            </a:lstStyle>
+            <a:p>
+              <a:pPr marL="0" indent="0" algn="l">
+                <a:lnSpc>
+                  <a:spcPts val="2880"/>
+                </a:lnSpc>
+                <a:buNone/>
+              </a:pPr>
+              <a:r>
+                <a:rPr lang="en-US" sz="1920">
+                  <a:solidFill>
+                    <a:srgbClr val="5A0767"/>
+                  </a:solidFill>
+                  <a:latin typeface="思源黑体 CN" pitchFamily="34" charset="0"/>
+                  <a:ea typeface="思源黑体 CN" pitchFamily="34" charset="-122"/>
+                  <a:cs typeface="思源黑体 CN" pitchFamily="34" charset="-120"/>
+                </a:rPr>
+                <a:t>分析应用层</a:t>
+              </a:r>
+              <a:endParaRPr lang="en-US" sz="1920"/>
+            </a:p>
+          </p:txBody>
+        </p:sp>
+        <p:sp>
+          <p:nvSpPr>
+            <p:cNvPr id="32" name="Text 10" descr="TEMP_Z_ORDER_16"/>
+            <p:cNvSpPr/>
+            <p:nvPr>
+              <p:custDataLst>
+                <p:tags r:id="rId23"/>
+              </p:custDataLst>
+            </p:nvPr>
+          </p:nvSpPr>
+          <p:spPr>
+            <a:xfrm>
+              <a:off x="-436880" y="-10160"/>
+              <a:ext cx="2980944" cy="919452"/>
+            </a:xfrm>
+            <a:prstGeom prst="rect">
+              <a:avLst/>
+            </a:prstGeom>
+            <a:noFill/>
+          </p:spPr>
+          <p:txBody>
+            <a:bodyPr wrap="square" lIns="0" tIns="0" rIns="0" bIns="0" rtlCol="0" anchor="t">
+              <a:spAutoFit/>
+            </a:bodyPr>
+            <a:lstStyle>
+              <a:lvl1pPr marL="0" algn="l" defTabSz="914400" rtl="0" eaLnBrk="1" latinLnBrk="0" hangingPunct="1">
+                <a:defRPr sz="1800" kern="1200">
+                  <a:solidFill>
+                    <a:schemeClr val="tx1"/>
+                  </a:solidFill>
+                  <a:latin typeface="+mn-lt"/>
+                  <a:ea typeface="+mn-ea"/>
+                  <a:cs typeface="+mn-cs"/>
+                </a:defRPr>
+              </a:lvl1pPr>
+              <a:lvl2pPr marL="457200" algn="l" defTabSz="914400" rtl="0" eaLnBrk="1" latinLnBrk="0" hangingPunct="1">
+                <a:defRPr sz="1800" kern="1200">
+                  <a:solidFill>
+                    <a:schemeClr val="tx1"/>
+                  </a:solidFill>
+                  <a:latin typeface="+mn-lt"/>
+                  <a:ea typeface="+mn-ea"/>
+                  <a:cs typeface="+mn-cs"/>
+                </a:defRPr>
+              </a:lvl2pPr>
+              <a:lvl3pPr marL="914400" algn="l" defTabSz="914400" rtl="0" eaLnBrk="1" latinLnBrk="0" hangingPunct="1">
+                <a:defRPr sz="1800" kern="1200">
+                  <a:solidFill>
+                    <a:schemeClr val="tx1"/>
+                  </a:solidFill>
+                  <a:latin typeface="+mn-lt"/>
+                  <a:ea typeface="+mn-ea"/>
+                  <a:cs typeface="+mn-cs"/>
+                </a:defRPr>
+              </a:lvl3pPr>
+              <a:lvl4pPr marL="1371600" algn="l" defTabSz="914400" rtl="0" eaLnBrk="1" latinLnBrk="0" hangingPunct="1">
+                <a:defRPr sz="1800" kern="1200">
+                  <a:solidFill>
+                    <a:schemeClr val="tx1"/>
+                  </a:solidFill>
+                  <a:latin typeface="+mn-lt"/>
+                  <a:ea typeface="+mn-ea"/>
+                  <a:cs typeface="+mn-cs"/>
+                </a:defRPr>
+              </a:lvl4pPr>
+              <a:lvl5pPr marL="1828800" algn="l" defTabSz="914400" rtl="0" eaLnBrk="1" latinLnBrk="0" hangingPunct="1">
+                <a:defRPr sz="1800" kern="1200">
+                  <a:solidFill>
+                    <a:schemeClr val="tx1"/>
+                  </a:solidFill>
+                  <a:latin typeface="+mn-lt"/>
+                  <a:ea typeface="+mn-ea"/>
+                  <a:cs typeface="+mn-cs"/>
+                </a:defRPr>
+              </a:lvl5pPr>
+              <a:lvl6pPr marL="2286000" algn="l" defTabSz="914400" rtl="0" eaLnBrk="1" latinLnBrk="0" hangingPunct="1">
+                <a:defRPr sz="1800" kern="1200">
+                  <a:solidFill>
+                    <a:schemeClr val="tx1"/>
+                  </a:solidFill>
+                  <a:latin typeface="+mn-lt"/>
+                  <a:ea typeface="+mn-ea"/>
+                  <a:cs typeface="+mn-cs"/>
+                </a:defRPr>
+              </a:lvl6pPr>
+              <a:lvl7pPr marL="2743200" algn="l" defTabSz="914400" rtl="0" eaLnBrk="1" latinLnBrk="0" hangingPunct="1">
+                <a:defRPr sz="1800" kern="1200">
+                  <a:solidFill>
+                    <a:schemeClr val="tx1"/>
+                  </a:solidFill>
+                  <a:latin typeface="+mn-lt"/>
+                  <a:ea typeface="+mn-ea"/>
+                  <a:cs typeface="+mn-cs"/>
+                </a:defRPr>
+              </a:lvl7pPr>
+              <a:lvl8pPr marL="3200400" algn="l" defTabSz="914400" rtl="0" eaLnBrk="1" latinLnBrk="0" hangingPunct="1">
+                <a:defRPr sz="1800" kern="1200">
+                  <a:solidFill>
+                    <a:schemeClr val="tx1"/>
+                  </a:solidFill>
+                  <a:latin typeface="+mn-lt"/>
+                  <a:ea typeface="+mn-ea"/>
+                  <a:cs typeface="+mn-cs"/>
+                </a:defRPr>
+              </a:lvl8pPr>
+              <a:lvl9pPr marL="3657600" algn="l" defTabSz="914400" rtl="0" eaLnBrk="1" latinLnBrk="0" hangingPunct="1">
+                <a:defRPr sz="1800" kern="1200">
+                  <a:solidFill>
+                    <a:schemeClr val="tx1"/>
+                  </a:solidFill>
+                  <a:latin typeface="+mn-lt"/>
+                  <a:ea typeface="+mn-ea"/>
+                  <a:cs typeface="+mn-cs"/>
+                </a:defRPr>
+              </a:lvl9pPr>
+            </a:lstStyle>
+            <a:p>
+              <a:pPr marL="0" indent="0" algn="l">
+                <a:lnSpc>
+                  <a:spcPts val="1822"/>
+                </a:lnSpc>
+                <a:buNone/>
+              </a:pPr>
+              <a:r>
+                <a:rPr lang="en-US" sz="1320">
+                  <a:solidFill>
+                    <a:srgbClr val="4B5563"/>
+                  </a:solidFill>
+                  <a:latin typeface="思源黑体 CN" pitchFamily="34" charset="0"/>
+                  <a:ea typeface="思源黑体 CN" pitchFamily="34" charset="-122"/>
+                  <a:cs typeface="思源黑体 CN" pitchFamily="34" charset="-120"/>
+                </a:rPr>
+                <a:t>图谱NER提及+非遗名录+POI库→非遗耦合分析(四象限+协调度D值)；POI+非遗坐标→空间格局分析(KDE+DBSCAN)。</a:t>
+              </a:r>
+              <a:endParaRPr lang="en-US" sz="1320"/>
+            </a:p>
+          </p:txBody>
+        </p:sp>
+      </p:grpSp>
+      <p:sp>
+        <p:nvSpPr>
+          <p:cNvPr id="19" name="Text 11"/>
+          <p:cNvSpPr/>
+          <p:nvPr>
+            <p:custDataLst>
+              <p:tags r:id="rId9"/>
+            </p:custDataLst>
+          </p:nvPr>
+        </p:nvSpPr>
+        <p:spPr>
+          <a:xfrm>
+            <a:off x="4099560" y="4328160"/>
+            <a:ext cx="466344" cy="548640"/>
+          </a:xfrm>
+          <a:prstGeom prst="rect">
+            <a:avLst/>
+          </a:prstGeom>
+          <a:noFill/>
+        </p:spPr>
+        <p:txBody>
+          <a:bodyPr wrap="none" lIns="0" tIns="0" rIns="0" bIns="0" rtlCol="0" anchor="t">
+            <a:spAutoFit/>
+          </a:bodyPr>
+          <a:lstStyle>
+            <a:lvl1pPr marL="0" algn="l" defTabSz="914400" rtl="0" eaLnBrk="1" latinLnBrk="0" hangingPunct="1">
+              <a:defRPr sz="1800" kern="1200">
+                <a:solidFill>
+                  <a:schemeClr val="tx1"/>
+                </a:solidFill>
+                <a:latin typeface="+mn-lt"/>
+                <a:ea typeface="+mn-ea"/>
+                <a:cs typeface="+mn-cs"/>
+              </a:defRPr>
+            </a:lvl1pPr>
+            <a:lvl2pPr marL="457200" algn="l" defTabSz="914400" rtl="0" eaLnBrk="1" latinLnBrk="0" hangingPunct="1">
+              <a:defRPr sz="1800" kern="1200">
+                <a:solidFill>
+                  <a:schemeClr val="tx1"/>
+                </a:solidFill>
+                <a:latin typeface="+mn-lt"/>
+                <a:ea typeface="+mn-ea"/>
+                <a:cs typeface="+mn-cs"/>
+              </a:defRPr>
+            </a:lvl2pPr>
+            <a:lvl3pPr marL="914400" algn="l" defTabSz="914400" rtl="0" eaLnBrk="1" latinLnBrk="0" hangingPunct="1">
+              <a:defRPr sz="1800" kern="1200">
+                <a:solidFill>
+                  <a:schemeClr val="tx1"/>
+                </a:solidFill>
+                <a:latin typeface="+mn-lt"/>
+                <a:ea typeface="+mn-ea"/>
+                <a:cs typeface="+mn-cs"/>
+              </a:defRPr>
+            </a:lvl3pPr>
+            <a:lvl4pPr marL="1371600" algn="l" defTabSz="914400" rtl="0" eaLnBrk="1" latinLnBrk="0" hangingPunct="1">
+              <a:defRPr sz="1800" kern="1200">
+                <a:solidFill>
+                  <a:schemeClr val="tx1"/>
+                </a:solidFill>
+                <a:latin typeface="+mn-lt"/>
+                <a:ea typeface="+mn-ea"/>
+                <a:cs typeface="+mn-cs"/>
+              </a:defRPr>
+            </a:lvl4pPr>
+            <a:lvl5pPr marL="1828800" algn="l" defTabSz="914400" rtl="0" eaLnBrk="1" latinLnBrk="0" hangingPunct="1">
+              <a:defRPr sz="1800" kern="1200">
+                <a:solidFill>
+                  <a:schemeClr val="tx1"/>
+                </a:solidFill>
+                <a:latin typeface="+mn-lt"/>
+                <a:ea typeface="+mn-ea"/>
+                <a:cs typeface="+mn-cs"/>
+              </a:defRPr>
+            </a:lvl5pPr>
+            <a:lvl6pPr marL="2286000" algn="l" defTabSz="914400" rtl="0" eaLnBrk="1" latinLnBrk="0" hangingPunct="1">
+              <a:defRPr sz="1800" kern="1200">
+                <a:solidFill>
+                  <a:schemeClr val="tx1"/>
+                </a:solidFill>
+                <a:latin typeface="+mn-lt"/>
+                <a:ea typeface="+mn-ea"/>
+                <a:cs typeface="+mn-cs"/>
+              </a:defRPr>
+            </a:lvl6pPr>
+            <a:lvl7pPr marL="2743200" algn="l" defTabSz="914400" rtl="0" eaLnBrk="1" latinLnBrk="0" hangingPunct="1">
+              <a:defRPr sz="1800" kern="1200">
+                <a:solidFill>
+                  <a:schemeClr val="tx1"/>
+                </a:solidFill>
+                <a:latin typeface="+mn-lt"/>
+                <a:ea typeface="+mn-ea"/>
+                <a:cs typeface="+mn-cs"/>
+              </a:defRPr>
+            </a:lvl7pPr>
+            <a:lvl8pPr marL="3200400" algn="l" defTabSz="914400" rtl="0" eaLnBrk="1" latinLnBrk="0" hangingPunct="1">
+              <a:defRPr sz="1800" kern="1200">
+                <a:solidFill>
+                  <a:schemeClr val="tx1"/>
+                </a:solidFill>
+                <a:latin typeface="+mn-lt"/>
+                <a:ea typeface="+mn-ea"/>
+                <a:cs typeface="+mn-cs"/>
+              </a:defRPr>
+            </a:lvl8pPr>
+            <a:lvl9pPr marL="3657600" algn="l" defTabSz="914400" rtl="0" eaLnBrk="1" latinLnBrk="0" hangingPunct="1">
+              <a:defRPr sz="1800" kern="1200">
+                <a:solidFill>
+                  <a:schemeClr val="tx1"/>
+                </a:solidFill>
+                <a:latin typeface="+mn-lt"/>
+                <a:ea typeface="+mn-ea"/>
+                <a:cs typeface="+mn-cs"/>
+              </a:defRPr>
+            </a:lvl9pPr>
+          </a:lstStyle>
+          <a:p>
+            <a:pPr marL="0" indent="0" algn="ctr">
+              <a:lnSpc>
+                <a:spcPts val="4320"/>
+              </a:lnSpc>
+              <a:buNone/>
+            </a:pPr>
+            <a:r>
+              <a:rPr lang="en-US" sz="3600">
+                <a:solidFill>
+                  <a:srgbClr val="727478"/>
+                </a:solidFill>
+                <a:latin typeface="思源黑体 CN"/>
+                <a:ea typeface="思源黑体 CN"/>
+                <a:cs typeface="思源黑体 CN"/>
+              </a:rPr>
+              <a:t>←</a:t>
+            </a:r>
+            <a:endParaRPr lang="en-US" sz="3600"/>
+          </a:p>
+        </p:txBody>
+      </p:sp>
+      <p:grpSp>
+        <p:nvGrpSpPr>
+          <p:cNvPr id="33" name="组合 32"/>
+          <p:cNvGrpSpPr/>
+          <p:nvPr>
+            <p:custDataLst>
+              <p:tags r:id="rId10"/>
+            </p:custDataLst>
+          </p:nvPr>
+        </p:nvGrpSpPr>
+        <p:grpSpPr>
+          <a:xfrm>
+            <a:off x="4602480" y="4328160"/>
+            <a:ext cx="3368040" cy="2087880"/>
+            <a:chOff x="-635000" y="-635000"/>
+            <a:chExt cx="3368040" cy="2087880"/>
+          </a:xfrm>
+        </p:grpSpPr>
+        <p:pic>
+          <p:nvPicPr>
+            <p:cNvPr id="34" name="Image 6" descr="TEMP_Z_ORDER_18"/>
+            <p:cNvPicPr>
+              <a:picLocks noChangeAspect="1"/>
+            </p:cNvPicPr>
+            <p:nvPr>
+              <p:custDataLst>
+                <p:tags r:id="rId18"/>
+              </p:custDataLst>
+            </p:nvPr>
+          </p:nvPicPr>
+          <p:blipFill>
+            <a:blip r:embed="rId40">
+              <a:extLst>
+                <a:ext uri="{96DAC541-7B7A-43D3-8B79-37D633B846F1}">
+                  <asvg:svgBlip xmlns:asvg="http://schemas.microsoft.com/office/drawing/2016/SVG/main" r:embed="rId41"/>
+                </a:ext>
+              </a:extLst>
+            </a:blip>
+            <a:stretch>
+              <a:fillRect/>
+            </a:stretch>
+          </p:blipFill>
+          <p:spPr>
+            <a:xfrm>
+              <a:off x="-635000" y="-635000"/>
+              <a:ext cx="3368040" cy="2087880"/>
+            </a:xfrm>
+            <a:prstGeom prst="rect">
+              <a:avLst/>
+            </a:prstGeom>
+          </p:spPr>
+        </p:pic>
+        <p:sp>
+          <p:nvSpPr>
+            <p:cNvPr id="35" name="Text 12" descr="TEMP_Z_ORDER_19"/>
+            <p:cNvSpPr/>
+            <p:nvPr>
+              <p:custDataLst>
+                <p:tags r:id="rId19"/>
+              </p:custDataLst>
+            </p:nvPr>
+          </p:nvSpPr>
+          <p:spPr>
+            <a:xfrm>
+              <a:off x="-436880" y="-436880"/>
+              <a:ext cx="2980944" cy="351254"/>
+            </a:xfrm>
+            <a:prstGeom prst="rect">
+              <a:avLst/>
+            </a:prstGeom>
+            <a:noFill/>
+          </p:spPr>
+          <p:txBody>
+            <a:bodyPr wrap="square" lIns="0" tIns="0" rIns="0" bIns="0" rtlCol="0" anchor="t">
+              <a:spAutoFit/>
+            </a:bodyPr>
+            <a:lstStyle>
+              <a:lvl1pPr marL="0" algn="l" defTabSz="914400" rtl="0" eaLnBrk="1" latinLnBrk="0" hangingPunct="1">
+                <a:defRPr sz="1800" kern="1200">
+                  <a:solidFill>
+                    <a:schemeClr val="tx1"/>
+                  </a:solidFill>
+                  <a:latin typeface="+mn-lt"/>
+                  <a:ea typeface="+mn-ea"/>
+                  <a:cs typeface="+mn-cs"/>
+                </a:defRPr>
+              </a:lvl1pPr>
+              <a:lvl2pPr marL="457200" algn="l" defTabSz="914400" rtl="0" eaLnBrk="1" latinLnBrk="0" hangingPunct="1">
+                <a:defRPr sz="1800" kern="1200">
+                  <a:solidFill>
+                    <a:schemeClr val="tx1"/>
+                  </a:solidFill>
+                  <a:latin typeface="+mn-lt"/>
+                  <a:ea typeface="+mn-ea"/>
+                  <a:cs typeface="+mn-cs"/>
+                </a:defRPr>
+              </a:lvl2pPr>
+              <a:lvl3pPr marL="914400" algn="l" defTabSz="914400" rtl="0" eaLnBrk="1" latinLnBrk="0" hangingPunct="1">
+                <a:defRPr sz="1800" kern="1200">
+                  <a:solidFill>
+                    <a:schemeClr val="tx1"/>
+                  </a:solidFill>
+                  <a:latin typeface="+mn-lt"/>
+                  <a:ea typeface="+mn-ea"/>
+                  <a:cs typeface="+mn-cs"/>
+                </a:defRPr>
+              </a:lvl3pPr>
+              <a:lvl4pPr marL="1371600" algn="l" defTabSz="914400" rtl="0" eaLnBrk="1" latinLnBrk="0" hangingPunct="1">
+                <a:defRPr sz="1800" kern="1200">
+                  <a:solidFill>
+                    <a:schemeClr val="tx1"/>
+                  </a:solidFill>
+                  <a:latin typeface="+mn-lt"/>
+                  <a:ea typeface="+mn-ea"/>
+                  <a:cs typeface="+mn-cs"/>
+                </a:defRPr>
+              </a:lvl4pPr>
+              <a:lvl5pPr marL="1828800" algn="l" defTabSz="914400" rtl="0" eaLnBrk="1" latinLnBrk="0" hangingPunct="1">
+                <a:defRPr sz="1800" kern="1200">
+                  <a:solidFill>
+                    <a:schemeClr val="tx1"/>
+                  </a:solidFill>
+                  <a:latin typeface="+mn-lt"/>
+                  <a:ea typeface="+mn-ea"/>
+                  <a:cs typeface="+mn-cs"/>
+                </a:defRPr>
+              </a:lvl5pPr>
+              <a:lvl6pPr marL="2286000" algn="l" defTabSz="914400" rtl="0" eaLnBrk="1" latinLnBrk="0" hangingPunct="1">
+                <a:defRPr sz="1800" kern="1200">
+                  <a:solidFill>
+                    <a:schemeClr val="tx1"/>
+                  </a:solidFill>
+                  <a:latin typeface="+mn-lt"/>
+                  <a:ea typeface="+mn-ea"/>
+                  <a:cs typeface="+mn-cs"/>
+                </a:defRPr>
+              </a:lvl6pPr>
+              <a:lvl7pPr marL="2743200" algn="l" defTabSz="914400" rtl="0" eaLnBrk="1" latinLnBrk="0" hangingPunct="1">
+                <a:defRPr sz="1800" kern="1200">
+                  <a:solidFill>
+                    <a:schemeClr val="tx1"/>
+                  </a:solidFill>
+                  <a:latin typeface="+mn-lt"/>
+                  <a:ea typeface="+mn-ea"/>
+                  <a:cs typeface="+mn-cs"/>
+                </a:defRPr>
+              </a:lvl7pPr>
+              <a:lvl8pPr marL="3200400" algn="l" defTabSz="914400" rtl="0" eaLnBrk="1" latinLnBrk="0" hangingPunct="1">
+                <a:defRPr sz="1800" kern="1200">
+                  <a:solidFill>
+                    <a:schemeClr val="tx1"/>
+                  </a:solidFill>
+                  <a:latin typeface="+mn-lt"/>
+                  <a:ea typeface="+mn-ea"/>
+                  <a:cs typeface="+mn-cs"/>
+                </a:defRPr>
+              </a:lvl8pPr>
+              <a:lvl9pPr marL="3657600" algn="l" defTabSz="914400" rtl="0" eaLnBrk="1" latinLnBrk="0" hangingPunct="1">
+                <a:defRPr sz="1800" kern="1200">
+                  <a:solidFill>
+                    <a:schemeClr val="tx1"/>
+                  </a:solidFill>
+                  <a:latin typeface="+mn-lt"/>
+                  <a:ea typeface="+mn-ea"/>
+                  <a:cs typeface="+mn-cs"/>
+                </a:defRPr>
+              </a:lvl9pPr>
+            </a:lstStyle>
+            <a:p>
+              <a:pPr marL="0" indent="0" algn="l">
+                <a:lnSpc>
+                  <a:spcPts val="2880"/>
+                </a:lnSpc>
+                <a:buNone/>
+              </a:pPr>
+              <a:r>
+                <a:rPr lang="en-US" sz="1920">
+                  <a:solidFill>
+                    <a:srgbClr val="5A0767"/>
+                  </a:solidFill>
+                  <a:latin typeface="思源黑体 CN" pitchFamily="34" charset="0"/>
+                  <a:ea typeface="思源黑体 CN" pitchFamily="34" charset="-122"/>
+                  <a:cs typeface="思源黑体 CN" pitchFamily="34" charset="-120"/>
+                </a:rPr>
+                <a:t>知识存储层</a:t>
+              </a:r>
+              <a:endParaRPr lang="en-US" sz="1920"/>
+            </a:p>
+          </p:txBody>
+        </p:sp>
+        <p:sp>
+          <p:nvSpPr>
+            <p:cNvPr id="36" name="Text 13" descr="TEMP_Z_ORDER_20"/>
+            <p:cNvSpPr/>
+            <p:nvPr>
+              <p:custDataLst>
+                <p:tags r:id="rId20"/>
+              </p:custDataLst>
+            </p:nvPr>
+          </p:nvSpPr>
+          <p:spPr>
+            <a:xfrm>
+              <a:off x="-436880" y="-10160"/>
+              <a:ext cx="2980944" cy="1255222"/>
+            </a:xfrm>
+            <a:prstGeom prst="rect">
+              <a:avLst/>
+            </a:prstGeom>
+            <a:noFill/>
+          </p:spPr>
+          <p:txBody>
+            <a:bodyPr wrap="square" lIns="0" tIns="0" rIns="0" bIns="0" rtlCol="0" anchor="t">
+              <a:spAutoFit/>
+            </a:bodyPr>
+            <a:lstStyle>
+              <a:lvl1pPr marL="0" algn="l" defTabSz="914400" rtl="0" eaLnBrk="1" latinLnBrk="0" hangingPunct="1">
+                <a:defRPr sz="1800" kern="1200">
+                  <a:solidFill>
+                    <a:schemeClr val="tx1"/>
+                  </a:solidFill>
+                  <a:latin typeface="+mn-lt"/>
+                  <a:ea typeface="+mn-ea"/>
+                  <a:cs typeface="+mn-cs"/>
+                </a:defRPr>
+              </a:lvl1pPr>
+              <a:lvl2pPr marL="457200" algn="l" defTabSz="914400" rtl="0" eaLnBrk="1" latinLnBrk="0" hangingPunct="1">
+                <a:defRPr sz="1800" kern="1200">
+                  <a:solidFill>
+                    <a:schemeClr val="tx1"/>
+                  </a:solidFill>
+                  <a:latin typeface="+mn-lt"/>
+                  <a:ea typeface="+mn-ea"/>
+                  <a:cs typeface="+mn-cs"/>
+                </a:defRPr>
+              </a:lvl2pPr>
+              <a:lvl3pPr marL="914400" algn="l" defTabSz="914400" rtl="0" eaLnBrk="1" latinLnBrk="0" hangingPunct="1">
+                <a:defRPr sz="1800" kern="1200">
+                  <a:solidFill>
+                    <a:schemeClr val="tx1"/>
+                  </a:solidFill>
+                  <a:latin typeface="+mn-lt"/>
+                  <a:ea typeface="+mn-ea"/>
+                  <a:cs typeface="+mn-cs"/>
+                </a:defRPr>
+              </a:lvl3pPr>
+              <a:lvl4pPr marL="1371600" algn="l" defTabSz="914400" rtl="0" eaLnBrk="1" latinLnBrk="0" hangingPunct="1">
+                <a:defRPr sz="1800" kern="1200">
+                  <a:solidFill>
+                    <a:schemeClr val="tx1"/>
+                  </a:solidFill>
+                  <a:latin typeface="+mn-lt"/>
+                  <a:ea typeface="+mn-ea"/>
+                  <a:cs typeface="+mn-cs"/>
+                </a:defRPr>
+              </a:lvl4pPr>
+              <a:lvl5pPr marL="1828800" algn="l" defTabSz="914400" rtl="0" eaLnBrk="1" latinLnBrk="0" hangingPunct="1">
+                <a:defRPr sz="1800" kern="1200">
+                  <a:solidFill>
+                    <a:schemeClr val="tx1"/>
+                  </a:solidFill>
+                  <a:latin typeface="+mn-lt"/>
+                  <a:ea typeface="+mn-ea"/>
+                  <a:cs typeface="+mn-cs"/>
+                </a:defRPr>
+              </a:lvl5pPr>
+              <a:lvl6pPr marL="2286000" algn="l" defTabSz="914400" rtl="0" eaLnBrk="1" latinLnBrk="0" hangingPunct="1">
+                <a:defRPr sz="1800" kern="1200">
+                  <a:solidFill>
+                    <a:schemeClr val="tx1"/>
+                  </a:solidFill>
+                  <a:latin typeface="+mn-lt"/>
+                  <a:ea typeface="+mn-ea"/>
+                  <a:cs typeface="+mn-cs"/>
+                </a:defRPr>
+              </a:lvl6pPr>
+              <a:lvl7pPr marL="2743200" algn="l" defTabSz="914400" rtl="0" eaLnBrk="1" latinLnBrk="0" hangingPunct="1">
+                <a:defRPr sz="1800" kern="1200">
+                  <a:solidFill>
+                    <a:schemeClr val="tx1"/>
+                  </a:solidFill>
+                  <a:latin typeface="+mn-lt"/>
+                  <a:ea typeface="+mn-ea"/>
+                  <a:cs typeface="+mn-cs"/>
+                </a:defRPr>
+              </a:lvl7pPr>
+              <a:lvl8pPr marL="3200400" algn="l" defTabSz="914400" rtl="0" eaLnBrk="1" latinLnBrk="0" hangingPunct="1">
+                <a:defRPr sz="1800" kern="1200">
+                  <a:solidFill>
+                    <a:schemeClr val="tx1"/>
+                  </a:solidFill>
+                  <a:latin typeface="+mn-lt"/>
+                  <a:ea typeface="+mn-ea"/>
+                  <a:cs typeface="+mn-cs"/>
+                </a:defRPr>
+              </a:lvl8pPr>
+              <a:lvl9pPr marL="3657600" algn="l" defTabSz="914400" rtl="0" eaLnBrk="1" latinLnBrk="0" hangingPunct="1">
+                <a:defRPr sz="1800" kern="1200">
+                  <a:solidFill>
+                    <a:schemeClr val="tx1"/>
+                  </a:solidFill>
+                  <a:latin typeface="+mn-lt"/>
+                  <a:ea typeface="+mn-ea"/>
+                  <a:cs typeface="+mn-cs"/>
+                </a:defRPr>
+              </a:lvl9pPr>
+            </a:lstStyle>
+            <a:p>
+              <a:pPr marL="0" indent="0" algn="l">
+                <a:lnSpc>
+                  <a:spcPts val="1987"/>
+                </a:lnSpc>
+                <a:buNone/>
+              </a:pPr>
+              <a:r>
+                <a:rPr lang="en-US" sz="1440" dirty="0">
+                  <a:solidFill>
+                    <a:srgbClr val="4B5563"/>
+                  </a:solidFill>
+                  <a:latin typeface="思源黑体 CN" pitchFamily="34" charset="0"/>
+                  <a:ea typeface="思源黑体 CN" pitchFamily="34" charset="-122"/>
+                  <a:cs typeface="思源黑体 CN" pitchFamily="34" charset="-120"/>
+                </a:rPr>
+                <a:t>Neo4j图数据库·节点按小类(A1-F3)</a:t>
+              </a:r>
+              <a:r>
+                <a:rPr lang="en-US" sz="1440" dirty="0" err="1">
+                  <a:solidFill>
+                    <a:srgbClr val="4B5563"/>
+                  </a:solidFill>
+                  <a:latin typeface="思源黑体 CN" pitchFamily="34" charset="0"/>
+                  <a:ea typeface="思源黑体 CN" pitchFamily="34" charset="-122"/>
+                  <a:cs typeface="思源黑体 CN" pitchFamily="34" charset="-120"/>
+                </a:rPr>
+                <a:t>分标签·频次分档配色；关系按relation_group分类型·附证据属性；Cypher编程查询·路径分析·子图导出</a:t>
+              </a:r>
+              <a:r>
+                <a:rPr lang="en-US" sz="1440" dirty="0">
+                  <a:solidFill>
+                    <a:srgbClr val="4B5563"/>
+                  </a:solidFill>
+                  <a:latin typeface="思源黑体 CN" pitchFamily="34" charset="0"/>
+                  <a:ea typeface="思源黑体 CN" pitchFamily="34" charset="-122"/>
+                  <a:cs typeface="思源黑体 CN" pitchFamily="34" charset="-120"/>
+                </a:rPr>
+                <a:t>。</a:t>
+              </a:r>
+              <a:endParaRPr lang="en-US" sz="1440" dirty="0"/>
+            </a:p>
+          </p:txBody>
+        </p:sp>
+      </p:grpSp>
+      <p:sp>
+        <p:nvSpPr>
+          <p:cNvPr id="23" name="Text 14"/>
+          <p:cNvSpPr/>
+          <p:nvPr>
+            <p:custDataLst>
+              <p:tags r:id="rId11"/>
+            </p:custDataLst>
+          </p:nvPr>
+        </p:nvSpPr>
+        <p:spPr>
+          <a:xfrm>
+            <a:off x="487680" y="411675"/>
+            <a:ext cx="2590453" cy="369332"/>
+          </a:xfrm>
+          <a:prstGeom prst="rect">
+            <a:avLst/>
+          </a:prstGeom>
+          <a:noFill/>
+        </p:spPr>
+        <p:txBody>
+          <a:bodyPr wrap="none" lIns="0" tIns="0" rIns="0" bIns="0" rtlCol="0" anchor="b">
+            <a:spAutoFit/>
+          </a:bodyPr>
+          <a:lstStyle>
+            <a:lvl1pPr marL="0" algn="l" defTabSz="914400" rtl="0" eaLnBrk="1" latinLnBrk="0" hangingPunct="1">
+              <a:defRPr sz="1800" kern="1200">
+                <a:solidFill>
+                  <a:schemeClr val="tx1"/>
+                </a:solidFill>
+                <a:latin typeface="+mn-lt"/>
+                <a:ea typeface="+mn-ea"/>
+                <a:cs typeface="+mn-cs"/>
+              </a:defRPr>
+            </a:lvl1pPr>
+            <a:lvl2pPr marL="457200" algn="l" defTabSz="914400" rtl="0" eaLnBrk="1" latinLnBrk="0" hangingPunct="1">
+              <a:defRPr sz="1800" kern="1200">
+                <a:solidFill>
+                  <a:schemeClr val="tx1"/>
+                </a:solidFill>
+                <a:latin typeface="+mn-lt"/>
+                <a:ea typeface="+mn-ea"/>
+                <a:cs typeface="+mn-cs"/>
+              </a:defRPr>
+            </a:lvl2pPr>
+            <a:lvl3pPr marL="914400" algn="l" defTabSz="914400" rtl="0" eaLnBrk="1" latinLnBrk="0" hangingPunct="1">
+              <a:defRPr sz="1800" kern="1200">
+                <a:solidFill>
+                  <a:schemeClr val="tx1"/>
+                </a:solidFill>
+                <a:latin typeface="+mn-lt"/>
+                <a:ea typeface="+mn-ea"/>
+                <a:cs typeface="+mn-cs"/>
+              </a:defRPr>
+            </a:lvl3pPr>
+            <a:lvl4pPr marL="1371600" algn="l" defTabSz="914400" rtl="0" eaLnBrk="1" latinLnBrk="0" hangingPunct="1">
+              <a:defRPr sz="1800" kern="1200">
+                <a:solidFill>
+                  <a:schemeClr val="tx1"/>
+                </a:solidFill>
+                <a:latin typeface="+mn-lt"/>
+                <a:ea typeface="+mn-ea"/>
+                <a:cs typeface="+mn-cs"/>
+              </a:defRPr>
+            </a:lvl4pPr>
+            <a:lvl5pPr marL="1828800" algn="l" defTabSz="914400" rtl="0" eaLnBrk="1" latinLnBrk="0" hangingPunct="1">
+              <a:defRPr sz="1800" kern="1200">
+                <a:solidFill>
+                  <a:schemeClr val="tx1"/>
+                </a:solidFill>
+                <a:latin typeface="+mn-lt"/>
+                <a:ea typeface="+mn-ea"/>
+                <a:cs typeface="+mn-cs"/>
+              </a:defRPr>
+            </a:lvl5pPr>
+            <a:lvl6pPr marL="2286000" algn="l" defTabSz="914400" rtl="0" eaLnBrk="1" latinLnBrk="0" hangingPunct="1">
+              <a:defRPr sz="1800" kern="1200">
+                <a:solidFill>
+                  <a:schemeClr val="tx1"/>
+                </a:solidFill>
+                <a:latin typeface="+mn-lt"/>
+                <a:ea typeface="+mn-ea"/>
+                <a:cs typeface="+mn-cs"/>
+              </a:defRPr>
+            </a:lvl6pPr>
+            <a:lvl7pPr marL="2743200" algn="l" defTabSz="914400" rtl="0" eaLnBrk="1" latinLnBrk="0" hangingPunct="1">
+              <a:defRPr sz="1800" kern="1200">
+                <a:solidFill>
+                  <a:schemeClr val="tx1"/>
+                </a:solidFill>
+                <a:latin typeface="+mn-lt"/>
+                <a:ea typeface="+mn-ea"/>
+                <a:cs typeface="+mn-cs"/>
+              </a:defRPr>
+            </a:lvl7pPr>
+            <a:lvl8pPr marL="3200400" algn="l" defTabSz="914400" rtl="0" eaLnBrk="1" latinLnBrk="0" hangingPunct="1">
+              <a:defRPr sz="1800" kern="1200">
+                <a:solidFill>
+                  <a:schemeClr val="tx1"/>
+                </a:solidFill>
+                <a:latin typeface="+mn-lt"/>
+                <a:ea typeface="+mn-ea"/>
+                <a:cs typeface="+mn-cs"/>
+              </a:defRPr>
+            </a:lvl8pPr>
+            <a:lvl9pPr marL="3657600" algn="l" defTabSz="914400" rtl="0" eaLnBrk="1" latinLnBrk="0" hangingPunct="1">
+              <a:defRPr sz="1800" kern="1200">
+                <a:solidFill>
+                  <a:schemeClr val="tx1"/>
+                </a:solidFill>
+                <a:latin typeface="+mn-lt"/>
+                <a:ea typeface="+mn-ea"/>
+                <a:cs typeface="+mn-cs"/>
+              </a:defRPr>
+            </a:lvl9pPr>
+          </a:lstStyle>
+          <a:p>
+            <a:pPr marL="0" indent="0" algn="l">
+              <a:lnSpc>
+                <a:spcPct val="100000"/>
+              </a:lnSpc>
+              <a:buNone/>
+            </a:pPr>
+            <a:r>
+              <a:rPr lang="en-US" sz="2400" dirty="0">
+                <a:solidFill>
+                  <a:srgbClr val="5A0767"/>
+                </a:solidFill>
+                <a:latin typeface="微软雅黑" panose="020B0503020204020204" pitchFamily="34" charset="-122"/>
+                <a:ea typeface="微软雅黑" panose="020B0503020204020204" pitchFamily="34" charset="-122"/>
+              </a:rPr>
+              <a:t>2.1技术全流程架构</a:t>
+            </a:r>
+            <a:endParaRPr lang="en-US" sz="2400" dirty="0">
+              <a:latin typeface="微软雅黑" panose="020B0503020204020204" pitchFamily="34" charset="-122"/>
+              <a:ea typeface="微软雅黑" panose="020B0503020204020204" pitchFamily="34" charset="-122"/>
+            </a:endParaRPr>
+          </a:p>
+        </p:txBody>
+      </p:sp>
+      <p:grpSp>
+        <p:nvGrpSpPr>
+          <p:cNvPr id="5" name="组合 4"/>
+          <p:cNvGrpSpPr/>
+          <p:nvPr>
+            <p:custDataLst>
+              <p:tags r:id="rId12"/>
+            </p:custDataLst>
+          </p:nvPr>
+        </p:nvGrpSpPr>
+        <p:grpSpPr>
+          <a:xfrm>
+            <a:off x="176204" y="1320813"/>
+            <a:ext cx="4283455" cy="332754"/>
+            <a:chOff x="-635000" y="-635000"/>
+            <a:chExt cx="4283455" cy="332754"/>
+          </a:xfrm>
+        </p:grpSpPr>
+        <p:pic>
+          <p:nvPicPr>
+            <p:cNvPr id="6" name="Image 8" descr="TEMP_Z_ORDER_9"/>
+            <p:cNvPicPr>
+              <a:picLocks noChangeAspect="1"/>
+            </p:cNvPicPr>
+            <p:nvPr>
+              <p:custDataLst>
+                <p:tags r:id="rId16"/>
+              </p:custDataLst>
+            </p:nvPr>
+          </p:nvPicPr>
+          <p:blipFill>
+            <a:blip r:embed="rId42"/>
+            <a:stretch>
+              <a:fillRect/>
+            </a:stretch>
+          </p:blipFill>
+          <p:spPr>
+            <a:xfrm>
+              <a:off x="-635000" y="-331046"/>
+              <a:ext cx="4283455" cy="28800"/>
+            </a:xfrm>
+            <a:prstGeom prst="rect">
+              <a:avLst/>
+            </a:prstGeom>
+          </p:spPr>
+        </p:pic>
+        <p:pic>
+          <p:nvPicPr>
+            <p:cNvPr id="4" name="Image 9" descr="TEMP_Z_ORDER_10"/>
+            <p:cNvPicPr>
+              <a:picLocks noChangeAspect="1"/>
+            </p:cNvPicPr>
+            <p:nvPr>
+              <p:custDataLst>
+                <p:tags r:id="rId17"/>
+              </p:custDataLst>
+            </p:nvPr>
+          </p:nvPicPr>
+          <p:blipFill>
+            <a:blip r:embed="rId43"/>
+            <a:stretch>
+              <a:fillRect/>
+            </a:stretch>
+          </p:blipFill>
+          <p:spPr>
+            <a:xfrm>
+              <a:off x="-635000" y="-635000"/>
+              <a:ext cx="153061" cy="153063"/>
+            </a:xfrm>
+            <a:prstGeom prst="rect">
+              <a:avLst/>
+            </a:prstGeom>
+          </p:spPr>
+        </p:pic>
+      </p:grpSp>
+      <p:grpSp>
+        <p:nvGrpSpPr>
+          <p:cNvPr id="8" name="组合 7"/>
+          <p:cNvGrpSpPr/>
+          <p:nvPr>
+            <p:custDataLst>
+              <p:tags r:id="rId13"/>
+            </p:custDataLst>
+          </p:nvPr>
+        </p:nvGrpSpPr>
+        <p:grpSpPr>
+          <a:xfrm>
+            <a:off x="370785" y="1591176"/>
+            <a:ext cx="4203800" cy="1618652"/>
+            <a:chOff x="-635000" y="-631917"/>
+            <a:chExt cx="4203800" cy="1612050"/>
+          </a:xfrm>
+        </p:grpSpPr>
+        <p:sp>
+          <p:nvSpPr>
+            <p:cNvPr id="9" name="Text 1" descr="TEMP_Z_ORDER_12"/>
+            <p:cNvSpPr/>
+            <p:nvPr>
+              <p:custDataLst>
+                <p:tags r:id="rId14"/>
+              </p:custDataLst>
+            </p:nvPr>
+          </p:nvSpPr>
+          <p:spPr>
+            <a:xfrm>
+              <a:off x="-635000" y="-84134"/>
+              <a:ext cx="4202361" cy="1064267"/>
+            </a:xfrm>
+            <a:prstGeom prst="rect">
+              <a:avLst/>
+            </a:prstGeom>
+            <a:noFill/>
+          </p:spPr>
+          <p:txBody>
+            <a:bodyPr wrap="square" lIns="0" tIns="0" rIns="0" bIns="0" rtlCol="0" anchor="t">
+              <a:spAutoFit/>
+            </a:bodyPr>
+            <a:lstStyle>
+              <a:lvl1pPr marL="0" algn="l" defTabSz="914400" rtl="0" eaLnBrk="1" latinLnBrk="0" hangingPunct="1">
+                <a:defRPr sz="1800" kern="1200">
+                  <a:solidFill>
+                    <a:schemeClr val="tx1"/>
+                  </a:solidFill>
+                  <a:latin typeface="+mn-lt"/>
+                  <a:ea typeface="+mn-ea"/>
+                  <a:cs typeface="+mn-cs"/>
+                </a:defRPr>
+              </a:lvl1pPr>
+              <a:lvl2pPr marL="457200" algn="l" defTabSz="914400" rtl="0" eaLnBrk="1" latinLnBrk="0" hangingPunct="1">
+                <a:defRPr sz="1800" kern="1200">
+                  <a:solidFill>
+                    <a:schemeClr val="tx1"/>
+                  </a:solidFill>
+                  <a:latin typeface="+mn-lt"/>
+                  <a:ea typeface="+mn-ea"/>
+                  <a:cs typeface="+mn-cs"/>
+                </a:defRPr>
+              </a:lvl2pPr>
+              <a:lvl3pPr marL="914400" algn="l" defTabSz="914400" rtl="0" eaLnBrk="1" latinLnBrk="0" hangingPunct="1">
+                <a:defRPr sz="1800" kern="1200">
+                  <a:solidFill>
+                    <a:schemeClr val="tx1"/>
+                  </a:solidFill>
+                  <a:latin typeface="+mn-lt"/>
+                  <a:ea typeface="+mn-ea"/>
+                  <a:cs typeface="+mn-cs"/>
+                </a:defRPr>
+              </a:lvl3pPr>
+              <a:lvl4pPr marL="1371600" algn="l" defTabSz="914400" rtl="0" eaLnBrk="1" latinLnBrk="0" hangingPunct="1">
+                <a:defRPr sz="1800" kern="1200">
+                  <a:solidFill>
+                    <a:schemeClr val="tx1"/>
+                  </a:solidFill>
+                  <a:latin typeface="+mn-lt"/>
+                  <a:ea typeface="+mn-ea"/>
+                  <a:cs typeface="+mn-cs"/>
+                </a:defRPr>
+              </a:lvl4pPr>
+              <a:lvl5pPr marL="1828800" algn="l" defTabSz="914400" rtl="0" eaLnBrk="1" latinLnBrk="0" hangingPunct="1">
+                <a:defRPr sz="1800" kern="1200">
+                  <a:solidFill>
+                    <a:schemeClr val="tx1"/>
+                  </a:solidFill>
+                  <a:latin typeface="+mn-lt"/>
+                  <a:ea typeface="+mn-ea"/>
+                  <a:cs typeface="+mn-cs"/>
+                </a:defRPr>
+              </a:lvl5pPr>
+              <a:lvl6pPr marL="2286000" algn="l" defTabSz="914400" rtl="0" eaLnBrk="1" latinLnBrk="0" hangingPunct="1">
+                <a:defRPr sz="1800" kern="1200">
+                  <a:solidFill>
+                    <a:schemeClr val="tx1"/>
+                  </a:solidFill>
+                  <a:latin typeface="+mn-lt"/>
+                  <a:ea typeface="+mn-ea"/>
+                  <a:cs typeface="+mn-cs"/>
+                </a:defRPr>
+              </a:lvl6pPr>
+              <a:lvl7pPr marL="2743200" algn="l" defTabSz="914400" rtl="0" eaLnBrk="1" latinLnBrk="0" hangingPunct="1">
+                <a:defRPr sz="1800" kern="1200">
+                  <a:solidFill>
+                    <a:schemeClr val="tx1"/>
+                  </a:solidFill>
+                  <a:latin typeface="+mn-lt"/>
+                  <a:ea typeface="+mn-ea"/>
+                  <a:cs typeface="+mn-cs"/>
+                </a:defRPr>
+              </a:lvl7pPr>
+              <a:lvl8pPr marL="3200400" algn="l" defTabSz="914400" rtl="0" eaLnBrk="1" latinLnBrk="0" hangingPunct="1">
+                <a:defRPr sz="1800" kern="1200">
+                  <a:solidFill>
+                    <a:schemeClr val="tx1"/>
+                  </a:solidFill>
+                  <a:latin typeface="+mn-lt"/>
+                  <a:ea typeface="+mn-ea"/>
+                  <a:cs typeface="+mn-cs"/>
+                </a:defRPr>
+              </a:lvl8pPr>
+              <a:lvl9pPr marL="3657600" algn="l" defTabSz="914400" rtl="0" eaLnBrk="1" latinLnBrk="0" hangingPunct="1">
+                <a:defRPr sz="1800" kern="1200">
+                  <a:solidFill>
+                    <a:schemeClr val="tx1"/>
+                  </a:solidFill>
+                  <a:latin typeface="+mn-lt"/>
+                  <a:ea typeface="+mn-ea"/>
+                  <a:cs typeface="+mn-cs"/>
+                </a:defRPr>
+              </a:lvl9pPr>
+            </a:lstStyle>
+            <a:p>
+              <a:pPr marL="0" indent="0" algn="l">
+                <a:lnSpc>
+                  <a:spcPct val="150000"/>
+                </a:lnSpc>
+                <a:buNone/>
+              </a:pPr>
+              <a:r>
+                <a:rPr lang="en-US" sz="1600" dirty="0">
+                  <a:solidFill>
+                    <a:srgbClr val="545454"/>
+                  </a:solidFill>
+                </a:rPr>
+                <a:t>典籍PDF→RapidOCR→语料库→千问LLM抽取→Neo4j图谱→耦合/</a:t>
+              </a:r>
+              <a:r>
+                <a:rPr lang="en-US" sz="1600" dirty="0" err="1">
+                  <a:solidFill>
+                    <a:srgbClr val="545454"/>
+                  </a:solidFill>
+                </a:rPr>
+                <a:t>空间分析；多源POI+评论数据→清洗匹配→体验度评估</a:t>
+              </a:r>
+              <a:endParaRPr lang="en-US" sz="1600" dirty="0"/>
+            </a:p>
+          </p:txBody>
+        </p:sp>
+        <p:sp>
+          <p:nvSpPr>
+            <p:cNvPr id="10" name="Text 2" descr="TEMP_Z_ORDER_13"/>
+            <p:cNvSpPr/>
+            <p:nvPr>
+              <p:custDataLst>
+                <p:tags r:id="rId15"/>
+              </p:custDataLst>
+            </p:nvPr>
+          </p:nvSpPr>
+          <p:spPr>
+            <a:xfrm>
+              <a:off x="-343113" y="-631917"/>
+              <a:ext cx="3911913" cy="310779"/>
+            </a:xfrm>
+            <a:prstGeom prst="rect">
+              <a:avLst/>
+            </a:prstGeom>
+            <a:noFill/>
+          </p:spPr>
+          <p:txBody>
+            <a:bodyPr wrap="square" lIns="0" tIns="0" rIns="0" bIns="0" rtlCol="0" anchor="ctr">
+              <a:spAutoFit/>
+            </a:bodyPr>
+            <a:lstStyle>
+              <a:lvl1pPr marL="0" algn="l" defTabSz="914400" rtl="0" eaLnBrk="1" latinLnBrk="0" hangingPunct="1">
+                <a:defRPr sz="1800" kern="1200">
+                  <a:solidFill>
+                    <a:schemeClr val="tx1"/>
+                  </a:solidFill>
+                  <a:latin typeface="+mn-lt"/>
+                  <a:ea typeface="+mn-ea"/>
+                  <a:cs typeface="+mn-cs"/>
+                </a:defRPr>
+              </a:lvl1pPr>
+              <a:lvl2pPr marL="457200" algn="l" defTabSz="914400" rtl="0" eaLnBrk="1" latinLnBrk="0" hangingPunct="1">
+                <a:defRPr sz="1800" kern="1200">
+                  <a:solidFill>
+                    <a:schemeClr val="tx1"/>
+                  </a:solidFill>
+                  <a:latin typeface="+mn-lt"/>
+                  <a:ea typeface="+mn-ea"/>
+                  <a:cs typeface="+mn-cs"/>
+                </a:defRPr>
+              </a:lvl2pPr>
+              <a:lvl3pPr marL="914400" algn="l" defTabSz="914400" rtl="0" eaLnBrk="1" latinLnBrk="0" hangingPunct="1">
+                <a:defRPr sz="1800" kern="1200">
+                  <a:solidFill>
+                    <a:schemeClr val="tx1"/>
+                  </a:solidFill>
+                  <a:latin typeface="+mn-lt"/>
+                  <a:ea typeface="+mn-ea"/>
+                  <a:cs typeface="+mn-cs"/>
+                </a:defRPr>
+              </a:lvl3pPr>
+              <a:lvl4pPr marL="1371600" algn="l" defTabSz="914400" rtl="0" eaLnBrk="1" latinLnBrk="0" hangingPunct="1">
+                <a:defRPr sz="1800" kern="1200">
+                  <a:solidFill>
+                    <a:schemeClr val="tx1"/>
+                  </a:solidFill>
+                  <a:latin typeface="+mn-lt"/>
+                  <a:ea typeface="+mn-ea"/>
+                  <a:cs typeface="+mn-cs"/>
+                </a:defRPr>
+              </a:lvl4pPr>
+              <a:lvl5pPr marL="1828800" algn="l" defTabSz="914400" rtl="0" eaLnBrk="1" latinLnBrk="0" hangingPunct="1">
+                <a:defRPr sz="1800" kern="1200">
+                  <a:solidFill>
+                    <a:schemeClr val="tx1"/>
+                  </a:solidFill>
+                  <a:latin typeface="+mn-lt"/>
+                  <a:ea typeface="+mn-ea"/>
+                  <a:cs typeface="+mn-cs"/>
+                </a:defRPr>
+              </a:lvl5pPr>
+              <a:lvl6pPr marL="2286000" algn="l" defTabSz="914400" rtl="0" eaLnBrk="1" latinLnBrk="0" hangingPunct="1">
+                <a:defRPr sz="1800" kern="1200">
+                  <a:solidFill>
+                    <a:schemeClr val="tx1"/>
+                  </a:solidFill>
+                  <a:latin typeface="+mn-lt"/>
+                  <a:ea typeface="+mn-ea"/>
+                  <a:cs typeface="+mn-cs"/>
+                </a:defRPr>
+              </a:lvl6pPr>
+              <a:lvl7pPr marL="2743200" algn="l" defTabSz="914400" rtl="0" eaLnBrk="1" latinLnBrk="0" hangingPunct="1">
+                <a:defRPr sz="1800" kern="1200">
+                  <a:solidFill>
+                    <a:schemeClr val="tx1"/>
+                  </a:solidFill>
+                  <a:latin typeface="+mn-lt"/>
+                  <a:ea typeface="+mn-ea"/>
+                  <a:cs typeface="+mn-cs"/>
+                </a:defRPr>
+              </a:lvl7pPr>
+              <a:lvl8pPr marL="3200400" algn="l" defTabSz="914400" rtl="0" eaLnBrk="1" latinLnBrk="0" hangingPunct="1">
+                <a:defRPr sz="1800" kern="1200">
+                  <a:solidFill>
+                    <a:schemeClr val="tx1"/>
+                  </a:solidFill>
+                  <a:latin typeface="+mn-lt"/>
+                  <a:ea typeface="+mn-ea"/>
+                  <a:cs typeface="+mn-cs"/>
+                </a:defRPr>
+              </a:lvl8pPr>
+              <a:lvl9pPr marL="3657600" algn="l" defTabSz="914400" rtl="0" eaLnBrk="1" latinLnBrk="0" hangingPunct="1">
+                <a:defRPr sz="1800" kern="1200">
+                  <a:solidFill>
+                    <a:schemeClr val="tx1"/>
+                  </a:solidFill>
+                  <a:latin typeface="+mn-lt"/>
+                  <a:ea typeface="+mn-ea"/>
+                  <a:cs typeface="+mn-cs"/>
+                </a:defRPr>
+              </a:lvl9pPr>
+            </a:lstStyle>
+            <a:p>
+              <a:pPr marL="0" indent="0" algn="l">
+                <a:lnSpc>
+                  <a:spcPts val="2496"/>
+                </a:lnSpc>
+                <a:buNone/>
+              </a:pPr>
+              <a:r>
+                <a:rPr lang="en-US" sz="1920" b="1" dirty="0" err="1">
+                  <a:solidFill>
+                    <a:srgbClr val="5A0767"/>
+                  </a:solidFill>
+                </a:rPr>
+                <a:t>技术路线</a:t>
+              </a:r>
+              <a:endParaRPr lang="en-US" sz="1920" dirty="0"/>
+            </a:p>
+          </p:txBody>
+        </p:sp>
+      </p:grpSp>
     </p:spTree>
   </p:cSld>
   <p:clrMapOvr>
@@ -4149,378 +6942,1469 @@
   <p:transition spd="slow">
     <p:cover/>
   </p:transition>
-</p:sld>
-</file>
-
-<file path=ppt/slides/slide2.xml><?xml version="1.0" encoding="utf-8"?>
-<p:sld xmlns:a="http://schemas.openxmlformats.org/drawingml/2006/main" xmlns:r="http://schemas.openxmlformats.org/officeDocument/2006/relationships" xmlns:p="http://schemas.openxmlformats.org/presentationml/2006/main">
-  <p:cSld>
-    <p:spTree>
-      <p:nvGrpSpPr>
-        <p:cNvPr id="1" name=""/>
-        <p:cNvGrpSpPr/>
-        <p:nvPr/>
-      </p:nvGrpSpPr>
-      <p:grpSpPr>
-        <a:xfrm>
-          <a:off x="0" y="0"/>
-          <a:ext cx="0" cy="0"/>
-          <a:chOff x="0" y="0"/>
-          <a:chExt cx="0" cy="0"/>
-        </a:xfrm>
-      </p:grpSpPr>
-      <p:pic>
-        <p:nvPicPr>
-          <p:cNvPr id="2" name="Image 0" descr="https://oss.jianzeppt.com/editablePptPic/isIllustration_2_isShadow_0/44fd407f-6289-4c0d-9da8-5615dc49cf12_image_024f533a16df894d6710d6aaad9f47c2_14123563.png?x-oss-process=image/resize,w_1440,h_800,m_lfit/format,png"/>
-          <p:cNvPicPr>
-            <a:picLocks noChangeAspect="1"/>
-          </p:cNvPicPr>
-          <p:nvPr>
-            <p:custDataLst>
-              <p:tags r:id="rId1"/>
-            </p:custDataLst>
-          </p:nvPr>
-        </p:nvPicPr>
-        <p:blipFill>
-          <a:blip r:embed="rId5"/>
-          <a:stretch>
-            <a:fillRect/>
-          </a:stretch>
-        </p:blipFill>
-        <p:spPr>
-          <a:xfrm>
-            <a:off x="335360" y="203042"/>
-            <a:ext cx="82800" cy="896400"/>
-          </a:xfrm>
-          <a:prstGeom prst="rect">
-            <a:avLst/>
-          </a:prstGeom>
-        </p:spPr>
-      </p:pic>
-      <p:pic>
-        <p:nvPicPr>
-          <p:cNvPr id="3" name="Image 1" descr="https://oss.jianzeppt.com/editablePptPic/isIllustration_1_isShadow_0/44fd407f-6289-4c0d-9da8-5615dc49cf12_image_90819cb7d4a6a1eecbd1ae23dec6207e_14123563.png?x-oss-process=image/resize,w_1440,h_800,m_lfit/format,png"/>
-          <p:cNvPicPr>
-            <a:picLocks noChangeAspect="1"/>
-          </p:cNvPicPr>
-          <p:nvPr>
-            <p:custDataLst>
-              <p:tags r:id="rId2"/>
-            </p:custDataLst>
-          </p:nvPr>
-        </p:nvPicPr>
-        <p:blipFill>
-          <a:blip r:embed="rId6"/>
-          <a:stretch>
-            <a:fillRect/>
-          </a:stretch>
-        </p:blipFill>
-        <p:spPr>
-          <a:xfrm>
-            <a:off x="9785720" y="194778"/>
-            <a:ext cx="2288951" cy="901224"/>
-          </a:xfrm>
-          <a:prstGeom prst="rect">
-            <a:avLst/>
-          </a:prstGeom>
-        </p:spPr>
-      </p:pic>
-    </p:spTree>
-  </p:cSld>
-  <p:clrMapOvr>
-    <a:masterClrMapping/>
-  </p:clrMapOvr>
-  <p:transition spd="slow">
-    <p:cover/>
-  </p:transition>
-</p:sld>
-</file>
-
-<file path=ppt/slides/slide3.xml><?xml version="1.0" encoding="utf-8"?>
-<p:sld xmlns:a="http://schemas.openxmlformats.org/drawingml/2006/main" xmlns:r="http://schemas.openxmlformats.org/officeDocument/2006/relationships" xmlns:p="http://schemas.openxmlformats.org/presentationml/2006/main">
-  <p:cSld>
-    <p:spTree>
-      <p:nvGrpSpPr>
-        <p:cNvPr id="1" name=""/>
-        <p:cNvGrpSpPr/>
-        <p:nvPr/>
-      </p:nvGrpSpPr>
-      <p:grpSpPr>
-        <a:xfrm>
-          <a:off x="0" y="0"/>
-          <a:ext cx="0" cy="0"/>
-          <a:chOff x="0" y="0"/>
-          <a:chExt cx="0" cy="0"/>
-        </a:xfrm>
-      </p:grpSpPr>
-      <p:pic>
-        <p:nvPicPr>
-          <p:cNvPr id="2" name="Image 0" descr="https://oss.jianzeppt.com/editablePptPic/isIllustration_2_isShadow_0/44fd407f-6289-4c0d-9da8-5615dc49cf12_image_024f533a16df894d6710d6aaad9f47c2_14123563.png?x-oss-process=image/resize,w_1440,h_800,m_lfit/format,png"/>
-          <p:cNvPicPr>
-            <a:picLocks noChangeAspect="1"/>
-          </p:cNvPicPr>
-          <p:nvPr>
-            <p:custDataLst>
-              <p:tags r:id="rId1"/>
-            </p:custDataLst>
-          </p:nvPr>
-        </p:nvPicPr>
-        <p:blipFill>
-          <a:blip r:embed="rId5"/>
-          <a:stretch>
-            <a:fillRect/>
-          </a:stretch>
-        </p:blipFill>
-        <p:spPr>
-          <a:xfrm>
-            <a:off x="335360" y="203042"/>
-            <a:ext cx="82800" cy="896400"/>
-          </a:xfrm>
-          <a:prstGeom prst="rect">
-            <a:avLst/>
-          </a:prstGeom>
-        </p:spPr>
-      </p:pic>
-      <p:pic>
-        <p:nvPicPr>
-          <p:cNvPr id="3" name="Image 1" descr="https://oss.jianzeppt.com/editablePptPic/isIllustration_1_isShadow_0/44fd407f-6289-4c0d-9da8-5615dc49cf12_image_90819cb7d4a6a1eecbd1ae23dec6207e_14123563.png?x-oss-process=image/resize,w_1440,h_800,m_lfit/format,png"/>
-          <p:cNvPicPr>
-            <a:picLocks noChangeAspect="1"/>
-          </p:cNvPicPr>
-          <p:nvPr>
-            <p:custDataLst>
-              <p:tags r:id="rId2"/>
-            </p:custDataLst>
-          </p:nvPr>
-        </p:nvPicPr>
-        <p:blipFill>
-          <a:blip r:embed="rId6"/>
-          <a:stretch>
-            <a:fillRect/>
-          </a:stretch>
-        </p:blipFill>
-        <p:spPr>
-          <a:xfrm>
-            <a:off x="9785720" y="194778"/>
-            <a:ext cx="2288951" cy="901224"/>
-          </a:xfrm>
-          <a:prstGeom prst="rect">
-            <a:avLst/>
-          </a:prstGeom>
-        </p:spPr>
-      </p:pic>
-    </p:spTree>
-  </p:cSld>
-  <p:clrMapOvr>
-    <a:masterClrMapping/>
-  </p:clrMapOvr>
-  <p:transition spd="slow">
-    <p:cover/>
-  </p:transition>
-</p:sld>
-</file>
-
-<file path=ppt/slides/slide4.xml><?xml version="1.0" encoding="utf-8"?>
-<p:sld xmlns:a="http://schemas.openxmlformats.org/drawingml/2006/main" xmlns:r="http://schemas.openxmlformats.org/officeDocument/2006/relationships" xmlns:p="http://schemas.openxmlformats.org/presentationml/2006/main">
-  <p:cSld>
-    <p:spTree>
-      <p:nvGrpSpPr>
-        <p:cNvPr id="1" name=""/>
-        <p:cNvGrpSpPr/>
-        <p:nvPr/>
-      </p:nvGrpSpPr>
-      <p:grpSpPr>
-        <a:xfrm>
-          <a:off x="0" y="0"/>
-          <a:ext cx="0" cy="0"/>
-          <a:chOff x="0" y="0"/>
-          <a:chExt cx="0" cy="0"/>
-        </a:xfrm>
-      </p:grpSpPr>
-      <p:pic>
-        <p:nvPicPr>
-          <p:cNvPr id="2" name="Image 0" descr="https://oss.jianzeppt.com/editablePptPic/isIllustration_2_isShadow_0/44fd407f-6289-4c0d-9da8-5615dc49cf12_image_024f533a16df894d6710d6aaad9f47c2_14123563.png?x-oss-process=image/resize,w_1440,h_800,m_lfit/format,png"/>
-          <p:cNvPicPr>
-            <a:picLocks noChangeAspect="1"/>
-          </p:cNvPicPr>
-          <p:nvPr>
-            <p:custDataLst>
-              <p:tags r:id="rId1"/>
-            </p:custDataLst>
-          </p:nvPr>
-        </p:nvPicPr>
-        <p:blipFill>
-          <a:blip r:embed="rId5"/>
-          <a:stretch>
-            <a:fillRect/>
-          </a:stretch>
-        </p:blipFill>
-        <p:spPr>
-          <a:xfrm>
-            <a:off x="335360" y="203042"/>
-            <a:ext cx="82800" cy="896400"/>
-          </a:xfrm>
-          <a:prstGeom prst="rect">
-            <a:avLst/>
-          </a:prstGeom>
-        </p:spPr>
-      </p:pic>
-      <p:pic>
-        <p:nvPicPr>
-          <p:cNvPr id="3" name="Image 1" descr="https://oss.jianzeppt.com/editablePptPic/isIllustration_1_isShadow_0/44fd407f-6289-4c0d-9da8-5615dc49cf12_image_90819cb7d4a6a1eecbd1ae23dec6207e_14123563.png?x-oss-process=image/resize,w_1440,h_800,m_lfit/format,png"/>
-          <p:cNvPicPr>
-            <a:picLocks noChangeAspect="1"/>
-          </p:cNvPicPr>
-          <p:nvPr>
-            <p:custDataLst>
-              <p:tags r:id="rId2"/>
-            </p:custDataLst>
-          </p:nvPr>
-        </p:nvPicPr>
-        <p:blipFill>
-          <a:blip r:embed="rId6"/>
-          <a:stretch>
-            <a:fillRect/>
-          </a:stretch>
-        </p:blipFill>
-        <p:spPr>
-          <a:xfrm>
-            <a:off x="9785720" y="194778"/>
-            <a:ext cx="2288951" cy="901224"/>
-          </a:xfrm>
-          <a:prstGeom prst="rect">
-            <a:avLst/>
-          </a:prstGeom>
-        </p:spPr>
-      </p:pic>
-    </p:spTree>
-  </p:cSld>
-  <p:clrMapOvr>
-    <a:masterClrMapping/>
-  </p:clrMapOvr>
-  <p:transition spd="slow">
-    <p:cover/>
-  </p:transition>
+  <p:timing>
+    <p:tnLst>
+      <p:par>
+        <p:cTn id="1" dur="indefinite" restart="never" nodeType="tmRoot">
+          <p:childTnLst>
+            <p:seq concurrent="1" nextAc="seek">
+              <p:cTn id="2" dur="indefinite" nodeType="mainSeq">
+                <p:childTnLst>
+                  <p:par>
+                    <p:cTn id="3" fill="hold" nodeType="clickPar">
+                      <p:stCondLst>
+                        <p:cond delay="indefinite"/>
+                        <p:cond evt="onBegin" delay="0">
+                          <p:tn val="2"/>
+                        </p:cond>
+                      </p:stCondLst>
+                      <p:childTnLst>
+                        <p:par>
+                          <p:cTn id="4" fill="hold" nodeType="afterGroup">
+                            <p:stCondLst>
+                              <p:cond delay="0"/>
+                            </p:stCondLst>
+                            <p:childTnLst>
+                              <p:par>
+                                <p:cTn id="5" presetID="31" presetClass="entr" presetSubtype="0" fill="hold" grpId="0" nodeType="afterEffect">
+                                  <p:stCondLst>
+                                    <p:cond delay="0"/>
+                                  </p:stCondLst>
+                                  <p:iterate type="lt">
+                                    <p:tmPct val="5000"/>
+                                  </p:iterate>
+                                  <p:childTnLst>
+                                    <p:set>
+                                      <p:cBhvr>
+                                        <p:cTn id="6" dur="1" fill="hold">
+                                          <p:stCondLst>
+                                            <p:cond delay="0"/>
+                                          </p:stCondLst>
+                                        </p:cTn>
+                                        <p:tgtEl>
+                                          <p:spTgt spid="23"/>
+                                        </p:tgtEl>
+                                        <p:attrNameLst>
+                                          <p:attrName>style.visibility</p:attrName>
+                                        </p:attrNameLst>
+                                      </p:cBhvr>
+                                      <p:to>
+                                        <p:strVal val="visible"/>
+                                      </p:to>
+                                    </p:set>
+                                    <p:anim calcmode="lin" valueType="num">
+                                      <p:cBhvr>
+                                        <p:cTn id="7" dur="500" fill="hold"/>
+                                        <p:tgtEl>
+                                          <p:spTgt spid="23"/>
+                                        </p:tgtEl>
+                                        <p:attrNameLst>
+                                          <p:attrName>ppt_w</p:attrName>
+                                        </p:attrNameLst>
+                                      </p:cBhvr>
+                                      <p:tavLst>
+                                        <p:tav tm="0">
+                                          <p:val>
+                                            <p:fltVal val="0"/>
+                                          </p:val>
+                                        </p:tav>
+                                        <p:tav tm="100000">
+                                          <p:val>
+                                            <p:strVal val="#ppt_w"/>
+                                          </p:val>
+                                        </p:tav>
+                                      </p:tavLst>
+                                    </p:anim>
+                                    <p:anim calcmode="lin" valueType="num">
+                                      <p:cBhvr>
+                                        <p:cTn id="8" dur="500" fill="hold"/>
+                                        <p:tgtEl>
+                                          <p:spTgt spid="23"/>
+                                        </p:tgtEl>
+                                        <p:attrNameLst>
+                                          <p:attrName>ppt_h</p:attrName>
+                                        </p:attrNameLst>
+                                      </p:cBhvr>
+                                      <p:tavLst>
+                                        <p:tav tm="0">
+                                          <p:val>
+                                            <p:fltVal val="0"/>
+                                          </p:val>
+                                        </p:tav>
+                                        <p:tav tm="100000">
+                                          <p:val>
+                                            <p:strVal val="#ppt_h"/>
+                                          </p:val>
+                                        </p:tav>
+                                      </p:tavLst>
+                                    </p:anim>
+                                    <p:anim calcmode="lin" valueType="num">
+                                      <p:cBhvr>
+                                        <p:cTn id="9" dur="500" fill="hold"/>
+                                        <p:tgtEl>
+                                          <p:spTgt spid="23"/>
+                                        </p:tgtEl>
+                                        <p:attrNameLst>
+                                          <p:attrName>style.rotation</p:attrName>
+                                        </p:attrNameLst>
+                                      </p:cBhvr>
+                                      <p:tavLst>
+                                        <p:tav tm="0">
+                                          <p:val>
+                                            <p:fltVal val="90"/>
+                                          </p:val>
+                                        </p:tav>
+                                        <p:tav tm="100000">
+                                          <p:val>
+                                            <p:fltVal val="0"/>
+                                          </p:val>
+                                        </p:tav>
+                                      </p:tavLst>
+                                    </p:anim>
+                                    <p:animEffect transition="in" filter="fade">
+                                      <p:cBhvr>
+                                        <p:cTn id="10" dur="500"/>
+                                        <p:tgtEl>
+                                          <p:spTgt spid="23"/>
+                                        </p:tgtEl>
+                                      </p:cBhvr>
+                                    </p:animEffect>
+                                  </p:childTnLst>
+                                </p:cTn>
+                              </p:par>
+                            </p:childTnLst>
+                          </p:cTn>
+                        </p:par>
+                        <p:par>
+                          <p:cTn id="11" fill="hold" nodeType="afterGroup">
+                            <p:stCondLst>
+                              <p:cond delay="725"/>
+                            </p:stCondLst>
+                            <p:childTnLst>
+                              <p:par>
+                                <p:cTn id="12" presetID="31" presetClass="entr" presetSubtype="0" fill="hold" nodeType="afterEffect">
+                                  <p:stCondLst>
+                                    <p:cond delay="0"/>
+                                  </p:stCondLst>
+                                  <p:iterate type="lt">
+                                    <p:tmPct val="5000"/>
+                                  </p:iterate>
+                                  <p:childTnLst>
+                                    <p:set>
+                                      <p:cBhvr>
+                                        <p:cTn id="13" dur="1" fill="hold">
+                                          <p:stCondLst>
+                                            <p:cond delay="0"/>
+                                          </p:stCondLst>
+                                        </p:cTn>
+                                        <p:tgtEl>
+                                          <p:spTgt spid="37"/>
+                                        </p:tgtEl>
+                                        <p:attrNameLst>
+                                          <p:attrName>style.visibility</p:attrName>
+                                        </p:attrNameLst>
+                                      </p:cBhvr>
+                                      <p:to>
+                                        <p:strVal val="visible"/>
+                                      </p:to>
+                                    </p:set>
+                                    <p:anim calcmode="lin" valueType="num">
+                                      <p:cBhvr>
+                                        <p:cTn id="14" dur="500" fill="hold"/>
+                                        <p:tgtEl>
+                                          <p:spTgt spid="37"/>
+                                        </p:tgtEl>
+                                        <p:attrNameLst>
+                                          <p:attrName>ppt_w</p:attrName>
+                                        </p:attrNameLst>
+                                      </p:cBhvr>
+                                      <p:tavLst>
+                                        <p:tav tm="0">
+                                          <p:val>
+                                            <p:fltVal val="0"/>
+                                          </p:val>
+                                        </p:tav>
+                                        <p:tav tm="100000">
+                                          <p:val>
+                                            <p:strVal val="#ppt_w"/>
+                                          </p:val>
+                                        </p:tav>
+                                      </p:tavLst>
+                                    </p:anim>
+                                    <p:anim calcmode="lin" valueType="num">
+                                      <p:cBhvr>
+                                        <p:cTn id="15" dur="500" fill="hold"/>
+                                        <p:tgtEl>
+                                          <p:spTgt spid="37"/>
+                                        </p:tgtEl>
+                                        <p:attrNameLst>
+                                          <p:attrName>ppt_h</p:attrName>
+                                        </p:attrNameLst>
+                                      </p:cBhvr>
+                                      <p:tavLst>
+                                        <p:tav tm="0">
+                                          <p:val>
+                                            <p:fltVal val="0"/>
+                                          </p:val>
+                                        </p:tav>
+                                        <p:tav tm="100000">
+                                          <p:val>
+                                            <p:strVal val="#ppt_h"/>
+                                          </p:val>
+                                        </p:tav>
+                                      </p:tavLst>
+                                    </p:anim>
+                                    <p:anim calcmode="lin" valueType="num">
+                                      <p:cBhvr>
+                                        <p:cTn id="16" dur="500" fill="hold"/>
+                                        <p:tgtEl>
+                                          <p:spTgt spid="37"/>
+                                        </p:tgtEl>
+                                        <p:attrNameLst>
+                                          <p:attrName>style.rotation</p:attrName>
+                                        </p:attrNameLst>
+                                      </p:cBhvr>
+                                      <p:tavLst>
+                                        <p:tav tm="0">
+                                          <p:val>
+                                            <p:fltVal val="90"/>
+                                          </p:val>
+                                        </p:tav>
+                                        <p:tav tm="100000">
+                                          <p:val>
+                                            <p:fltVal val="0"/>
+                                          </p:val>
+                                        </p:tav>
+                                      </p:tavLst>
+                                    </p:anim>
+                                    <p:animEffect transition="in" filter="fade">
+                                      <p:cBhvr>
+                                        <p:cTn id="17" dur="500"/>
+                                        <p:tgtEl>
+                                          <p:spTgt spid="37"/>
+                                        </p:tgtEl>
+                                      </p:cBhvr>
+                                    </p:animEffect>
+                                  </p:childTnLst>
+                                </p:cTn>
+                              </p:par>
+                            </p:childTnLst>
+                          </p:cTn>
+                        </p:par>
+                        <p:par>
+                          <p:cTn id="18" fill="hold" nodeType="afterGroup">
+                            <p:stCondLst>
+                              <p:cond delay="1225"/>
+                            </p:stCondLst>
+                            <p:childTnLst>
+                              <p:par>
+                                <p:cTn id="19" presetID="31" presetClass="entr" presetSubtype="0" fill="hold" grpId="0" nodeType="afterEffect">
+                                  <p:stCondLst>
+                                    <p:cond delay="0"/>
+                                  </p:stCondLst>
+                                  <p:iterate type="lt">
+                                    <p:tmPct val="5000"/>
+                                  </p:iterate>
+                                  <p:childTnLst>
+                                    <p:set>
+                                      <p:cBhvr>
+                                        <p:cTn id="20" dur="1" fill="hold">
+                                          <p:stCondLst>
+                                            <p:cond delay="0"/>
+                                          </p:stCondLst>
+                                        </p:cTn>
+                                        <p:tgtEl>
+                                          <p:spTgt spid="7"/>
+                                        </p:tgtEl>
+                                        <p:attrNameLst>
+                                          <p:attrName>style.visibility</p:attrName>
+                                        </p:attrNameLst>
+                                      </p:cBhvr>
+                                      <p:to>
+                                        <p:strVal val="visible"/>
+                                      </p:to>
+                                    </p:set>
+                                    <p:anim calcmode="lin" valueType="num">
+                                      <p:cBhvr>
+                                        <p:cTn id="21" dur="500" fill="hold"/>
+                                        <p:tgtEl>
+                                          <p:spTgt spid="7"/>
+                                        </p:tgtEl>
+                                        <p:attrNameLst>
+                                          <p:attrName>ppt_w</p:attrName>
+                                        </p:attrNameLst>
+                                      </p:cBhvr>
+                                      <p:tavLst>
+                                        <p:tav tm="0">
+                                          <p:val>
+                                            <p:fltVal val="0"/>
+                                          </p:val>
+                                        </p:tav>
+                                        <p:tav tm="100000">
+                                          <p:val>
+                                            <p:strVal val="#ppt_w"/>
+                                          </p:val>
+                                        </p:tav>
+                                      </p:tavLst>
+                                    </p:anim>
+                                    <p:anim calcmode="lin" valueType="num">
+                                      <p:cBhvr>
+                                        <p:cTn id="22" dur="500" fill="hold"/>
+                                        <p:tgtEl>
+                                          <p:spTgt spid="7"/>
+                                        </p:tgtEl>
+                                        <p:attrNameLst>
+                                          <p:attrName>ppt_h</p:attrName>
+                                        </p:attrNameLst>
+                                      </p:cBhvr>
+                                      <p:tavLst>
+                                        <p:tav tm="0">
+                                          <p:val>
+                                            <p:fltVal val="0"/>
+                                          </p:val>
+                                        </p:tav>
+                                        <p:tav tm="100000">
+                                          <p:val>
+                                            <p:strVal val="#ppt_h"/>
+                                          </p:val>
+                                        </p:tav>
+                                      </p:tavLst>
+                                    </p:anim>
+                                    <p:anim calcmode="lin" valueType="num">
+                                      <p:cBhvr>
+                                        <p:cTn id="23" dur="500" fill="hold"/>
+                                        <p:tgtEl>
+                                          <p:spTgt spid="7"/>
+                                        </p:tgtEl>
+                                        <p:attrNameLst>
+                                          <p:attrName>style.rotation</p:attrName>
+                                        </p:attrNameLst>
+                                      </p:cBhvr>
+                                      <p:tavLst>
+                                        <p:tav tm="0">
+                                          <p:val>
+                                            <p:fltVal val="90"/>
+                                          </p:val>
+                                        </p:tav>
+                                        <p:tav tm="100000">
+                                          <p:val>
+                                            <p:fltVal val="0"/>
+                                          </p:val>
+                                        </p:tav>
+                                      </p:tavLst>
+                                    </p:anim>
+                                    <p:animEffect transition="in" filter="fade">
+                                      <p:cBhvr>
+                                        <p:cTn id="24" dur="500"/>
+                                        <p:tgtEl>
+                                          <p:spTgt spid="7"/>
+                                        </p:tgtEl>
+                                      </p:cBhvr>
+                                    </p:animEffect>
+                                  </p:childTnLst>
+                                </p:cTn>
+                              </p:par>
+                            </p:childTnLst>
+                          </p:cTn>
+                        </p:par>
+                        <p:par>
+                          <p:cTn id="25" fill="hold" nodeType="afterGroup">
+                            <p:stCondLst>
+                              <p:cond delay="1725"/>
+                            </p:stCondLst>
+                            <p:childTnLst>
+                              <p:par>
+                                <p:cTn id="26" presetID="31" presetClass="entr" presetSubtype="0" fill="hold" nodeType="afterEffect">
+                                  <p:stCondLst>
+                                    <p:cond delay="0"/>
+                                  </p:stCondLst>
+                                  <p:iterate type="lt">
+                                    <p:tmPct val="5000"/>
+                                  </p:iterate>
+                                  <p:childTnLst>
+                                    <p:set>
+                                      <p:cBhvr>
+                                        <p:cTn id="27" dur="1" fill="hold">
+                                          <p:stCondLst>
+                                            <p:cond delay="0"/>
+                                          </p:stCondLst>
+                                        </p:cTn>
+                                        <p:tgtEl>
+                                          <p:spTgt spid="41"/>
+                                        </p:tgtEl>
+                                        <p:attrNameLst>
+                                          <p:attrName>style.visibility</p:attrName>
+                                        </p:attrNameLst>
+                                      </p:cBhvr>
+                                      <p:to>
+                                        <p:strVal val="visible"/>
+                                      </p:to>
+                                    </p:set>
+                                    <p:anim calcmode="lin" valueType="num">
+                                      <p:cBhvr>
+                                        <p:cTn id="28" dur="500" fill="hold"/>
+                                        <p:tgtEl>
+                                          <p:spTgt spid="41"/>
+                                        </p:tgtEl>
+                                        <p:attrNameLst>
+                                          <p:attrName>ppt_w</p:attrName>
+                                        </p:attrNameLst>
+                                      </p:cBhvr>
+                                      <p:tavLst>
+                                        <p:tav tm="0">
+                                          <p:val>
+                                            <p:fltVal val="0"/>
+                                          </p:val>
+                                        </p:tav>
+                                        <p:tav tm="100000">
+                                          <p:val>
+                                            <p:strVal val="#ppt_w"/>
+                                          </p:val>
+                                        </p:tav>
+                                      </p:tavLst>
+                                    </p:anim>
+                                    <p:anim calcmode="lin" valueType="num">
+                                      <p:cBhvr>
+                                        <p:cTn id="29" dur="500" fill="hold"/>
+                                        <p:tgtEl>
+                                          <p:spTgt spid="41"/>
+                                        </p:tgtEl>
+                                        <p:attrNameLst>
+                                          <p:attrName>ppt_h</p:attrName>
+                                        </p:attrNameLst>
+                                      </p:cBhvr>
+                                      <p:tavLst>
+                                        <p:tav tm="0">
+                                          <p:val>
+                                            <p:fltVal val="0"/>
+                                          </p:val>
+                                        </p:tav>
+                                        <p:tav tm="100000">
+                                          <p:val>
+                                            <p:strVal val="#ppt_h"/>
+                                          </p:val>
+                                        </p:tav>
+                                      </p:tavLst>
+                                    </p:anim>
+                                    <p:anim calcmode="lin" valueType="num">
+                                      <p:cBhvr>
+                                        <p:cTn id="30" dur="500" fill="hold"/>
+                                        <p:tgtEl>
+                                          <p:spTgt spid="41"/>
+                                        </p:tgtEl>
+                                        <p:attrNameLst>
+                                          <p:attrName>style.rotation</p:attrName>
+                                        </p:attrNameLst>
+                                      </p:cBhvr>
+                                      <p:tavLst>
+                                        <p:tav tm="0">
+                                          <p:val>
+                                            <p:fltVal val="90"/>
+                                          </p:val>
+                                        </p:tav>
+                                        <p:tav tm="100000">
+                                          <p:val>
+                                            <p:fltVal val="0"/>
+                                          </p:val>
+                                        </p:tav>
+                                      </p:tavLst>
+                                    </p:anim>
+                                    <p:animEffect transition="in" filter="fade">
+                                      <p:cBhvr>
+                                        <p:cTn id="31" dur="500"/>
+                                        <p:tgtEl>
+                                          <p:spTgt spid="41"/>
+                                        </p:tgtEl>
+                                      </p:cBhvr>
+                                    </p:animEffect>
+                                  </p:childTnLst>
+                                </p:cTn>
+                              </p:par>
+                            </p:childTnLst>
+                          </p:cTn>
+                        </p:par>
+                        <p:par>
+                          <p:cTn id="32" fill="hold" nodeType="afterGroup">
+                            <p:stCondLst>
+                              <p:cond delay="2225"/>
+                            </p:stCondLst>
+                            <p:childTnLst>
+                              <p:par>
+                                <p:cTn id="33" presetID="31" presetClass="entr" presetSubtype="0" fill="hold" grpId="0" nodeType="afterEffect">
+                                  <p:stCondLst>
+                                    <p:cond delay="0"/>
+                                  </p:stCondLst>
+                                  <p:iterate type="lt">
+                                    <p:tmPct val="5000"/>
+                                  </p:iterate>
+                                  <p:childTnLst>
+                                    <p:set>
+                                      <p:cBhvr>
+                                        <p:cTn id="34" dur="1" fill="hold">
+                                          <p:stCondLst>
+                                            <p:cond delay="0"/>
+                                          </p:stCondLst>
+                                        </p:cTn>
+                                        <p:tgtEl>
+                                          <p:spTgt spid="11"/>
+                                        </p:tgtEl>
+                                        <p:attrNameLst>
+                                          <p:attrName>style.visibility</p:attrName>
+                                        </p:attrNameLst>
+                                      </p:cBhvr>
+                                      <p:to>
+                                        <p:strVal val="visible"/>
+                                      </p:to>
+                                    </p:set>
+                                    <p:anim calcmode="lin" valueType="num">
+                                      <p:cBhvr>
+                                        <p:cTn id="35" dur="500" fill="hold"/>
+                                        <p:tgtEl>
+                                          <p:spTgt spid="11"/>
+                                        </p:tgtEl>
+                                        <p:attrNameLst>
+                                          <p:attrName>ppt_w</p:attrName>
+                                        </p:attrNameLst>
+                                      </p:cBhvr>
+                                      <p:tavLst>
+                                        <p:tav tm="0">
+                                          <p:val>
+                                            <p:fltVal val="0"/>
+                                          </p:val>
+                                        </p:tav>
+                                        <p:tav tm="100000">
+                                          <p:val>
+                                            <p:strVal val="#ppt_w"/>
+                                          </p:val>
+                                        </p:tav>
+                                      </p:tavLst>
+                                    </p:anim>
+                                    <p:anim calcmode="lin" valueType="num">
+                                      <p:cBhvr>
+                                        <p:cTn id="36" dur="500" fill="hold"/>
+                                        <p:tgtEl>
+                                          <p:spTgt spid="11"/>
+                                        </p:tgtEl>
+                                        <p:attrNameLst>
+                                          <p:attrName>ppt_h</p:attrName>
+                                        </p:attrNameLst>
+                                      </p:cBhvr>
+                                      <p:tavLst>
+                                        <p:tav tm="0">
+                                          <p:val>
+                                            <p:fltVal val="0"/>
+                                          </p:val>
+                                        </p:tav>
+                                        <p:tav tm="100000">
+                                          <p:val>
+                                            <p:strVal val="#ppt_h"/>
+                                          </p:val>
+                                        </p:tav>
+                                      </p:tavLst>
+                                    </p:anim>
+                                    <p:anim calcmode="lin" valueType="num">
+                                      <p:cBhvr>
+                                        <p:cTn id="37" dur="500" fill="hold"/>
+                                        <p:tgtEl>
+                                          <p:spTgt spid="11"/>
+                                        </p:tgtEl>
+                                        <p:attrNameLst>
+                                          <p:attrName>style.rotation</p:attrName>
+                                        </p:attrNameLst>
+                                      </p:cBhvr>
+                                      <p:tavLst>
+                                        <p:tav tm="0">
+                                          <p:val>
+                                            <p:fltVal val="90"/>
+                                          </p:val>
+                                        </p:tav>
+                                        <p:tav tm="100000">
+                                          <p:val>
+                                            <p:fltVal val="0"/>
+                                          </p:val>
+                                        </p:tav>
+                                      </p:tavLst>
+                                    </p:anim>
+                                    <p:animEffect transition="in" filter="fade">
+                                      <p:cBhvr>
+                                        <p:cTn id="38" dur="500"/>
+                                        <p:tgtEl>
+                                          <p:spTgt spid="11"/>
+                                        </p:tgtEl>
+                                      </p:cBhvr>
+                                    </p:animEffect>
+                                  </p:childTnLst>
+                                </p:cTn>
+                              </p:par>
+                            </p:childTnLst>
+                          </p:cTn>
+                        </p:par>
+                        <p:par>
+                          <p:cTn id="39" fill="hold" nodeType="afterGroup">
+                            <p:stCondLst>
+                              <p:cond delay="2725"/>
+                            </p:stCondLst>
+                            <p:childTnLst>
+                              <p:par>
+                                <p:cTn id="40" presetID="31" presetClass="entr" presetSubtype="0" fill="hold" nodeType="afterEffect">
+                                  <p:stCondLst>
+                                    <p:cond delay="0"/>
+                                  </p:stCondLst>
+                                  <p:iterate type="lt">
+                                    <p:tmPct val="5000"/>
+                                  </p:iterate>
+                                  <p:childTnLst>
+                                    <p:set>
+                                      <p:cBhvr>
+                                        <p:cTn id="41" dur="1" fill="hold">
+                                          <p:stCondLst>
+                                            <p:cond delay="0"/>
+                                          </p:stCondLst>
+                                        </p:cTn>
+                                        <p:tgtEl>
+                                          <p:spTgt spid="24"/>
+                                        </p:tgtEl>
+                                        <p:attrNameLst>
+                                          <p:attrName>style.visibility</p:attrName>
+                                        </p:attrNameLst>
+                                      </p:cBhvr>
+                                      <p:to>
+                                        <p:strVal val="visible"/>
+                                      </p:to>
+                                    </p:set>
+                                    <p:anim calcmode="lin" valueType="num">
+                                      <p:cBhvr>
+                                        <p:cTn id="42" dur="500" fill="hold"/>
+                                        <p:tgtEl>
+                                          <p:spTgt spid="24"/>
+                                        </p:tgtEl>
+                                        <p:attrNameLst>
+                                          <p:attrName>ppt_w</p:attrName>
+                                        </p:attrNameLst>
+                                      </p:cBhvr>
+                                      <p:tavLst>
+                                        <p:tav tm="0">
+                                          <p:val>
+                                            <p:fltVal val="0"/>
+                                          </p:val>
+                                        </p:tav>
+                                        <p:tav tm="100000">
+                                          <p:val>
+                                            <p:strVal val="#ppt_w"/>
+                                          </p:val>
+                                        </p:tav>
+                                      </p:tavLst>
+                                    </p:anim>
+                                    <p:anim calcmode="lin" valueType="num">
+                                      <p:cBhvr>
+                                        <p:cTn id="43" dur="500" fill="hold"/>
+                                        <p:tgtEl>
+                                          <p:spTgt spid="24"/>
+                                        </p:tgtEl>
+                                        <p:attrNameLst>
+                                          <p:attrName>ppt_h</p:attrName>
+                                        </p:attrNameLst>
+                                      </p:cBhvr>
+                                      <p:tavLst>
+                                        <p:tav tm="0">
+                                          <p:val>
+                                            <p:fltVal val="0"/>
+                                          </p:val>
+                                        </p:tav>
+                                        <p:tav tm="100000">
+                                          <p:val>
+                                            <p:strVal val="#ppt_h"/>
+                                          </p:val>
+                                        </p:tav>
+                                      </p:tavLst>
+                                    </p:anim>
+                                    <p:anim calcmode="lin" valueType="num">
+                                      <p:cBhvr>
+                                        <p:cTn id="44" dur="500" fill="hold"/>
+                                        <p:tgtEl>
+                                          <p:spTgt spid="24"/>
+                                        </p:tgtEl>
+                                        <p:attrNameLst>
+                                          <p:attrName>style.rotation</p:attrName>
+                                        </p:attrNameLst>
+                                      </p:cBhvr>
+                                      <p:tavLst>
+                                        <p:tav tm="0">
+                                          <p:val>
+                                            <p:fltVal val="90"/>
+                                          </p:val>
+                                        </p:tav>
+                                        <p:tav tm="100000">
+                                          <p:val>
+                                            <p:fltVal val="0"/>
+                                          </p:val>
+                                        </p:tav>
+                                      </p:tavLst>
+                                    </p:anim>
+                                    <p:animEffect transition="in" filter="fade">
+                                      <p:cBhvr>
+                                        <p:cTn id="45" dur="500"/>
+                                        <p:tgtEl>
+                                          <p:spTgt spid="24"/>
+                                        </p:tgtEl>
+                                      </p:cBhvr>
+                                    </p:animEffect>
+                                  </p:childTnLst>
+                                </p:cTn>
+                              </p:par>
+                            </p:childTnLst>
+                          </p:cTn>
+                        </p:par>
+                        <p:par>
+                          <p:cTn id="46" fill="hold" nodeType="afterGroup">
+                            <p:stCondLst>
+                              <p:cond delay="3225"/>
+                            </p:stCondLst>
+                            <p:childTnLst>
+                              <p:par>
+                                <p:cTn id="47" presetID="31" presetClass="entr" presetSubtype="0" fill="hold" nodeType="afterEffect">
+                                  <p:stCondLst>
+                                    <p:cond delay="0"/>
+                                  </p:stCondLst>
+                                  <p:iterate type="lt">
+                                    <p:tmPct val="5000"/>
+                                  </p:iterate>
+                                  <p:childTnLst>
+                                    <p:set>
+                                      <p:cBhvr>
+                                        <p:cTn id="48" dur="1" fill="hold">
+                                          <p:stCondLst>
+                                            <p:cond delay="0"/>
+                                          </p:stCondLst>
+                                        </p:cTn>
+                                        <p:tgtEl>
+                                          <p:spTgt spid="29"/>
+                                        </p:tgtEl>
+                                        <p:attrNameLst>
+                                          <p:attrName>style.visibility</p:attrName>
+                                        </p:attrNameLst>
+                                      </p:cBhvr>
+                                      <p:to>
+                                        <p:strVal val="visible"/>
+                                      </p:to>
+                                    </p:set>
+                                    <p:anim calcmode="lin" valueType="num">
+                                      <p:cBhvr>
+                                        <p:cTn id="49" dur="500" fill="hold"/>
+                                        <p:tgtEl>
+                                          <p:spTgt spid="29"/>
+                                        </p:tgtEl>
+                                        <p:attrNameLst>
+                                          <p:attrName>ppt_w</p:attrName>
+                                        </p:attrNameLst>
+                                      </p:cBhvr>
+                                      <p:tavLst>
+                                        <p:tav tm="0">
+                                          <p:val>
+                                            <p:fltVal val="0"/>
+                                          </p:val>
+                                        </p:tav>
+                                        <p:tav tm="100000">
+                                          <p:val>
+                                            <p:strVal val="#ppt_w"/>
+                                          </p:val>
+                                        </p:tav>
+                                      </p:tavLst>
+                                    </p:anim>
+                                    <p:anim calcmode="lin" valueType="num">
+                                      <p:cBhvr>
+                                        <p:cTn id="50" dur="500" fill="hold"/>
+                                        <p:tgtEl>
+                                          <p:spTgt spid="29"/>
+                                        </p:tgtEl>
+                                        <p:attrNameLst>
+                                          <p:attrName>ppt_h</p:attrName>
+                                        </p:attrNameLst>
+                                      </p:cBhvr>
+                                      <p:tavLst>
+                                        <p:tav tm="0">
+                                          <p:val>
+                                            <p:fltVal val="0"/>
+                                          </p:val>
+                                        </p:tav>
+                                        <p:tav tm="100000">
+                                          <p:val>
+                                            <p:strVal val="#ppt_h"/>
+                                          </p:val>
+                                        </p:tav>
+                                      </p:tavLst>
+                                    </p:anim>
+                                    <p:anim calcmode="lin" valueType="num">
+                                      <p:cBhvr>
+                                        <p:cTn id="51" dur="500" fill="hold"/>
+                                        <p:tgtEl>
+                                          <p:spTgt spid="29"/>
+                                        </p:tgtEl>
+                                        <p:attrNameLst>
+                                          <p:attrName>style.rotation</p:attrName>
+                                        </p:attrNameLst>
+                                      </p:cBhvr>
+                                      <p:tavLst>
+                                        <p:tav tm="0">
+                                          <p:val>
+                                            <p:fltVal val="90"/>
+                                          </p:val>
+                                        </p:tav>
+                                        <p:tav tm="100000">
+                                          <p:val>
+                                            <p:fltVal val="0"/>
+                                          </p:val>
+                                        </p:tav>
+                                      </p:tavLst>
+                                    </p:anim>
+                                    <p:animEffect transition="in" filter="fade">
+                                      <p:cBhvr>
+                                        <p:cTn id="52" dur="500"/>
+                                        <p:tgtEl>
+                                          <p:spTgt spid="29"/>
+                                        </p:tgtEl>
+                                      </p:cBhvr>
+                                    </p:animEffect>
+                                  </p:childTnLst>
+                                </p:cTn>
+                              </p:par>
+                            </p:childTnLst>
+                          </p:cTn>
+                        </p:par>
+                        <p:par>
+                          <p:cTn id="53" fill="hold" nodeType="afterGroup">
+                            <p:stCondLst>
+                              <p:cond delay="3725"/>
+                            </p:stCondLst>
+                            <p:childTnLst>
+                              <p:par>
+                                <p:cTn id="54" presetID="31" presetClass="entr" presetSubtype="0" fill="hold" grpId="0" nodeType="afterEffect">
+                                  <p:stCondLst>
+                                    <p:cond delay="0"/>
+                                  </p:stCondLst>
+                                  <p:iterate type="lt">
+                                    <p:tmPct val="5000"/>
+                                  </p:iterate>
+                                  <p:childTnLst>
+                                    <p:set>
+                                      <p:cBhvr>
+                                        <p:cTn id="55" dur="1" fill="hold">
+                                          <p:stCondLst>
+                                            <p:cond delay="0"/>
+                                          </p:stCondLst>
+                                        </p:cTn>
+                                        <p:tgtEl>
+                                          <p:spTgt spid="19"/>
+                                        </p:tgtEl>
+                                        <p:attrNameLst>
+                                          <p:attrName>style.visibility</p:attrName>
+                                        </p:attrNameLst>
+                                      </p:cBhvr>
+                                      <p:to>
+                                        <p:strVal val="visible"/>
+                                      </p:to>
+                                    </p:set>
+                                    <p:anim calcmode="lin" valueType="num">
+                                      <p:cBhvr>
+                                        <p:cTn id="56" dur="500" fill="hold"/>
+                                        <p:tgtEl>
+                                          <p:spTgt spid="19"/>
+                                        </p:tgtEl>
+                                        <p:attrNameLst>
+                                          <p:attrName>ppt_w</p:attrName>
+                                        </p:attrNameLst>
+                                      </p:cBhvr>
+                                      <p:tavLst>
+                                        <p:tav tm="0">
+                                          <p:val>
+                                            <p:fltVal val="0"/>
+                                          </p:val>
+                                        </p:tav>
+                                        <p:tav tm="100000">
+                                          <p:val>
+                                            <p:strVal val="#ppt_w"/>
+                                          </p:val>
+                                        </p:tav>
+                                      </p:tavLst>
+                                    </p:anim>
+                                    <p:anim calcmode="lin" valueType="num">
+                                      <p:cBhvr>
+                                        <p:cTn id="57" dur="500" fill="hold"/>
+                                        <p:tgtEl>
+                                          <p:spTgt spid="19"/>
+                                        </p:tgtEl>
+                                        <p:attrNameLst>
+                                          <p:attrName>ppt_h</p:attrName>
+                                        </p:attrNameLst>
+                                      </p:cBhvr>
+                                      <p:tavLst>
+                                        <p:tav tm="0">
+                                          <p:val>
+                                            <p:fltVal val="0"/>
+                                          </p:val>
+                                        </p:tav>
+                                        <p:tav tm="100000">
+                                          <p:val>
+                                            <p:strVal val="#ppt_h"/>
+                                          </p:val>
+                                        </p:tav>
+                                      </p:tavLst>
+                                    </p:anim>
+                                    <p:anim calcmode="lin" valueType="num">
+                                      <p:cBhvr>
+                                        <p:cTn id="58" dur="500" fill="hold"/>
+                                        <p:tgtEl>
+                                          <p:spTgt spid="19"/>
+                                        </p:tgtEl>
+                                        <p:attrNameLst>
+                                          <p:attrName>style.rotation</p:attrName>
+                                        </p:attrNameLst>
+                                      </p:cBhvr>
+                                      <p:tavLst>
+                                        <p:tav tm="0">
+                                          <p:val>
+                                            <p:fltVal val="90"/>
+                                          </p:val>
+                                        </p:tav>
+                                        <p:tav tm="100000">
+                                          <p:val>
+                                            <p:fltVal val="0"/>
+                                          </p:val>
+                                        </p:tav>
+                                      </p:tavLst>
+                                    </p:anim>
+                                    <p:animEffect transition="in" filter="fade">
+                                      <p:cBhvr>
+                                        <p:cTn id="59" dur="500"/>
+                                        <p:tgtEl>
+                                          <p:spTgt spid="19"/>
+                                        </p:tgtEl>
+                                      </p:cBhvr>
+                                    </p:animEffect>
+                                  </p:childTnLst>
+                                </p:cTn>
+                              </p:par>
+                            </p:childTnLst>
+                          </p:cTn>
+                        </p:par>
+                        <p:par>
+                          <p:cTn id="60" fill="hold" nodeType="afterGroup">
+                            <p:stCondLst>
+                              <p:cond delay="4225"/>
+                            </p:stCondLst>
+                            <p:childTnLst>
+                              <p:par>
+                                <p:cTn id="61" presetID="31" presetClass="entr" presetSubtype="0" fill="hold" nodeType="afterEffect">
+                                  <p:stCondLst>
+                                    <p:cond delay="0"/>
+                                  </p:stCondLst>
+                                  <p:iterate type="lt">
+                                    <p:tmPct val="5000"/>
+                                  </p:iterate>
+                                  <p:childTnLst>
+                                    <p:set>
+                                      <p:cBhvr>
+                                        <p:cTn id="62" dur="1" fill="hold">
+                                          <p:stCondLst>
+                                            <p:cond delay="0"/>
+                                          </p:stCondLst>
+                                        </p:cTn>
+                                        <p:tgtEl>
+                                          <p:spTgt spid="33"/>
+                                        </p:tgtEl>
+                                        <p:attrNameLst>
+                                          <p:attrName>style.visibility</p:attrName>
+                                        </p:attrNameLst>
+                                      </p:cBhvr>
+                                      <p:to>
+                                        <p:strVal val="visible"/>
+                                      </p:to>
+                                    </p:set>
+                                    <p:anim calcmode="lin" valueType="num">
+                                      <p:cBhvr>
+                                        <p:cTn id="63" dur="500" fill="hold"/>
+                                        <p:tgtEl>
+                                          <p:spTgt spid="33"/>
+                                        </p:tgtEl>
+                                        <p:attrNameLst>
+                                          <p:attrName>ppt_w</p:attrName>
+                                        </p:attrNameLst>
+                                      </p:cBhvr>
+                                      <p:tavLst>
+                                        <p:tav tm="0">
+                                          <p:val>
+                                            <p:fltVal val="0"/>
+                                          </p:val>
+                                        </p:tav>
+                                        <p:tav tm="100000">
+                                          <p:val>
+                                            <p:strVal val="#ppt_w"/>
+                                          </p:val>
+                                        </p:tav>
+                                      </p:tavLst>
+                                    </p:anim>
+                                    <p:anim calcmode="lin" valueType="num">
+                                      <p:cBhvr>
+                                        <p:cTn id="64" dur="500" fill="hold"/>
+                                        <p:tgtEl>
+                                          <p:spTgt spid="33"/>
+                                        </p:tgtEl>
+                                        <p:attrNameLst>
+                                          <p:attrName>ppt_h</p:attrName>
+                                        </p:attrNameLst>
+                                      </p:cBhvr>
+                                      <p:tavLst>
+                                        <p:tav tm="0">
+                                          <p:val>
+                                            <p:fltVal val="0"/>
+                                          </p:val>
+                                        </p:tav>
+                                        <p:tav tm="100000">
+                                          <p:val>
+                                            <p:strVal val="#ppt_h"/>
+                                          </p:val>
+                                        </p:tav>
+                                      </p:tavLst>
+                                    </p:anim>
+                                    <p:anim calcmode="lin" valueType="num">
+                                      <p:cBhvr>
+                                        <p:cTn id="65" dur="500" fill="hold"/>
+                                        <p:tgtEl>
+                                          <p:spTgt spid="33"/>
+                                        </p:tgtEl>
+                                        <p:attrNameLst>
+                                          <p:attrName>style.rotation</p:attrName>
+                                        </p:attrNameLst>
+                                      </p:cBhvr>
+                                      <p:tavLst>
+                                        <p:tav tm="0">
+                                          <p:val>
+                                            <p:fltVal val="90"/>
+                                          </p:val>
+                                        </p:tav>
+                                        <p:tav tm="100000">
+                                          <p:val>
+                                            <p:fltVal val="0"/>
+                                          </p:val>
+                                        </p:tav>
+                                      </p:tavLst>
+                                    </p:anim>
+                                    <p:animEffect transition="in" filter="fade">
+                                      <p:cBhvr>
+                                        <p:cTn id="66" dur="500"/>
+                                        <p:tgtEl>
+                                          <p:spTgt spid="33"/>
+                                        </p:tgtEl>
+                                      </p:cBhvr>
+                                    </p:animEffect>
+                                  </p:childTnLst>
+                                </p:cTn>
+                              </p:par>
+                            </p:childTnLst>
+                          </p:cTn>
+                        </p:par>
+                        <p:par>
+                          <p:cTn id="67" fill="hold">
+                            <p:stCondLst>
+                              <p:cond delay="4725"/>
+                            </p:stCondLst>
+                            <p:childTnLst>
+                              <p:par>
+                                <p:cTn id="68" presetID="23" presetClass="entr" presetSubtype="16" fill="hold" nodeType="afterEffect">
+                                  <p:stCondLst>
+                                    <p:cond delay="0"/>
+                                  </p:stCondLst>
+                                  <p:childTnLst>
+                                    <p:set>
+                                      <p:cBhvr>
+                                        <p:cTn id="69" dur="1" fill="hold">
+                                          <p:stCondLst>
+                                            <p:cond delay="0"/>
+                                          </p:stCondLst>
+                                        </p:cTn>
+                                        <p:tgtEl>
+                                          <p:spTgt spid="5"/>
+                                        </p:tgtEl>
+                                        <p:attrNameLst>
+                                          <p:attrName>style.visibility</p:attrName>
+                                        </p:attrNameLst>
+                                      </p:cBhvr>
+                                      <p:to>
+                                        <p:strVal val="visible"/>
+                                      </p:to>
+                                    </p:set>
+                                    <p:anim calcmode="lin" valueType="num">
+                                      <p:cBhvr>
+                                        <p:cTn id="70" dur="500" fill="hold"/>
+                                        <p:tgtEl>
+                                          <p:spTgt spid="5"/>
+                                        </p:tgtEl>
+                                        <p:attrNameLst>
+                                          <p:attrName>ppt_w</p:attrName>
+                                        </p:attrNameLst>
+                                      </p:cBhvr>
+                                      <p:tavLst>
+                                        <p:tav tm="0">
+                                          <p:val>
+                                            <p:fltVal val="0"/>
+                                          </p:val>
+                                        </p:tav>
+                                        <p:tav tm="100000">
+                                          <p:val>
+                                            <p:strVal val="#ppt_w"/>
+                                          </p:val>
+                                        </p:tav>
+                                      </p:tavLst>
+                                    </p:anim>
+                                    <p:anim calcmode="lin" valueType="num">
+                                      <p:cBhvr>
+                                        <p:cTn id="71" dur="500" fill="hold"/>
+                                        <p:tgtEl>
+                                          <p:spTgt spid="5"/>
+                                        </p:tgtEl>
+                                        <p:attrNameLst>
+                                          <p:attrName>ppt_h</p:attrName>
+                                        </p:attrNameLst>
+                                      </p:cBhvr>
+                                      <p:tavLst>
+                                        <p:tav tm="0">
+                                          <p:val>
+                                            <p:fltVal val="0"/>
+                                          </p:val>
+                                        </p:tav>
+                                        <p:tav tm="100000">
+                                          <p:val>
+                                            <p:strVal val="#ppt_h"/>
+                                          </p:val>
+                                        </p:tav>
+                                      </p:tavLst>
+                                    </p:anim>
+                                  </p:childTnLst>
+                                </p:cTn>
+                              </p:par>
+                              <p:par>
+                                <p:cTn id="72" presetID="23" presetClass="entr" presetSubtype="16" fill="hold" nodeType="withEffect">
+                                  <p:stCondLst>
+                                    <p:cond delay="0"/>
+                                  </p:stCondLst>
+                                  <p:childTnLst>
+                                    <p:set>
+                                      <p:cBhvr>
+                                        <p:cTn id="73" dur="1" fill="hold">
+                                          <p:stCondLst>
+                                            <p:cond delay="0"/>
+                                          </p:stCondLst>
+                                        </p:cTn>
+                                        <p:tgtEl>
+                                          <p:spTgt spid="8"/>
+                                        </p:tgtEl>
+                                        <p:attrNameLst>
+                                          <p:attrName>style.visibility</p:attrName>
+                                        </p:attrNameLst>
+                                      </p:cBhvr>
+                                      <p:to>
+                                        <p:strVal val="visible"/>
+                                      </p:to>
+                                    </p:set>
+                                    <p:anim calcmode="lin" valueType="num">
+                                      <p:cBhvr>
+                                        <p:cTn id="74" dur="500" fill="hold"/>
+                                        <p:tgtEl>
+                                          <p:spTgt spid="8"/>
+                                        </p:tgtEl>
+                                        <p:attrNameLst>
+                                          <p:attrName>ppt_w</p:attrName>
+                                        </p:attrNameLst>
+                                      </p:cBhvr>
+                                      <p:tavLst>
+                                        <p:tav tm="0">
+                                          <p:val>
+                                            <p:fltVal val="0"/>
+                                          </p:val>
+                                        </p:tav>
+                                        <p:tav tm="100000">
+                                          <p:val>
+                                            <p:strVal val="#ppt_w"/>
+                                          </p:val>
+                                        </p:tav>
+                                      </p:tavLst>
+                                    </p:anim>
+                                    <p:anim calcmode="lin" valueType="num">
+                                      <p:cBhvr>
+                                        <p:cTn id="75" dur="500" fill="hold"/>
+                                        <p:tgtEl>
+                                          <p:spTgt spid="8"/>
+                                        </p:tgtEl>
+                                        <p:attrNameLst>
+                                          <p:attrName>ppt_h</p:attrName>
+                                        </p:attrNameLst>
+                                      </p:cBhvr>
+                                      <p:tavLst>
+                                        <p:tav tm="0">
+                                          <p:val>
+                                            <p:fltVal val="0"/>
+                                          </p:val>
+                                        </p:tav>
+                                        <p:tav tm="100000">
+                                          <p:val>
+                                            <p:strVal val="#ppt_h"/>
+                                          </p:val>
+                                        </p:tav>
+                                      </p:tavLst>
+                                    </p:anim>
+                                  </p:childTnLst>
+                                </p:cTn>
+                              </p:par>
+                            </p:childTnLst>
+                          </p:cTn>
+                        </p:par>
+                      </p:childTnLst>
+                    </p:cTn>
+                  </p:par>
+                </p:childTnLst>
+              </p:cTn>
+              <p:prevCondLst>
+                <p:cond evt="onPrev" delay="0">
+                  <p:tgtEl>
+                    <p:sldTgt/>
+                  </p:tgtEl>
+                </p:cond>
+              </p:prevCondLst>
+              <p:nextCondLst>
+                <p:cond evt="onNext" delay="0">
+                  <p:tgtEl>
+                    <p:sldTgt/>
+                  </p:tgtEl>
+                </p:cond>
+              </p:nextCondLst>
+            </p:seq>
+          </p:childTnLst>
+        </p:cTn>
+      </p:par>
+    </p:tnLst>
+    <p:bldLst>
+      <p:bldP spid="7" grpId="0" animBg="1"/>
+      <p:bldP spid="11" grpId="0" animBg="1"/>
+      <p:bldP spid="19" grpId="0" animBg="1"/>
+      <p:bldP spid="23" grpId="0" animBg="1"/>
+    </p:bldLst>
+  </p:timing>
 </p:sld>
 </file>
 
 <file path=ppt/tags/tag1.xml><?xml version="1.0" encoding="utf-8"?>
 <p:tagLst xmlns:a="http://schemas.openxmlformats.org/drawingml/2006/main" xmlns:r="http://schemas.openxmlformats.org/officeDocument/2006/relationships" xmlns:p="http://schemas.openxmlformats.org/presentationml/2006/main">
-  <p:tag name="AS_UNIQUEID" val="599"/>
+  <p:tag name="AS_UNIQUEID" val="288"/>
 </p:tagLst>
 </file>
 
 <file path=ppt/tags/tag10.xml><?xml version="1.0" encoding="utf-8"?>
 <p:tagLst xmlns:a="http://schemas.openxmlformats.org/drawingml/2006/main" xmlns:r="http://schemas.openxmlformats.org/officeDocument/2006/relationships" xmlns:p="http://schemas.openxmlformats.org/presentationml/2006/main">
-  <p:tag name="AS_UNIQUEID" val="712"/>
+  <p:tag name="AS_UNIQUEID" val="330"/>
 </p:tagLst>
 </file>
 
 <file path=ppt/tags/tag11.xml><?xml version="1.0" encoding="utf-8"?>
 <p:tagLst xmlns:a="http://schemas.openxmlformats.org/drawingml/2006/main" xmlns:r="http://schemas.openxmlformats.org/officeDocument/2006/relationships" xmlns:p="http://schemas.openxmlformats.org/presentationml/2006/main">
-  <p:tag name="AS_UNIQUEID" val="46"/>
+  <p:tag name="AS_UNIQUEID" val="309"/>
 </p:tagLst>
 </file>
 
 <file path=ppt/tags/tag12.xml><?xml version="1.0" encoding="utf-8"?>
 <p:tagLst xmlns:a="http://schemas.openxmlformats.org/drawingml/2006/main" xmlns:r="http://schemas.openxmlformats.org/officeDocument/2006/relationships" xmlns:p="http://schemas.openxmlformats.org/presentationml/2006/main">
-  <p:tag name="AS_UNIQUEID" val="47"/>
+  <p:tag name="AS_UNIQUEID" val="280"/>
 </p:tagLst>
 </file>
 
 <file path=ppt/tags/tag13.xml><?xml version="1.0" encoding="utf-8"?>
 <p:tagLst xmlns:a="http://schemas.openxmlformats.org/drawingml/2006/main" xmlns:r="http://schemas.openxmlformats.org/officeDocument/2006/relationships" xmlns:p="http://schemas.openxmlformats.org/presentationml/2006/main">
-  <p:tag name="AS_UNIQUEID" val="715"/>
+  <p:tag name="AS_UNIQUEID" val="282"/>
 </p:tagLst>
 </file>
 
 <file path=ppt/tags/tag14.xml><?xml version="1.0" encoding="utf-8"?>
 <p:tagLst xmlns:a="http://schemas.openxmlformats.org/drawingml/2006/main" xmlns:r="http://schemas.openxmlformats.org/officeDocument/2006/relationships" xmlns:p="http://schemas.openxmlformats.org/presentationml/2006/main">
-  <p:tag name="AS_UNIQUEID" val="716"/>
+  <p:tag name="AS_UNIQUEID" val="267"/>
 </p:tagLst>
 </file>
 
 <file path=ppt/tags/tag15.xml><?xml version="1.0" encoding="utf-8"?>
 <p:tagLst xmlns:a="http://schemas.openxmlformats.org/drawingml/2006/main" xmlns:r="http://schemas.openxmlformats.org/officeDocument/2006/relationships" xmlns:p="http://schemas.openxmlformats.org/presentationml/2006/main">
-  <p:tag name="AS_UNIQUEID" val="717"/>
+  <p:tag name="AS_UNIQUEID" val="268"/>
 </p:tagLst>
 </file>
 
 <file path=ppt/tags/tag16.xml><?xml version="1.0" encoding="utf-8"?>
 <p:tagLst xmlns:a="http://schemas.openxmlformats.org/drawingml/2006/main" xmlns:r="http://schemas.openxmlformats.org/officeDocument/2006/relationships" xmlns:p="http://schemas.openxmlformats.org/presentationml/2006/main">
-  <p:tag name="AS_UNIQUEID" val="115"/>
+  <p:tag name="AS_UNIQUEID" val="265"/>
 </p:tagLst>
 </file>
 
 <file path=ppt/tags/tag17.xml><?xml version="1.0" encoding="utf-8"?>
 <p:tagLst xmlns:a="http://schemas.openxmlformats.org/drawingml/2006/main" xmlns:r="http://schemas.openxmlformats.org/officeDocument/2006/relationships" xmlns:p="http://schemas.openxmlformats.org/presentationml/2006/main">
-  <p:tag name="AS_UNIQUEID" val="116"/>
+  <p:tag name="AS_UNIQUEID" val="266"/>
 </p:tagLst>
 </file>
 
 <file path=ppt/tags/tag18.xml><?xml version="1.0" encoding="utf-8"?>
 <p:tagLst xmlns:a="http://schemas.openxmlformats.org/drawingml/2006/main" xmlns:r="http://schemas.openxmlformats.org/officeDocument/2006/relationships" xmlns:p="http://schemas.openxmlformats.org/presentationml/2006/main">
-  <p:tag name="AS_UNIQUEID" val="720"/>
+  <p:tag name="AS_UNIQUEID" val="317"/>
 </p:tagLst>
 </file>
 
 <file path=ppt/tags/tag19.xml><?xml version="1.0" encoding="utf-8"?>
 <p:tagLst xmlns:a="http://schemas.openxmlformats.org/drawingml/2006/main" xmlns:r="http://schemas.openxmlformats.org/officeDocument/2006/relationships" xmlns:p="http://schemas.openxmlformats.org/presentationml/2006/main">
-  <p:tag name="AS_UNIQUEID" val="721"/>
+  <p:tag name="AS_UNIQUEID" val="318"/>
 </p:tagLst>
 </file>
 
 <file path=ppt/tags/tag2.xml><?xml version="1.0" encoding="utf-8"?>
 <p:tagLst xmlns:a="http://schemas.openxmlformats.org/drawingml/2006/main" xmlns:r="http://schemas.openxmlformats.org/officeDocument/2006/relationships" xmlns:p="http://schemas.openxmlformats.org/presentationml/2006/main">
-  <p:tag name="AS_UNIQUEID" val="600"/>
+  <p:tag name="AS_UNIQUEID" val="289"/>
 </p:tagLst>
 </file>
 
 <file path=ppt/tags/tag20.xml><?xml version="1.0" encoding="utf-8"?>
 <p:tagLst xmlns:a="http://schemas.openxmlformats.org/drawingml/2006/main" xmlns:r="http://schemas.openxmlformats.org/officeDocument/2006/relationships" xmlns:p="http://schemas.openxmlformats.org/presentationml/2006/main">
-  <p:tag name="AS_UNIQUEID" val="722"/>
+  <p:tag name="AS_UNIQUEID" val="319"/>
+</p:tagLst>
+</file>
+
+<file path=ppt/tags/tag21.xml><?xml version="1.0" encoding="utf-8"?>
+<p:tagLst xmlns:a="http://schemas.openxmlformats.org/drawingml/2006/main" xmlns:r="http://schemas.openxmlformats.org/officeDocument/2006/relationships" xmlns:p="http://schemas.openxmlformats.org/presentationml/2006/main">
+  <p:tag name="AS_UNIQUEID" val="314"/>
+</p:tagLst>
+</file>
+
+<file path=ppt/tags/tag22.xml><?xml version="1.0" encoding="utf-8"?>
+<p:tagLst xmlns:a="http://schemas.openxmlformats.org/drawingml/2006/main" xmlns:r="http://schemas.openxmlformats.org/officeDocument/2006/relationships" xmlns:p="http://schemas.openxmlformats.org/presentationml/2006/main">
+  <p:tag name="AS_UNIQUEID" val="315"/>
+</p:tagLst>
+</file>
+
+<file path=ppt/tags/tag23.xml><?xml version="1.0" encoding="utf-8"?>
+<p:tagLst xmlns:a="http://schemas.openxmlformats.org/drawingml/2006/main" xmlns:r="http://schemas.openxmlformats.org/officeDocument/2006/relationships" xmlns:p="http://schemas.openxmlformats.org/presentationml/2006/main">
+  <p:tag name="AS_UNIQUEID" val="316"/>
+</p:tagLst>
+</file>
+
+<file path=ppt/tags/tag24.xml><?xml version="1.0" encoding="utf-8"?>
+<p:tagLst xmlns:a="http://schemas.openxmlformats.org/drawingml/2006/main" xmlns:r="http://schemas.openxmlformats.org/officeDocument/2006/relationships" xmlns:p="http://schemas.openxmlformats.org/presentationml/2006/main">
+  <p:tag name="AS_UNIQUEID" val="310"/>
+</p:tagLst>
+</file>
+
+<file path=ppt/tags/tag25.xml><?xml version="1.0" encoding="utf-8"?>
+<p:tagLst xmlns:a="http://schemas.openxmlformats.org/drawingml/2006/main" xmlns:r="http://schemas.openxmlformats.org/officeDocument/2006/relationships" xmlns:p="http://schemas.openxmlformats.org/presentationml/2006/main">
+  <p:tag name="AS_UNIQUEID" val="311"/>
+</p:tagLst>
+</file>
+
+<file path=ppt/tags/tag26.xml><?xml version="1.0" encoding="utf-8"?>
+<p:tagLst xmlns:a="http://schemas.openxmlformats.org/drawingml/2006/main" xmlns:r="http://schemas.openxmlformats.org/officeDocument/2006/relationships" xmlns:p="http://schemas.openxmlformats.org/presentationml/2006/main">
+  <p:tag name="AS_UNIQUEID" val="312"/>
+</p:tagLst>
+</file>
+
+<file path=ppt/tags/tag27.xml><?xml version="1.0" encoding="utf-8"?>
+<p:tagLst xmlns:a="http://schemas.openxmlformats.org/drawingml/2006/main" xmlns:r="http://schemas.openxmlformats.org/officeDocument/2006/relationships" xmlns:p="http://schemas.openxmlformats.org/presentationml/2006/main">
+  <p:tag name="AS_UNIQUEID" val="313"/>
+</p:tagLst>
+</file>
+
+<file path=ppt/tags/tag28.xml><?xml version="1.0" encoding="utf-8"?>
+<p:tagLst xmlns:a="http://schemas.openxmlformats.org/drawingml/2006/main" xmlns:r="http://schemas.openxmlformats.org/officeDocument/2006/relationships" xmlns:p="http://schemas.openxmlformats.org/presentationml/2006/main">
+  <p:tag name="AS_UNIQUEID" val="323"/>
+</p:tagLst>
+</file>
+
+<file path=ppt/tags/tag29.xml><?xml version="1.0" encoding="utf-8"?>
+<p:tagLst xmlns:a="http://schemas.openxmlformats.org/drawingml/2006/main" xmlns:r="http://schemas.openxmlformats.org/officeDocument/2006/relationships" xmlns:p="http://schemas.openxmlformats.org/presentationml/2006/main">
+  <p:tag name="AS_UNIQUEID" val="324"/>
 </p:tagLst>
 </file>
 
 <file path=ppt/tags/tag3.xml><?xml version="1.0" encoding="utf-8"?>
 <p:tagLst xmlns:a="http://schemas.openxmlformats.org/drawingml/2006/main" xmlns:r="http://schemas.openxmlformats.org/officeDocument/2006/relationships" xmlns:p="http://schemas.openxmlformats.org/presentationml/2006/main">
-  <p:tag name="AS_UNIQUEID" val="705"/>
+  <p:tag name="AS_UNIQUEID" val="326"/>
+</p:tagLst>
+</file>
+
+<file path=ppt/tags/tag30.xml><?xml version="1.0" encoding="utf-8"?>
+<p:tagLst xmlns:a="http://schemas.openxmlformats.org/drawingml/2006/main" xmlns:r="http://schemas.openxmlformats.org/officeDocument/2006/relationships" xmlns:p="http://schemas.openxmlformats.org/presentationml/2006/main">
+  <p:tag name="AS_UNIQUEID" val="325"/>
+</p:tagLst>
+</file>
+
+<file path=ppt/tags/tag31.xml><?xml version="1.0" encoding="utf-8"?>
+<p:tagLst xmlns:a="http://schemas.openxmlformats.org/drawingml/2006/main" xmlns:r="http://schemas.openxmlformats.org/officeDocument/2006/relationships" xmlns:p="http://schemas.openxmlformats.org/presentationml/2006/main">
+  <p:tag name="AS_UNIQUEID" val="320"/>
+</p:tagLst>
+</file>
+
+<file path=ppt/tags/tag32.xml><?xml version="1.0" encoding="utf-8"?>
+<p:tagLst xmlns:a="http://schemas.openxmlformats.org/drawingml/2006/main" xmlns:r="http://schemas.openxmlformats.org/officeDocument/2006/relationships" xmlns:p="http://schemas.openxmlformats.org/presentationml/2006/main">
+  <p:tag name="AS_UNIQUEID" val="321"/>
+</p:tagLst>
+</file>
+
+<file path=ppt/tags/tag33.xml><?xml version="1.0" encoding="utf-8"?>
+<p:tagLst xmlns:a="http://schemas.openxmlformats.org/drawingml/2006/main" xmlns:r="http://schemas.openxmlformats.org/officeDocument/2006/relationships" xmlns:p="http://schemas.openxmlformats.org/presentationml/2006/main">
+  <p:tag name="AS_UNIQUEID" val="322"/>
+</p:tagLst>
+</file>
+
+<file path=ppt/tags/tag34.xml><?xml version="1.0" encoding="utf-8"?>
+<p:tagLst xmlns:a="http://schemas.openxmlformats.org/drawingml/2006/main" xmlns:r="http://schemas.openxmlformats.org/officeDocument/2006/relationships" xmlns:p="http://schemas.openxmlformats.org/presentationml/2006/main">
+  <p:tag name="AS_UNIQUEID" val="670"/>
+</p:tagLst>
+</file>
+
+<file path=ppt/tags/tag35.xml><?xml version="1.0" encoding="utf-8"?>
+<p:tagLst xmlns:a="http://schemas.openxmlformats.org/drawingml/2006/main" xmlns:r="http://schemas.openxmlformats.org/officeDocument/2006/relationships" xmlns:p="http://schemas.openxmlformats.org/presentationml/2006/main">
+  <p:tag name="AS_UNIQUEID" val="671"/>
+</p:tagLst>
+</file>
+
+<file path=ppt/tags/tag36.xml><?xml version="1.0" encoding="utf-8"?>
+<p:tagLst xmlns:a="http://schemas.openxmlformats.org/drawingml/2006/main" xmlns:r="http://schemas.openxmlformats.org/officeDocument/2006/relationships" xmlns:p="http://schemas.openxmlformats.org/presentationml/2006/main">
+  <p:tag name="AS_UNIQUEID" val="672"/>
 </p:tagLst>
 </file>
 
 <file path=ppt/tags/tag4.xml><?xml version="1.0" encoding="utf-8"?>
 <p:tagLst xmlns:a="http://schemas.openxmlformats.org/drawingml/2006/main" xmlns:r="http://schemas.openxmlformats.org/officeDocument/2006/relationships" xmlns:p="http://schemas.openxmlformats.org/presentationml/2006/main">
-  <p:tag name="AS_UNIQUEID" val="706"/>
+  <p:tag name="AS_UNIQUEID" val="293"/>
 </p:tagLst>
 </file>
 
 <file path=ppt/tags/tag5.xml><?xml version="1.0" encoding="utf-8"?>
 <p:tagLst xmlns:a="http://schemas.openxmlformats.org/drawingml/2006/main" xmlns:r="http://schemas.openxmlformats.org/officeDocument/2006/relationships" xmlns:p="http://schemas.openxmlformats.org/presentationml/2006/main">
-  <p:tag name="AS_UNIQUEID" val="707"/>
+  <p:tag name="AS_UNIQUEID" val="327"/>
 </p:tagLst>
 </file>
 
 <file path=ppt/tags/tag6.xml><?xml version="1.0" encoding="utf-8"?>
 <p:tagLst xmlns:a="http://schemas.openxmlformats.org/drawingml/2006/main" xmlns:r="http://schemas.openxmlformats.org/officeDocument/2006/relationships" xmlns:p="http://schemas.openxmlformats.org/presentationml/2006/main">
-  <p:tag name="AS_UNIQUEID" val="0"/>
+  <p:tag name="AS_UNIQUEID" val="297"/>
 </p:tagLst>
 </file>
 
 <file path=ppt/tags/tag7.xml><?xml version="1.0" encoding="utf-8"?>
 <p:tagLst xmlns:a="http://schemas.openxmlformats.org/drawingml/2006/main" xmlns:r="http://schemas.openxmlformats.org/officeDocument/2006/relationships" xmlns:p="http://schemas.openxmlformats.org/presentationml/2006/main">
-  <p:tag name="AS_UNIQUEID" val="1"/>
+  <p:tag name="AS_UNIQUEID" val="328"/>
 </p:tagLst>
 </file>
 
 <file path=ppt/tags/tag8.xml><?xml version="1.0" encoding="utf-8"?>
 <p:tagLst xmlns:a="http://schemas.openxmlformats.org/drawingml/2006/main" xmlns:r="http://schemas.openxmlformats.org/officeDocument/2006/relationships" xmlns:p="http://schemas.openxmlformats.org/presentationml/2006/main">
-  <p:tag name="AS_UNIQUEID" val="710"/>
+  <p:tag name="AS_UNIQUEID" val="329"/>
 </p:tagLst>
 </file>
 
 <file path=ppt/tags/tag9.xml><?xml version="1.0" encoding="utf-8"?>
 <p:tagLst xmlns:a="http://schemas.openxmlformats.org/drawingml/2006/main" xmlns:r="http://schemas.openxmlformats.org/officeDocument/2006/relationships" xmlns:p="http://schemas.openxmlformats.org/presentationml/2006/main">
-  <p:tag name="AS_UNIQUEID" val="711"/>
+  <p:tag name="AS_UNIQUEID" val="305"/>
 </p:tagLst>
 </file>
 
